--- a/Final/Figures/A_C_transeverse.pptx
+++ b/Final/Figures/A_C_transeverse.pptx
@@ -6,6 +6,7 @@
   </p:sldMasterIdLst>
   <p:sldIdLst>
     <p:sldId id="256" r:id="rId2"/>
+    <p:sldId id="257" r:id="rId3"/>
   </p:sldIdLst>
   <p:sldSz cx="9906000" cy="4589463"/>
   <p:notesSz cx="6858000" cy="9144000"/>
@@ -243,7 +244,7 @@
           <a:p>
             <a:fld id="{CC6FB895-B65F-4EA9-9907-69D32227E72B}" type="datetimeFigureOut">
               <a:rPr lang="zh-TW" altLang="en-US" smtClean="0"/>
-              <a:t>2026/6/18</a:t>
+              <a:t>2026/7/2</a:t>
             </a:fld>
             <a:endParaRPr lang="zh-TW" altLang="en-US"/>
           </a:p>
@@ -413,7 +414,7 @@
           <a:p>
             <a:fld id="{CC6FB895-B65F-4EA9-9907-69D32227E72B}" type="datetimeFigureOut">
               <a:rPr lang="zh-TW" altLang="en-US" smtClean="0"/>
-              <a:t>2026/6/18</a:t>
+              <a:t>2026/7/2</a:t>
             </a:fld>
             <a:endParaRPr lang="zh-TW" altLang="en-US"/>
           </a:p>
@@ -593,7 +594,7 @@
           <a:p>
             <a:fld id="{CC6FB895-B65F-4EA9-9907-69D32227E72B}" type="datetimeFigureOut">
               <a:rPr lang="zh-TW" altLang="en-US" smtClean="0"/>
-              <a:t>2026/6/18</a:t>
+              <a:t>2026/7/2</a:t>
             </a:fld>
             <a:endParaRPr lang="zh-TW" altLang="en-US"/>
           </a:p>
@@ -763,7 +764,7 @@
           <a:p>
             <a:fld id="{CC6FB895-B65F-4EA9-9907-69D32227E72B}" type="datetimeFigureOut">
               <a:rPr lang="zh-TW" altLang="en-US" smtClean="0"/>
-              <a:t>2026/6/18</a:t>
+              <a:t>2026/7/2</a:t>
             </a:fld>
             <a:endParaRPr lang="zh-TW" altLang="en-US"/>
           </a:p>
@@ -1009,7 +1010,7 @@
           <a:p>
             <a:fld id="{CC6FB895-B65F-4EA9-9907-69D32227E72B}" type="datetimeFigureOut">
               <a:rPr lang="zh-TW" altLang="en-US" smtClean="0"/>
-              <a:t>2026/6/18</a:t>
+              <a:t>2026/7/2</a:t>
             </a:fld>
             <a:endParaRPr lang="zh-TW" altLang="en-US"/>
           </a:p>
@@ -1241,7 +1242,7 @@
           <a:p>
             <a:fld id="{CC6FB895-B65F-4EA9-9907-69D32227E72B}" type="datetimeFigureOut">
               <a:rPr lang="zh-TW" altLang="en-US" smtClean="0"/>
-              <a:t>2026/6/18</a:t>
+              <a:t>2026/7/2</a:t>
             </a:fld>
             <a:endParaRPr lang="zh-TW" altLang="en-US"/>
           </a:p>
@@ -1608,7 +1609,7 @@
           <a:p>
             <a:fld id="{CC6FB895-B65F-4EA9-9907-69D32227E72B}" type="datetimeFigureOut">
               <a:rPr lang="zh-TW" altLang="en-US" smtClean="0"/>
-              <a:t>2026/6/18</a:t>
+              <a:t>2026/7/2</a:t>
             </a:fld>
             <a:endParaRPr lang="zh-TW" altLang="en-US"/>
           </a:p>
@@ -1726,7 +1727,7 @@
           <a:p>
             <a:fld id="{CC6FB895-B65F-4EA9-9907-69D32227E72B}" type="datetimeFigureOut">
               <a:rPr lang="zh-TW" altLang="en-US" smtClean="0"/>
-              <a:t>2026/6/18</a:t>
+              <a:t>2026/7/2</a:t>
             </a:fld>
             <a:endParaRPr lang="zh-TW" altLang="en-US"/>
           </a:p>
@@ -1821,7 +1822,7 @@
           <a:p>
             <a:fld id="{CC6FB895-B65F-4EA9-9907-69D32227E72B}" type="datetimeFigureOut">
               <a:rPr lang="zh-TW" altLang="en-US" smtClean="0"/>
-              <a:t>2026/6/18</a:t>
+              <a:t>2026/7/2</a:t>
             </a:fld>
             <a:endParaRPr lang="zh-TW" altLang="en-US"/>
           </a:p>
@@ -2098,7 +2099,7 @@
           <a:p>
             <a:fld id="{CC6FB895-B65F-4EA9-9907-69D32227E72B}" type="datetimeFigureOut">
               <a:rPr lang="zh-TW" altLang="en-US" smtClean="0"/>
-              <a:t>2026/6/18</a:t>
+              <a:t>2026/7/2</a:t>
             </a:fld>
             <a:endParaRPr lang="zh-TW" altLang="en-US"/>
           </a:p>
@@ -2355,7 +2356,7 @@
           <a:p>
             <a:fld id="{CC6FB895-B65F-4EA9-9907-69D32227E72B}" type="datetimeFigureOut">
               <a:rPr lang="zh-TW" altLang="en-US" smtClean="0"/>
-              <a:t>2026/6/18</a:t>
+              <a:t>2026/7/2</a:t>
             </a:fld>
             <a:endParaRPr lang="zh-TW" altLang="en-US"/>
           </a:p>
@@ -2568,7 +2569,7 @@
           <a:p>
             <a:fld id="{CC6FB895-B65F-4EA9-9907-69D32227E72B}" type="datetimeFigureOut">
               <a:rPr lang="zh-TW" altLang="en-US" smtClean="0"/>
-              <a:t>2026/6/18</a:t>
+              <a:t>2026/7/2</a:t>
             </a:fld>
             <a:endParaRPr lang="zh-TW" altLang="en-US"/>
           </a:p>
@@ -3575,8 +3576,8 @@
             </p:sp>
           </mc:Fallback>
         </mc:AlternateContent>
-        <mc:AlternateContent xmlns:mc="http://schemas.openxmlformats.org/markup-compatibility/2006">
-          <mc:Choice xmlns:a14="http://schemas.microsoft.com/office/drawing/2010/main" Requires="a14">
+        <mc:AlternateContent xmlns:mc="http://schemas.openxmlformats.org/markup-compatibility/2006" xmlns:a14="http://schemas.microsoft.com/office/drawing/2010/main">
+          <mc:Choice Requires="a14">
             <p:sp>
               <p:nvSpPr>
                 <p:cNvPr id="50" name="矩形 49">
@@ -3628,7 +3629,7 @@
               </p:txBody>
             </p:sp>
           </mc:Choice>
-          <mc:Fallback>
+          <mc:Fallback xmlns="">
             <p:sp>
               <p:nvSpPr>
                 <p:cNvPr id="50" name="矩形 49">
@@ -4188,8 +4189,8 @@
             </p:sp>
           </mc:Fallback>
         </mc:AlternateContent>
-        <mc:AlternateContent xmlns:mc="http://schemas.openxmlformats.org/markup-compatibility/2006">
-          <mc:Choice xmlns:a14="http://schemas.microsoft.com/office/drawing/2010/main" Requires="a14">
+        <mc:AlternateContent xmlns:mc="http://schemas.openxmlformats.org/markup-compatibility/2006" xmlns:a14="http://schemas.microsoft.com/office/drawing/2010/main">
+          <mc:Choice Requires="a14">
             <p:sp>
               <p:nvSpPr>
                 <p:cNvPr id="57" name="矩形 56">
@@ -4241,7 +4242,7 @@
               </p:txBody>
             </p:sp>
           </mc:Choice>
-          <mc:Fallback>
+          <mc:Fallback xmlns="">
             <p:sp>
               <p:nvSpPr>
                 <p:cNvPr id="57" name="矩形 56">
@@ -5469,6 +5470,3017 @@
 </p:sld>
 </file>
 
+<file path=ppt/slides/slide2.xml><?xml version="1.0" encoding="utf-8"?>
+<p:sld xmlns:a="http://schemas.openxmlformats.org/drawingml/2006/main" xmlns:r="http://schemas.openxmlformats.org/officeDocument/2006/relationships" xmlns:p="http://schemas.openxmlformats.org/presentationml/2006/main" show="0">
+  <p:cSld>
+    <p:spTree>
+      <p:nvGrpSpPr>
+        <p:cNvPr id="1" name=""/>
+        <p:cNvGrpSpPr/>
+        <p:nvPr/>
+      </p:nvGrpSpPr>
+      <p:grpSpPr>
+        <a:xfrm>
+          <a:off x="0" y="0"/>
+          <a:ext cx="0" cy="0"/>
+          <a:chOff x="0" y="0"/>
+          <a:chExt cx="0" cy="0"/>
+        </a:xfrm>
+      </p:grpSpPr>
+      <p:pic>
+        <p:nvPicPr>
+          <p:cNvPr id="55" name="圖片 54">
+            <a:extLst>
+              <a:ext uri="{FF2B5EF4-FFF2-40B4-BE49-F238E27FC236}">
+                <a16:creationId xmlns:a16="http://schemas.microsoft.com/office/drawing/2014/main" id="{D788E2B5-293D-4EDC-AE5C-CB1993B87817}"/>
+              </a:ext>
+            </a:extLst>
+          </p:cNvPr>
+          <p:cNvPicPr>
+            <a:picLocks noChangeAspect="1"/>
+          </p:cNvPicPr>
+          <p:nvPr/>
+        </p:nvPicPr>
+        <p:blipFill rotWithShape="1">
+          <a:blip r:embed="rId2">
+            <a:clrChange>
+              <a:clrFrom>
+                <a:srgbClr val="FFFFFF"/>
+              </a:clrFrom>
+              <a:clrTo>
+                <a:srgbClr val="FFFFFF">
+                  <a:alpha val="0"/>
+                </a:srgbClr>
+              </a:clrTo>
+            </a:clrChange>
+            <a:extLst>
+              <a:ext uri="{28A0092B-C50C-407E-A947-70E740481C1C}">
+                <a14:useLocalDpi xmlns:a14="http://schemas.microsoft.com/office/drawing/2010/main" val="0"/>
+              </a:ext>
+            </a:extLst>
+          </a:blip>
+          <a:srcRect l="17606" r="68022"/>
+          <a:stretch/>
+        </p:blipFill>
+        <p:spPr>
+          <a:xfrm>
+            <a:off x="2603392" y="684093"/>
+            <a:ext cx="1429966" cy="1658288"/>
+          </a:xfrm>
+          <a:prstGeom prst="rect">
+            <a:avLst/>
+          </a:prstGeom>
+        </p:spPr>
+      </p:pic>
+      <p:pic>
+        <p:nvPicPr>
+          <p:cNvPr id="58" name="圖片 57">
+            <a:extLst>
+              <a:ext uri="{FF2B5EF4-FFF2-40B4-BE49-F238E27FC236}">
+                <a16:creationId xmlns:a16="http://schemas.microsoft.com/office/drawing/2014/main" id="{BE59FA60-C168-4DEF-96C3-263EF39EDA0B}"/>
+              </a:ext>
+            </a:extLst>
+          </p:cNvPr>
+          <p:cNvPicPr>
+            <a:picLocks noChangeAspect="1"/>
+          </p:cNvPicPr>
+          <p:nvPr/>
+        </p:nvPicPr>
+        <p:blipFill rotWithShape="1">
+          <a:blip r:embed="rId3">
+            <a:clrChange>
+              <a:clrFrom>
+                <a:srgbClr val="FFFFFF"/>
+              </a:clrFrom>
+              <a:clrTo>
+                <a:srgbClr val="FFFFFF">
+                  <a:alpha val="0"/>
+                </a:srgbClr>
+              </a:clrTo>
+            </a:clrChange>
+            <a:extLst>
+              <a:ext uri="{28A0092B-C50C-407E-A947-70E740481C1C}">
+                <a14:useLocalDpi xmlns:a14="http://schemas.microsoft.com/office/drawing/2010/main" val="0"/>
+              </a:ext>
+            </a:extLst>
+          </a:blip>
+          <a:srcRect l="17410" r="68218"/>
+          <a:stretch/>
+        </p:blipFill>
+        <p:spPr>
+          <a:xfrm>
+            <a:off x="2613120" y="2583668"/>
+            <a:ext cx="1429966" cy="1658288"/>
+          </a:xfrm>
+          <a:prstGeom prst="rect">
+            <a:avLst/>
+          </a:prstGeom>
+        </p:spPr>
+      </p:pic>
+      <p:sp>
+        <p:nvSpPr>
+          <p:cNvPr id="45" name="矩形: 圓角 44">
+            <a:extLst>
+              <a:ext uri="{FF2B5EF4-FFF2-40B4-BE49-F238E27FC236}">
+                <a16:creationId xmlns:a16="http://schemas.microsoft.com/office/drawing/2014/main" id="{441AAA92-0554-47A1-8611-1C1C012F694C}"/>
+              </a:ext>
+            </a:extLst>
+          </p:cNvPr>
+          <p:cNvSpPr/>
+          <p:nvPr/>
+        </p:nvSpPr>
+        <p:spPr>
+          <a:xfrm>
+            <a:off x="1307765" y="764825"/>
+            <a:ext cx="6717600" cy="1458000"/>
+          </a:xfrm>
+          <a:prstGeom prst="roundRect">
+            <a:avLst>
+              <a:gd name="adj" fmla="val 6163"/>
+            </a:avLst>
+          </a:prstGeom>
+          <a:noFill/>
+          <a:ln w="9525" cap="flat" cmpd="sng" algn="ctr">
+            <a:solidFill>
+              <a:schemeClr val="accent1"/>
+            </a:solidFill>
+            <a:prstDash val="solid"/>
+            <a:round/>
+            <a:headEnd type="none" w="med" len="med"/>
+            <a:tailEnd type="none" w="med" len="med"/>
+          </a:ln>
+        </p:spPr>
+        <p:style>
+          <a:lnRef idx="0">
+            <a:scrgbClr r="0" g="0" b="0"/>
+          </a:lnRef>
+          <a:fillRef idx="0">
+            <a:scrgbClr r="0" g="0" b="0"/>
+          </a:fillRef>
+          <a:effectRef idx="0">
+            <a:scrgbClr r="0" g="0" b="0"/>
+          </a:effectRef>
+          <a:fontRef idx="minor">
+            <a:schemeClr val="accent1"/>
+          </a:fontRef>
+        </p:style>
+        <p:txBody>
+          <a:bodyPr rot="0" spcFirstLastPara="0" vertOverflow="overflow" horzOverflow="overflow" vert="horz" wrap="square" lIns="91440" tIns="45720" rIns="91440" bIns="45720" numCol="1" spcCol="0" rtlCol="0" fromWordArt="0" anchor="ctr" anchorCtr="0" forceAA="0" compatLnSpc="1">
+            <a:prstTxWarp prst="textNoShape">
+              <a:avLst/>
+            </a:prstTxWarp>
+            <a:noAutofit/>
+          </a:bodyPr>
+          <a:lstStyle/>
+          <a:p>
+            <a:pPr algn="ctr"/>
+            <a:endParaRPr lang="zh-TW" altLang="en-US" sz="1900" dirty="0">
+              <a:latin typeface="Times New Roman" panose="02020603050405020304" pitchFamily="18" charset="0"/>
+              <a:cs typeface="Times New Roman" panose="02020603050405020304" pitchFamily="18" charset="0"/>
+            </a:endParaRPr>
+          </a:p>
+        </p:txBody>
+      </p:sp>
+      <p:pic>
+        <p:nvPicPr>
+          <p:cNvPr id="107" name="圖片 106">
+            <a:extLst>
+              <a:ext uri="{FF2B5EF4-FFF2-40B4-BE49-F238E27FC236}">
+                <a16:creationId xmlns:a16="http://schemas.microsoft.com/office/drawing/2014/main" id="{FDF85A7A-65CD-4331-BE69-08EF74276B4E}"/>
+              </a:ext>
+            </a:extLst>
+          </p:cNvPr>
+          <p:cNvPicPr>
+            <a:picLocks noChangeAspect="1"/>
+          </p:cNvPicPr>
+          <p:nvPr/>
+        </p:nvPicPr>
+        <p:blipFill rotWithShape="1">
+          <a:blip r:embed="rId2">
+            <a:clrChange>
+              <a:clrFrom>
+                <a:srgbClr val="FFFFFF"/>
+              </a:clrFrom>
+              <a:clrTo>
+                <a:srgbClr val="FFFFFF">
+                  <a:alpha val="0"/>
+                </a:srgbClr>
+              </a:clrTo>
+            </a:clrChange>
+            <a:extLst>
+              <a:ext uri="{28A0092B-C50C-407E-A947-70E740481C1C}">
+                <a14:useLocalDpi xmlns:a14="http://schemas.microsoft.com/office/drawing/2010/main" val="0"/>
+              </a:ext>
+            </a:extLst>
+          </a:blip>
+          <a:srcRect r="84838"/>
+          <a:stretch/>
+        </p:blipFill>
+        <p:spPr>
+          <a:xfrm>
+            <a:off x="1182402" y="684093"/>
+            <a:ext cx="1508539" cy="1658288"/>
+          </a:xfrm>
+          <a:prstGeom prst="rect">
+            <a:avLst/>
+          </a:prstGeom>
+        </p:spPr>
+      </p:pic>
+      <p:pic>
+        <p:nvPicPr>
+          <p:cNvPr id="108" name="圖片 107">
+            <a:extLst>
+              <a:ext uri="{FF2B5EF4-FFF2-40B4-BE49-F238E27FC236}">
+                <a16:creationId xmlns:a16="http://schemas.microsoft.com/office/drawing/2014/main" id="{D9694FC0-CF9E-4E7D-B832-4E29AD164050}"/>
+              </a:ext>
+            </a:extLst>
+          </p:cNvPr>
+          <p:cNvPicPr>
+            <a:picLocks noChangeAspect="1"/>
+          </p:cNvPicPr>
+          <p:nvPr/>
+        </p:nvPicPr>
+        <p:blipFill rotWithShape="1">
+          <a:blip r:embed="rId3">
+            <a:clrChange>
+              <a:clrFrom>
+                <a:srgbClr val="FFFFFF"/>
+              </a:clrFrom>
+              <a:clrTo>
+                <a:srgbClr val="FFFFFF">
+                  <a:alpha val="0"/>
+                </a:srgbClr>
+              </a:clrTo>
+            </a:clrChange>
+            <a:extLst>
+              <a:ext uri="{28A0092B-C50C-407E-A947-70E740481C1C}">
+                <a14:useLocalDpi xmlns:a14="http://schemas.microsoft.com/office/drawing/2010/main" val="0"/>
+              </a:ext>
+            </a:extLst>
+          </a:blip>
+          <a:srcRect r="85230"/>
+          <a:stretch/>
+        </p:blipFill>
+        <p:spPr>
+          <a:xfrm>
+            <a:off x="1221315" y="2583668"/>
+            <a:ext cx="1469628" cy="1658288"/>
+          </a:xfrm>
+          <a:prstGeom prst="rect">
+            <a:avLst/>
+          </a:prstGeom>
+        </p:spPr>
+      </p:pic>
+      <p:sp>
+        <p:nvSpPr>
+          <p:cNvPr id="44" name="矩形: 圓角 43">
+            <a:extLst>
+              <a:ext uri="{FF2B5EF4-FFF2-40B4-BE49-F238E27FC236}">
+                <a16:creationId xmlns:a16="http://schemas.microsoft.com/office/drawing/2014/main" id="{DC81CB28-05E7-4299-B7F1-04C2533125DA}"/>
+              </a:ext>
+            </a:extLst>
+          </p:cNvPr>
+          <p:cNvSpPr/>
+          <p:nvPr/>
+        </p:nvSpPr>
+        <p:spPr>
+          <a:xfrm>
+            <a:off x="1307765" y="2691110"/>
+            <a:ext cx="6717600" cy="1458000"/>
+          </a:xfrm>
+          <a:prstGeom prst="roundRect">
+            <a:avLst>
+              <a:gd name="adj" fmla="val 6163"/>
+            </a:avLst>
+          </a:prstGeom>
+          <a:noFill/>
+          <a:ln w="9525" cap="flat" cmpd="sng" algn="ctr">
+            <a:solidFill>
+              <a:schemeClr val="accent2"/>
+            </a:solidFill>
+            <a:prstDash val="solid"/>
+            <a:round/>
+            <a:headEnd type="none" w="med" len="med"/>
+            <a:tailEnd type="none" w="med" len="med"/>
+          </a:ln>
+        </p:spPr>
+        <p:style>
+          <a:lnRef idx="0">
+            <a:scrgbClr r="0" g="0" b="0"/>
+          </a:lnRef>
+          <a:fillRef idx="0">
+            <a:scrgbClr r="0" g="0" b="0"/>
+          </a:fillRef>
+          <a:effectRef idx="0">
+            <a:scrgbClr r="0" g="0" b="0"/>
+          </a:effectRef>
+          <a:fontRef idx="minor">
+            <a:schemeClr val="accent2"/>
+          </a:fontRef>
+        </p:style>
+        <p:txBody>
+          <a:bodyPr rot="0" spcFirstLastPara="0" vertOverflow="overflow" horzOverflow="overflow" vert="horz" wrap="square" lIns="91440" tIns="45720" rIns="91440" bIns="45720" numCol="1" spcCol="0" rtlCol="0" fromWordArt="0" anchor="ctr" anchorCtr="0" forceAA="0" compatLnSpc="1">
+            <a:prstTxWarp prst="textNoShape">
+              <a:avLst/>
+            </a:prstTxWarp>
+            <a:noAutofit/>
+          </a:bodyPr>
+          <a:lstStyle/>
+          <a:p>
+            <a:pPr algn="ctr"/>
+            <a:endParaRPr lang="zh-TW" altLang="en-US" sz="1900" dirty="0">
+              <a:latin typeface="Times New Roman" panose="02020603050405020304" pitchFamily="18" charset="0"/>
+              <a:cs typeface="Times New Roman" panose="02020603050405020304" pitchFamily="18" charset="0"/>
+            </a:endParaRPr>
+          </a:p>
+        </p:txBody>
+      </p:sp>
+      <mc:AlternateContent xmlns:mc="http://schemas.openxmlformats.org/markup-compatibility/2006">
+        <mc:Choice xmlns:a14="http://schemas.microsoft.com/office/drawing/2010/main" Requires="a14">
+          <p:sp>
+            <p:nvSpPr>
+              <p:cNvPr id="46" name="矩形 45">
+                <a:extLst>
+                  <a:ext uri="{FF2B5EF4-FFF2-40B4-BE49-F238E27FC236}">
+                    <a16:creationId xmlns:a16="http://schemas.microsoft.com/office/drawing/2014/main" id="{2068CE7F-6CD8-45E2-B176-93658BA0F5BA}"/>
+                  </a:ext>
+                </a:extLst>
+              </p:cNvPr>
+              <p:cNvSpPr/>
+              <p:nvPr/>
+            </p:nvSpPr>
+            <p:spPr>
+              <a:xfrm>
+                <a:off x="1463559" y="1800095"/>
+                <a:ext cx="783035" cy="343171"/>
+              </a:xfrm>
+              <a:prstGeom prst="rect">
+                <a:avLst/>
+              </a:prstGeom>
+            </p:spPr>
+            <p:txBody>
+              <a:bodyPr wrap="none">
+                <a:spAutoFit/>
+              </a:bodyPr>
+              <a:lstStyle/>
+              <a:p>
+                <a:pPr/>
+                <a14:m>
+                  <m:oMathPara xmlns:m="http://schemas.openxmlformats.org/officeDocument/2006/math">
+                    <m:oMathParaPr>
+                      <m:jc m:val="centerGroup"/>
+                    </m:oMathParaPr>
+                    <m:oMath xmlns:m="http://schemas.openxmlformats.org/officeDocument/2006/math">
+                      <m:r>
+                        <a:rPr lang="en-US" altLang="zh-TW" sz="1630" i="1">
+                          <a:latin typeface="Cambria Math" panose="02040503050406030204" pitchFamily="18" charset="0"/>
+                        </a:rPr>
+                        <m:t>0.1 </m:t>
+                      </m:r>
+                      <m:sSub>
+                        <m:sSubPr>
+                          <m:ctrlPr>
+                            <a:rPr lang="en-US" altLang="zh-TW" sz="1630" i="1">
+                              <a:latin typeface="Cambria Math" panose="02040503050406030204" pitchFamily="18" charset="0"/>
+                            </a:rPr>
+                          </m:ctrlPr>
+                        </m:sSubPr>
+                        <m:e>
+                          <m:r>
+                            <a:rPr lang="en-US" altLang="zh-TW" sz="1630" i="1">
+                              <a:latin typeface="Cambria Math" panose="02040503050406030204" pitchFamily="18" charset="0"/>
+                            </a:rPr>
+                            <m:t>𝑄</m:t>
+                          </m:r>
+                        </m:e>
+                        <m:sub>
+                          <m:r>
+                            <a:rPr lang="en-US" altLang="zh-TW" sz="1630" i="1">
+                              <a:latin typeface="Cambria Math" panose="02040503050406030204" pitchFamily="18" charset="0"/>
+                            </a:rPr>
+                            <m:t>𝑐</m:t>
+                          </m:r>
+                        </m:sub>
+                      </m:sSub>
+                    </m:oMath>
+                  </m:oMathPara>
+                </a14:m>
+                <a:endParaRPr lang="zh-TW" altLang="en-US" sz="1630" dirty="0">
+                  <a:latin typeface="Times New Roman" panose="02020603050405020304" pitchFamily="18" charset="0"/>
+                  <a:cs typeface="Times New Roman" panose="02020603050405020304" pitchFamily="18" charset="0"/>
+                </a:endParaRPr>
+              </a:p>
+            </p:txBody>
+          </p:sp>
+        </mc:Choice>
+        <mc:Fallback>
+          <p:sp>
+            <p:nvSpPr>
+              <p:cNvPr id="46" name="矩形 45">
+                <a:extLst>
+                  <a:ext uri="{FF2B5EF4-FFF2-40B4-BE49-F238E27FC236}">
+                    <a16:creationId xmlns:a16="http://schemas.microsoft.com/office/drawing/2014/main" id="{2068CE7F-6CD8-45E2-B176-93658BA0F5BA}"/>
+                  </a:ext>
+                </a:extLst>
+              </p:cNvPr>
+              <p:cNvSpPr>
+                <a:spLocks noRot="1" noChangeAspect="1" noMove="1" noResize="1" noEditPoints="1" noAdjustHandles="1" noChangeArrowheads="1" noChangeShapeType="1" noTextEdit="1"/>
+              </p:cNvSpPr>
+              <p:nvPr/>
+            </p:nvSpPr>
+            <p:spPr>
+              <a:xfrm>
+                <a:off x="1463559" y="1800095"/>
+                <a:ext cx="783035" cy="343171"/>
+              </a:xfrm>
+              <a:prstGeom prst="rect">
+                <a:avLst/>
+              </a:prstGeom>
+              <a:blipFill>
+                <a:blip r:embed="rId4"/>
+                <a:stretch>
+                  <a:fillRect b="-8772"/>
+                </a:stretch>
+              </a:blipFill>
+            </p:spPr>
+            <p:txBody>
+              <a:bodyPr/>
+              <a:lstStyle/>
+              <a:p>
+                <a:r>
+                  <a:rPr lang="zh-TW" altLang="en-US">
+                    <a:noFill/>
+                  </a:rPr>
+                  <a:t> </a:t>
+                </a:r>
+              </a:p>
+            </p:txBody>
+          </p:sp>
+        </mc:Fallback>
+      </mc:AlternateContent>
+      <mc:AlternateContent xmlns:mc="http://schemas.openxmlformats.org/markup-compatibility/2006">
+        <mc:Choice xmlns:a14="http://schemas.microsoft.com/office/drawing/2010/main" Requires="a14">
+          <p:sp>
+            <p:nvSpPr>
+              <p:cNvPr id="53" name="矩形 52">
+                <a:extLst>
+                  <a:ext uri="{FF2B5EF4-FFF2-40B4-BE49-F238E27FC236}">
+                    <a16:creationId xmlns:a16="http://schemas.microsoft.com/office/drawing/2014/main" id="{D8163A59-21D2-4AEC-A55C-42C7FC0D3453}"/>
+                  </a:ext>
+                </a:extLst>
+              </p:cNvPr>
+              <p:cNvSpPr/>
+              <p:nvPr/>
+            </p:nvSpPr>
+            <p:spPr>
+              <a:xfrm>
+                <a:off x="1434376" y="3712447"/>
+                <a:ext cx="783035" cy="343171"/>
+              </a:xfrm>
+              <a:prstGeom prst="rect">
+                <a:avLst/>
+              </a:prstGeom>
+            </p:spPr>
+            <p:txBody>
+              <a:bodyPr wrap="none">
+                <a:spAutoFit/>
+              </a:bodyPr>
+              <a:lstStyle/>
+              <a:p>
+                <a:pPr/>
+                <a14:m>
+                  <m:oMathPara xmlns:m="http://schemas.openxmlformats.org/officeDocument/2006/math">
+                    <m:oMathParaPr>
+                      <m:jc m:val="centerGroup"/>
+                    </m:oMathParaPr>
+                    <m:oMath xmlns:m="http://schemas.openxmlformats.org/officeDocument/2006/math">
+                      <m:r>
+                        <a:rPr lang="en-US" altLang="zh-TW" sz="1630" i="1">
+                          <a:latin typeface="Cambria Math" panose="02040503050406030204" pitchFamily="18" charset="0"/>
+                        </a:rPr>
+                        <m:t>0.1 </m:t>
+                      </m:r>
+                      <m:sSub>
+                        <m:sSubPr>
+                          <m:ctrlPr>
+                            <a:rPr lang="en-US" altLang="zh-TW" sz="1630" i="1">
+                              <a:latin typeface="Cambria Math" panose="02040503050406030204" pitchFamily="18" charset="0"/>
+                            </a:rPr>
+                          </m:ctrlPr>
+                        </m:sSubPr>
+                        <m:e>
+                          <m:r>
+                            <a:rPr lang="en-US" altLang="zh-TW" sz="1630" i="1">
+                              <a:latin typeface="Cambria Math" panose="02040503050406030204" pitchFamily="18" charset="0"/>
+                            </a:rPr>
+                            <m:t>𝑄</m:t>
+                          </m:r>
+                        </m:e>
+                        <m:sub>
+                          <m:r>
+                            <a:rPr lang="en-US" altLang="zh-TW" sz="1630" i="1">
+                              <a:latin typeface="Cambria Math" panose="02040503050406030204" pitchFamily="18" charset="0"/>
+                            </a:rPr>
+                            <m:t>𝑐</m:t>
+                          </m:r>
+                        </m:sub>
+                      </m:sSub>
+                    </m:oMath>
+                  </m:oMathPara>
+                </a14:m>
+                <a:endParaRPr lang="zh-TW" altLang="en-US" sz="1630" dirty="0">
+                  <a:latin typeface="Times New Roman" panose="02020603050405020304" pitchFamily="18" charset="0"/>
+                  <a:cs typeface="Times New Roman" panose="02020603050405020304" pitchFamily="18" charset="0"/>
+                </a:endParaRPr>
+              </a:p>
+            </p:txBody>
+          </p:sp>
+        </mc:Choice>
+        <mc:Fallback>
+          <p:sp>
+            <p:nvSpPr>
+              <p:cNvPr id="53" name="矩形 52">
+                <a:extLst>
+                  <a:ext uri="{FF2B5EF4-FFF2-40B4-BE49-F238E27FC236}">
+                    <a16:creationId xmlns:a16="http://schemas.microsoft.com/office/drawing/2014/main" id="{D8163A59-21D2-4AEC-A55C-42C7FC0D3453}"/>
+                  </a:ext>
+                </a:extLst>
+              </p:cNvPr>
+              <p:cNvSpPr>
+                <a:spLocks noRot="1" noChangeAspect="1" noMove="1" noResize="1" noEditPoints="1" noAdjustHandles="1" noChangeArrowheads="1" noChangeShapeType="1" noTextEdit="1"/>
+              </p:cNvSpPr>
+              <p:nvPr/>
+            </p:nvSpPr>
+            <p:spPr>
+              <a:xfrm>
+                <a:off x="1434376" y="3712447"/>
+                <a:ext cx="783035" cy="343171"/>
+              </a:xfrm>
+              <a:prstGeom prst="rect">
+                <a:avLst/>
+              </a:prstGeom>
+              <a:blipFill>
+                <a:blip r:embed="rId5"/>
+                <a:stretch>
+                  <a:fillRect b="-8929"/>
+                </a:stretch>
+              </a:blipFill>
+            </p:spPr>
+            <p:txBody>
+              <a:bodyPr/>
+              <a:lstStyle/>
+              <a:p>
+                <a:r>
+                  <a:rPr lang="zh-TW" altLang="en-US">
+                    <a:noFill/>
+                  </a:rPr>
+                  <a:t> </a:t>
+                </a:r>
+              </a:p>
+            </p:txBody>
+          </p:sp>
+        </mc:Fallback>
+      </mc:AlternateContent>
+      <p:grpSp>
+        <p:nvGrpSpPr>
+          <p:cNvPr id="86" name="群組 85">
+            <a:extLst>
+              <a:ext uri="{FF2B5EF4-FFF2-40B4-BE49-F238E27FC236}">
+                <a16:creationId xmlns:a16="http://schemas.microsoft.com/office/drawing/2014/main" id="{83B5F868-82DF-4B6B-A7DC-2FEC1536BE02}"/>
+              </a:ext>
+            </a:extLst>
+          </p:cNvPr>
+          <p:cNvGrpSpPr/>
+          <p:nvPr/>
+        </p:nvGrpSpPr>
+        <p:grpSpPr>
+          <a:xfrm>
+            <a:off x="1807854" y="1073585"/>
+            <a:ext cx="637278" cy="572006"/>
+            <a:chOff x="-990472" y="979045"/>
+            <a:chExt cx="584143" cy="524314"/>
+          </a:xfrm>
+        </p:grpSpPr>
+        <mc:AlternateContent xmlns:mc="http://schemas.openxmlformats.org/markup-compatibility/2006">
+          <mc:Choice xmlns:a14="http://schemas.microsoft.com/office/drawing/2010/main" Requires="a14">
+            <p:sp>
+              <p:nvSpPr>
+                <p:cNvPr id="87" name="文字方塊 86">
+                  <a:extLst>
+                    <a:ext uri="{FF2B5EF4-FFF2-40B4-BE49-F238E27FC236}">
+                      <a16:creationId xmlns:a16="http://schemas.microsoft.com/office/drawing/2014/main" id="{BD55CD46-F76A-40C8-8FEF-3E8617CDE787}"/>
+                    </a:ext>
+                  </a:extLst>
+                </p:cNvPr>
+                <p:cNvSpPr txBox="1"/>
+                <p:nvPr/>
+              </p:nvSpPr>
+              <p:spPr>
+                <a:xfrm>
+                  <a:off x="-990472" y="979045"/>
+                  <a:ext cx="323387" cy="335658"/>
+                </a:xfrm>
+                <a:prstGeom prst="rect">
+                  <a:avLst/>
+                </a:prstGeom>
+                <a:noFill/>
+              </p:spPr>
+              <p:txBody>
+                <a:bodyPr wrap="square" rtlCol="0">
+                  <a:spAutoFit/>
+                </a:bodyPr>
+                <a:lstStyle/>
+                <a:p>
+                  <a:pPr/>
+                  <a14:m>
+                    <m:oMathPara xmlns:m="http://schemas.openxmlformats.org/officeDocument/2006/math">
+                      <m:oMathParaPr>
+                        <m:jc m:val="centerGroup"/>
+                      </m:oMathParaPr>
+                      <m:oMath xmlns:m="http://schemas.openxmlformats.org/officeDocument/2006/math">
+                        <m:sSub>
+                          <m:sSubPr>
+                            <m:ctrlPr>
+                              <a:rPr lang="en-US" altLang="zh-TW" sz="1630" b="1" i="1">
+                                <a:latin typeface="Cambria Math" panose="02040503050406030204" pitchFamily="18" charset="0"/>
+                              </a:rPr>
+                            </m:ctrlPr>
+                          </m:sSubPr>
+                          <m:e>
+                            <m:r>
+                              <a:rPr lang="en-US" altLang="zh-TW" sz="1630" b="1" i="1">
+                                <a:latin typeface="Cambria Math" panose="02040503050406030204" pitchFamily="18" charset="0"/>
+                              </a:rPr>
+                              <m:t>𝒒</m:t>
+                            </m:r>
+                          </m:e>
+                          <m:sub>
+                            <m:r>
+                              <a:rPr lang="en-US" altLang="zh-TW" sz="1630" b="1" i="1">
+                                <a:latin typeface="Cambria Math" panose="02040503050406030204" pitchFamily="18" charset="0"/>
+                              </a:rPr>
+                              <m:t>𝒚</m:t>
+                            </m:r>
+                          </m:sub>
+                        </m:sSub>
+                      </m:oMath>
+                    </m:oMathPara>
+                  </a14:m>
+                  <a:endParaRPr lang="en-US" altLang="zh-TW" sz="1630" dirty="0">
+                    <a:latin typeface="Times New Roman" panose="02020603050405020304" pitchFamily="18" charset="0"/>
+                    <a:cs typeface="Times New Roman" panose="02020603050405020304" pitchFamily="18" charset="0"/>
+                  </a:endParaRPr>
+                </a:p>
+              </p:txBody>
+            </p:sp>
+          </mc:Choice>
+          <mc:Fallback>
+            <p:sp>
+              <p:nvSpPr>
+                <p:cNvPr id="87" name="文字方塊 86">
+                  <a:extLst>
+                    <a:ext uri="{FF2B5EF4-FFF2-40B4-BE49-F238E27FC236}">
+                      <a16:creationId xmlns:a16="http://schemas.microsoft.com/office/drawing/2014/main" id="{BD55CD46-F76A-40C8-8FEF-3E8617CDE787}"/>
+                    </a:ext>
+                  </a:extLst>
+                </p:cNvPr>
+                <p:cNvSpPr txBox="1">
+                  <a:spLocks noRot="1" noChangeAspect="1" noMove="1" noResize="1" noEditPoints="1" noAdjustHandles="1" noChangeArrowheads="1" noChangeShapeType="1" noTextEdit="1"/>
+                </p:cNvSpPr>
+                <p:nvPr/>
+              </p:nvSpPr>
+              <p:spPr>
+                <a:xfrm>
+                  <a:off x="-990472" y="979045"/>
+                  <a:ext cx="323387" cy="335658"/>
+                </a:xfrm>
+                <a:prstGeom prst="rect">
+                  <a:avLst/>
+                </a:prstGeom>
+                <a:blipFill>
+                  <a:blip r:embed="rId6"/>
+                  <a:stretch>
+                    <a:fillRect r="-5263" b="-1667"/>
+                  </a:stretch>
+                </a:blipFill>
+              </p:spPr>
+              <p:txBody>
+                <a:bodyPr/>
+                <a:lstStyle/>
+                <a:p>
+                  <a:r>
+                    <a:rPr lang="zh-TW" altLang="en-US">
+                      <a:noFill/>
+                    </a:rPr>
+                    <a:t> </a:t>
+                  </a:r>
+                </a:p>
+              </p:txBody>
+            </p:sp>
+          </mc:Fallback>
+        </mc:AlternateContent>
+        <mc:AlternateContent xmlns:mc="http://schemas.openxmlformats.org/markup-compatibility/2006" xmlns:a14="http://schemas.microsoft.com/office/drawing/2010/main">
+          <mc:Choice Requires="a14">
+            <p:sp>
+              <p:nvSpPr>
+                <p:cNvPr id="96" name="文字方塊 95">
+                  <a:extLst>
+                    <a:ext uri="{FF2B5EF4-FFF2-40B4-BE49-F238E27FC236}">
+                      <a16:creationId xmlns:a16="http://schemas.microsoft.com/office/drawing/2014/main" id="{1F9BA172-17FD-49D5-A01A-92CA18058D98}"/>
+                    </a:ext>
+                  </a:extLst>
+                </p:cNvPr>
+                <p:cNvSpPr txBox="1"/>
+                <p:nvPr/>
+              </p:nvSpPr>
+              <p:spPr>
+                <a:xfrm>
+                  <a:off x="-813248" y="1188801"/>
+                  <a:ext cx="406919" cy="314558"/>
+                </a:xfrm>
+                <a:prstGeom prst="rect">
+                  <a:avLst/>
+                </a:prstGeom>
+                <a:noFill/>
+              </p:spPr>
+              <p:txBody>
+                <a:bodyPr wrap="square" rtlCol="0">
+                  <a:spAutoFit/>
+                </a:bodyPr>
+                <a:lstStyle/>
+                <a:p>
+                  <a:pPr/>
+                  <a14:m>
+                    <m:oMathPara xmlns:m="http://schemas.openxmlformats.org/officeDocument/2006/math">
+                      <m:oMathParaPr>
+                        <m:jc m:val="centerGroup"/>
+                      </m:oMathParaPr>
+                      <m:oMath xmlns:m="http://schemas.openxmlformats.org/officeDocument/2006/math">
+                        <m:sSub>
+                          <m:sSubPr>
+                            <m:ctrlPr>
+                              <a:rPr lang="en-US" altLang="zh-TW" sz="1630" b="1" i="1">
+                                <a:latin typeface="Cambria Math" panose="02040503050406030204" pitchFamily="18" charset="0"/>
+                              </a:rPr>
+                            </m:ctrlPr>
+                          </m:sSubPr>
+                          <m:e>
+                            <m:r>
+                              <a:rPr lang="en-US" altLang="zh-TW" sz="1630" b="1" i="1">
+                                <a:latin typeface="Cambria Math" panose="02040503050406030204" pitchFamily="18" charset="0"/>
+                              </a:rPr>
+                              <m:t>𝒒</m:t>
+                            </m:r>
+                          </m:e>
+                          <m:sub>
+                            <m:r>
+                              <a:rPr lang="en-US" altLang="zh-TW" sz="1630" b="1" i="1">
+                                <a:latin typeface="Cambria Math" panose="02040503050406030204" pitchFamily="18" charset="0"/>
+                              </a:rPr>
+                              <m:t>𝒙</m:t>
+                            </m:r>
+                          </m:sub>
+                        </m:sSub>
+                      </m:oMath>
+                    </m:oMathPara>
+                  </a14:m>
+                  <a:endParaRPr lang="en-US" altLang="zh-TW" sz="1630" dirty="0">
+                    <a:latin typeface="Times New Roman" panose="02020603050405020304" pitchFamily="18" charset="0"/>
+                    <a:cs typeface="Times New Roman" panose="02020603050405020304" pitchFamily="18" charset="0"/>
+                  </a:endParaRPr>
+                </a:p>
+              </p:txBody>
+            </p:sp>
+          </mc:Choice>
+          <mc:Fallback xmlns="">
+            <p:sp>
+              <p:nvSpPr>
+                <p:cNvPr id="81" name="文字方塊 80">
+                  <a:extLst>
+                    <a:ext uri="{FF2B5EF4-FFF2-40B4-BE49-F238E27FC236}">
+                      <a16:creationId xmlns:a16="http://schemas.microsoft.com/office/drawing/2014/main" id="{47E81467-D25E-4BB7-94DE-E307D45DD949}"/>
+                    </a:ext>
+                  </a:extLst>
+                </p:cNvPr>
+                <p:cNvSpPr txBox="1">
+                  <a:spLocks noRot="1" noChangeAspect="1" noMove="1" noResize="1" noEditPoints="1" noAdjustHandles="1" noChangeArrowheads="1" noChangeShapeType="1" noTextEdit="1"/>
+                </p:cNvSpPr>
+                <p:nvPr/>
+              </p:nvSpPr>
+              <p:spPr>
+                <a:xfrm>
+                  <a:off x="-813248" y="1188801"/>
+                  <a:ext cx="406919" cy="314558"/>
+                </a:xfrm>
+                <a:prstGeom prst="rect">
+                  <a:avLst/>
+                </a:prstGeom>
+                <a:blipFill>
+                  <a:blip r:embed="rId20"/>
+                  <a:stretch>
+                    <a:fillRect b="-5263"/>
+                  </a:stretch>
+                </a:blipFill>
+              </p:spPr>
+              <p:txBody>
+                <a:bodyPr/>
+                <a:lstStyle/>
+                <a:p>
+                  <a:r>
+                    <a:rPr lang="zh-TW" altLang="en-US">
+                      <a:noFill/>
+                    </a:rPr>
+                    <a:t> </a:t>
+                  </a:r>
+                </a:p>
+              </p:txBody>
+            </p:sp>
+          </mc:Fallback>
+        </mc:AlternateContent>
+        <p:sp>
+          <p:nvSpPr>
+            <p:cNvPr id="97" name="箭號: 向右 96">
+              <a:extLst>
+                <a:ext uri="{FF2B5EF4-FFF2-40B4-BE49-F238E27FC236}">
+                  <a16:creationId xmlns:a16="http://schemas.microsoft.com/office/drawing/2014/main" id="{2C7CA38B-E7B2-4225-B8BC-952574CCD2AC}"/>
+                </a:ext>
+              </a:extLst>
+            </p:cNvPr>
+            <p:cNvSpPr/>
+            <p:nvPr/>
+          </p:nvSpPr>
+          <p:spPr>
+            <a:xfrm>
+              <a:off x="-837092" y="1356364"/>
+              <a:ext cx="92654" cy="27541"/>
+            </a:xfrm>
+            <a:prstGeom prst="rightArrow">
+              <a:avLst>
+                <a:gd name="adj1" fmla="val 50000"/>
+                <a:gd name="adj2" fmla="val 99023"/>
+              </a:avLst>
+            </a:prstGeom>
+            <a:solidFill>
+              <a:schemeClr val="tx1"/>
+            </a:solidFill>
+            <a:ln>
+              <a:solidFill>
+                <a:schemeClr val="tx1"/>
+              </a:solidFill>
+            </a:ln>
+          </p:spPr>
+          <p:style>
+            <a:lnRef idx="2">
+              <a:schemeClr val="dk1">
+                <a:shade val="50000"/>
+              </a:schemeClr>
+            </a:lnRef>
+            <a:fillRef idx="1">
+              <a:schemeClr val="dk1"/>
+            </a:fillRef>
+            <a:effectRef idx="0">
+              <a:schemeClr val="dk1"/>
+            </a:effectRef>
+            <a:fontRef idx="minor">
+              <a:schemeClr val="lt1"/>
+            </a:fontRef>
+          </p:style>
+          <p:txBody>
+            <a:bodyPr rtlCol="0" anchor="ctr"/>
+            <a:lstStyle/>
+            <a:p>
+              <a:pPr algn="ctr"/>
+              <a:endParaRPr lang="zh-TW" altLang="en-US" sz="1630">
+                <a:solidFill>
+                  <a:schemeClr val="tx1"/>
+                </a:solidFill>
+                <a:latin typeface="Times New Roman" panose="02020603050405020304" pitchFamily="18" charset="0"/>
+                <a:cs typeface="Times New Roman" panose="02020603050405020304" pitchFamily="18" charset="0"/>
+              </a:endParaRPr>
+            </a:p>
+          </p:txBody>
+        </p:sp>
+        <p:sp>
+          <p:nvSpPr>
+            <p:cNvPr id="98" name="箭號: 向右 97">
+              <a:extLst>
+                <a:ext uri="{FF2B5EF4-FFF2-40B4-BE49-F238E27FC236}">
+                  <a16:creationId xmlns:a16="http://schemas.microsoft.com/office/drawing/2014/main" id="{03D676CE-2788-42E2-A47E-69212772F843}"/>
+                </a:ext>
+              </a:extLst>
+            </p:cNvPr>
+            <p:cNvSpPr/>
+            <p:nvPr/>
+          </p:nvSpPr>
+          <p:spPr>
+            <a:xfrm rot="16200000">
+              <a:off x="-877012" y="1316853"/>
+              <a:ext cx="91764" cy="27808"/>
+            </a:xfrm>
+            <a:prstGeom prst="rightArrow">
+              <a:avLst>
+                <a:gd name="adj1" fmla="val 50000"/>
+                <a:gd name="adj2" fmla="val 99023"/>
+              </a:avLst>
+            </a:prstGeom>
+            <a:solidFill>
+              <a:schemeClr val="tx1"/>
+            </a:solidFill>
+            <a:ln>
+              <a:solidFill>
+                <a:schemeClr val="tx1"/>
+              </a:solidFill>
+            </a:ln>
+          </p:spPr>
+          <p:style>
+            <a:lnRef idx="2">
+              <a:schemeClr val="dk1">
+                <a:shade val="50000"/>
+              </a:schemeClr>
+            </a:lnRef>
+            <a:fillRef idx="1">
+              <a:schemeClr val="dk1"/>
+            </a:fillRef>
+            <a:effectRef idx="0">
+              <a:schemeClr val="dk1"/>
+            </a:effectRef>
+            <a:fontRef idx="minor">
+              <a:schemeClr val="lt1"/>
+            </a:fontRef>
+          </p:style>
+          <p:txBody>
+            <a:bodyPr rtlCol="0" anchor="ctr"/>
+            <a:lstStyle/>
+            <a:p>
+              <a:pPr algn="ctr"/>
+              <a:endParaRPr lang="zh-TW" altLang="en-US" sz="1630" dirty="0">
+                <a:solidFill>
+                  <a:schemeClr val="tx1"/>
+                </a:solidFill>
+                <a:latin typeface="Times New Roman" panose="02020603050405020304" pitchFamily="18" charset="0"/>
+                <a:cs typeface="Times New Roman" panose="02020603050405020304" pitchFamily="18" charset="0"/>
+              </a:endParaRPr>
+            </a:p>
+          </p:txBody>
+        </p:sp>
+      </p:grpSp>
+      <p:grpSp>
+        <p:nvGrpSpPr>
+          <p:cNvPr id="99" name="群組 98">
+            <a:extLst>
+              <a:ext uri="{FF2B5EF4-FFF2-40B4-BE49-F238E27FC236}">
+                <a16:creationId xmlns:a16="http://schemas.microsoft.com/office/drawing/2014/main" id="{469F717A-C89F-4550-9B7B-B8F161D20D3D}"/>
+              </a:ext>
+            </a:extLst>
+          </p:cNvPr>
+          <p:cNvGrpSpPr/>
+          <p:nvPr/>
+        </p:nvGrpSpPr>
+        <p:grpSpPr>
+          <a:xfrm>
+            <a:off x="1810164" y="2998901"/>
+            <a:ext cx="621691" cy="559016"/>
+            <a:chOff x="-965072" y="992539"/>
+            <a:chExt cx="569856" cy="512407"/>
+          </a:xfrm>
+        </p:grpSpPr>
+        <mc:AlternateContent xmlns:mc="http://schemas.openxmlformats.org/markup-compatibility/2006">
+          <mc:Choice xmlns:a14="http://schemas.microsoft.com/office/drawing/2010/main" Requires="a14">
+            <p:sp>
+              <p:nvSpPr>
+                <p:cNvPr id="100" name="文字方塊 99">
+                  <a:extLst>
+                    <a:ext uri="{FF2B5EF4-FFF2-40B4-BE49-F238E27FC236}">
+                      <a16:creationId xmlns:a16="http://schemas.microsoft.com/office/drawing/2014/main" id="{26274BA1-2423-4B88-BF19-FC08EEB0196B}"/>
+                    </a:ext>
+                  </a:extLst>
+                </p:cNvPr>
+                <p:cNvSpPr txBox="1"/>
+                <p:nvPr/>
+              </p:nvSpPr>
+              <p:spPr>
+                <a:xfrm>
+                  <a:off x="-965072" y="992539"/>
+                  <a:ext cx="323387" cy="335658"/>
+                </a:xfrm>
+                <a:prstGeom prst="rect">
+                  <a:avLst/>
+                </a:prstGeom>
+                <a:noFill/>
+              </p:spPr>
+              <p:txBody>
+                <a:bodyPr wrap="square" rtlCol="0">
+                  <a:spAutoFit/>
+                </a:bodyPr>
+                <a:lstStyle/>
+                <a:p>
+                  <a:pPr/>
+                  <a14:m>
+                    <m:oMathPara xmlns:m="http://schemas.openxmlformats.org/officeDocument/2006/math">
+                      <m:oMathParaPr>
+                        <m:jc m:val="centerGroup"/>
+                      </m:oMathParaPr>
+                      <m:oMath xmlns:m="http://schemas.openxmlformats.org/officeDocument/2006/math">
+                        <m:sSub>
+                          <m:sSubPr>
+                            <m:ctrlPr>
+                              <a:rPr lang="en-US" altLang="zh-TW" sz="1630" b="1" i="1">
+                                <a:latin typeface="Cambria Math" panose="02040503050406030204" pitchFamily="18" charset="0"/>
+                              </a:rPr>
+                            </m:ctrlPr>
+                          </m:sSubPr>
+                          <m:e>
+                            <m:r>
+                              <a:rPr lang="en-US" altLang="zh-TW" sz="1630" b="1" i="1">
+                                <a:latin typeface="Cambria Math" panose="02040503050406030204" pitchFamily="18" charset="0"/>
+                              </a:rPr>
+                              <m:t>𝒒</m:t>
+                            </m:r>
+                          </m:e>
+                          <m:sub>
+                            <m:r>
+                              <a:rPr lang="en-US" altLang="zh-TW" sz="1630" b="1" i="1">
+                                <a:latin typeface="Cambria Math" panose="02040503050406030204" pitchFamily="18" charset="0"/>
+                              </a:rPr>
+                              <m:t>𝒚</m:t>
+                            </m:r>
+                          </m:sub>
+                        </m:sSub>
+                      </m:oMath>
+                    </m:oMathPara>
+                  </a14:m>
+                  <a:endParaRPr lang="en-US" altLang="zh-TW" sz="1630" dirty="0">
+                    <a:latin typeface="Times New Roman" panose="02020603050405020304" pitchFamily="18" charset="0"/>
+                    <a:cs typeface="Times New Roman" panose="02020603050405020304" pitchFamily="18" charset="0"/>
+                  </a:endParaRPr>
+                </a:p>
+              </p:txBody>
+            </p:sp>
+          </mc:Choice>
+          <mc:Fallback>
+            <p:sp>
+              <p:nvSpPr>
+                <p:cNvPr id="100" name="文字方塊 99">
+                  <a:extLst>
+                    <a:ext uri="{FF2B5EF4-FFF2-40B4-BE49-F238E27FC236}">
+                      <a16:creationId xmlns:a16="http://schemas.microsoft.com/office/drawing/2014/main" id="{26274BA1-2423-4B88-BF19-FC08EEB0196B}"/>
+                    </a:ext>
+                  </a:extLst>
+                </p:cNvPr>
+                <p:cNvSpPr txBox="1">
+                  <a:spLocks noRot="1" noChangeAspect="1" noMove="1" noResize="1" noEditPoints="1" noAdjustHandles="1" noChangeArrowheads="1" noChangeShapeType="1" noTextEdit="1"/>
+                </p:cNvSpPr>
+                <p:nvPr/>
+              </p:nvSpPr>
+              <p:spPr>
+                <a:xfrm>
+                  <a:off x="-965072" y="992539"/>
+                  <a:ext cx="323387" cy="335658"/>
+                </a:xfrm>
+                <a:prstGeom prst="rect">
+                  <a:avLst/>
+                </a:prstGeom>
+                <a:blipFill>
+                  <a:blip r:embed="rId21"/>
+                  <a:stretch>
+                    <a:fillRect r="-3448"/>
+                  </a:stretch>
+                </a:blipFill>
+              </p:spPr>
+              <p:txBody>
+                <a:bodyPr/>
+                <a:lstStyle/>
+                <a:p>
+                  <a:r>
+                    <a:rPr lang="zh-TW" altLang="en-US">
+                      <a:noFill/>
+                    </a:rPr>
+                    <a:t> </a:t>
+                  </a:r>
+                </a:p>
+              </p:txBody>
+            </p:sp>
+          </mc:Fallback>
+        </mc:AlternateContent>
+        <mc:AlternateContent xmlns:mc="http://schemas.openxmlformats.org/markup-compatibility/2006" xmlns:a14="http://schemas.microsoft.com/office/drawing/2010/main">
+          <mc:Choice Requires="a14">
+            <p:sp>
+              <p:nvSpPr>
+                <p:cNvPr id="101" name="文字方塊 100">
+                  <a:extLst>
+                    <a:ext uri="{FF2B5EF4-FFF2-40B4-BE49-F238E27FC236}">
+                      <a16:creationId xmlns:a16="http://schemas.microsoft.com/office/drawing/2014/main" id="{E26D9775-85BB-4006-B91E-7B673CCCDDE1}"/>
+                    </a:ext>
+                  </a:extLst>
+                </p:cNvPr>
+                <p:cNvSpPr txBox="1"/>
+                <p:nvPr/>
+              </p:nvSpPr>
+              <p:spPr>
+                <a:xfrm>
+                  <a:off x="-802135" y="1190388"/>
+                  <a:ext cx="406919" cy="314558"/>
+                </a:xfrm>
+                <a:prstGeom prst="rect">
+                  <a:avLst/>
+                </a:prstGeom>
+                <a:noFill/>
+              </p:spPr>
+              <p:txBody>
+                <a:bodyPr wrap="square" rtlCol="0">
+                  <a:spAutoFit/>
+                </a:bodyPr>
+                <a:lstStyle/>
+                <a:p>
+                  <a:pPr/>
+                  <a14:m>
+                    <m:oMathPara xmlns:m="http://schemas.openxmlformats.org/officeDocument/2006/math">
+                      <m:oMathParaPr>
+                        <m:jc m:val="centerGroup"/>
+                      </m:oMathParaPr>
+                      <m:oMath xmlns:m="http://schemas.openxmlformats.org/officeDocument/2006/math">
+                        <m:sSub>
+                          <m:sSubPr>
+                            <m:ctrlPr>
+                              <a:rPr lang="en-US" altLang="zh-TW" sz="1630" b="1" i="1">
+                                <a:latin typeface="Cambria Math" panose="02040503050406030204" pitchFamily="18" charset="0"/>
+                              </a:rPr>
+                            </m:ctrlPr>
+                          </m:sSubPr>
+                          <m:e>
+                            <m:r>
+                              <a:rPr lang="en-US" altLang="zh-TW" sz="1630" b="1" i="1">
+                                <a:latin typeface="Cambria Math" panose="02040503050406030204" pitchFamily="18" charset="0"/>
+                              </a:rPr>
+                              <m:t>𝒒</m:t>
+                            </m:r>
+                          </m:e>
+                          <m:sub>
+                            <m:r>
+                              <a:rPr lang="en-US" altLang="zh-TW" sz="1630" b="1" i="1">
+                                <a:latin typeface="Cambria Math" panose="02040503050406030204" pitchFamily="18" charset="0"/>
+                              </a:rPr>
+                              <m:t>𝒙</m:t>
+                            </m:r>
+                          </m:sub>
+                        </m:sSub>
+                      </m:oMath>
+                    </m:oMathPara>
+                  </a14:m>
+                  <a:endParaRPr lang="en-US" altLang="zh-TW" sz="1630" dirty="0">
+                    <a:latin typeface="Times New Roman" panose="02020603050405020304" pitchFamily="18" charset="0"/>
+                    <a:cs typeface="Times New Roman" panose="02020603050405020304" pitchFamily="18" charset="0"/>
+                  </a:endParaRPr>
+                </a:p>
+              </p:txBody>
+            </p:sp>
+          </mc:Choice>
+          <mc:Fallback xmlns="">
+            <p:sp>
+              <p:nvSpPr>
+                <p:cNvPr id="92" name="文字方塊 91">
+                  <a:extLst>
+                    <a:ext uri="{FF2B5EF4-FFF2-40B4-BE49-F238E27FC236}">
+                      <a16:creationId xmlns:a16="http://schemas.microsoft.com/office/drawing/2014/main" id="{9E8963A5-F392-4029-B309-DD9A00CE0887}"/>
+                    </a:ext>
+                  </a:extLst>
+                </p:cNvPr>
+                <p:cNvSpPr txBox="1">
+                  <a:spLocks noRot="1" noChangeAspect="1" noMove="1" noResize="1" noEditPoints="1" noAdjustHandles="1" noChangeArrowheads="1" noChangeShapeType="1" noTextEdit="1"/>
+                </p:cNvSpPr>
+                <p:nvPr/>
+              </p:nvSpPr>
+              <p:spPr>
+                <a:xfrm>
+                  <a:off x="-802135" y="1190388"/>
+                  <a:ext cx="406919" cy="314558"/>
+                </a:xfrm>
+                <a:prstGeom prst="rect">
+                  <a:avLst/>
+                </a:prstGeom>
+                <a:blipFill>
+                  <a:blip r:embed="rId22"/>
+                  <a:stretch>
+                    <a:fillRect b="-5263"/>
+                  </a:stretch>
+                </a:blipFill>
+              </p:spPr>
+              <p:txBody>
+                <a:bodyPr/>
+                <a:lstStyle/>
+                <a:p>
+                  <a:r>
+                    <a:rPr lang="zh-TW" altLang="en-US">
+                      <a:noFill/>
+                    </a:rPr>
+                    <a:t> </a:t>
+                  </a:r>
+                </a:p>
+              </p:txBody>
+            </p:sp>
+          </mc:Fallback>
+        </mc:AlternateContent>
+        <p:sp>
+          <p:nvSpPr>
+            <p:cNvPr id="102" name="箭號: 向右 101">
+              <a:extLst>
+                <a:ext uri="{FF2B5EF4-FFF2-40B4-BE49-F238E27FC236}">
+                  <a16:creationId xmlns:a16="http://schemas.microsoft.com/office/drawing/2014/main" id="{79E1956D-E1A6-4F7A-8AB1-75CD7C8C93A7}"/>
+                </a:ext>
+              </a:extLst>
+            </p:cNvPr>
+            <p:cNvSpPr/>
+            <p:nvPr/>
+          </p:nvSpPr>
+          <p:spPr>
+            <a:xfrm>
+              <a:off x="-837092" y="1356364"/>
+              <a:ext cx="92654" cy="27541"/>
+            </a:xfrm>
+            <a:prstGeom prst="rightArrow">
+              <a:avLst>
+                <a:gd name="adj1" fmla="val 50000"/>
+                <a:gd name="adj2" fmla="val 99023"/>
+              </a:avLst>
+            </a:prstGeom>
+            <a:solidFill>
+              <a:schemeClr val="tx1"/>
+            </a:solidFill>
+            <a:ln>
+              <a:solidFill>
+                <a:schemeClr val="tx1"/>
+              </a:solidFill>
+            </a:ln>
+          </p:spPr>
+          <p:style>
+            <a:lnRef idx="2">
+              <a:schemeClr val="dk1">
+                <a:shade val="50000"/>
+              </a:schemeClr>
+            </a:lnRef>
+            <a:fillRef idx="1">
+              <a:schemeClr val="dk1"/>
+            </a:fillRef>
+            <a:effectRef idx="0">
+              <a:schemeClr val="dk1"/>
+            </a:effectRef>
+            <a:fontRef idx="minor">
+              <a:schemeClr val="lt1"/>
+            </a:fontRef>
+          </p:style>
+          <p:txBody>
+            <a:bodyPr rtlCol="0" anchor="ctr"/>
+            <a:lstStyle/>
+            <a:p>
+              <a:pPr algn="ctr"/>
+              <a:endParaRPr lang="zh-TW" altLang="en-US" sz="1630">
+                <a:solidFill>
+                  <a:schemeClr val="tx1"/>
+                </a:solidFill>
+                <a:latin typeface="Times New Roman" panose="02020603050405020304" pitchFamily="18" charset="0"/>
+                <a:cs typeface="Times New Roman" panose="02020603050405020304" pitchFamily="18" charset="0"/>
+              </a:endParaRPr>
+            </a:p>
+          </p:txBody>
+        </p:sp>
+        <p:sp>
+          <p:nvSpPr>
+            <p:cNvPr id="103" name="箭號: 向右 102">
+              <a:extLst>
+                <a:ext uri="{FF2B5EF4-FFF2-40B4-BE49-F238E27FC236}">
+                  <a16:creationId xmlns:a16="http://schemas.microsoft.com/office/drawing/2014/main" id="{7D1B38C6-6B33-43D0-9943-60E695DE8D9E}"/>
+                </a:ext>
+              </a:extLst>
+            </p:cNvPr>
+            <p:cNvSpPr/>
+            <p:nvPr/>
+          </p:nvSpPr>
+          <p:spPr>
+            <a:xfrm rot="16200000">
+              <a:off x="-877012" y="1316853"/>
+              <a:ext cx="91764" cy="27808"/>
+            </a:xfrm>
+            <a:prstGeom prst="rightArrow">
+              <a:avLst>
+                <a:gd name="adj1" fmla="val 50000"/>
+                <a:gd name="adj2" fmla="val 99023"/>
+              </a:avLst>
+            </a:prstGeom>
+            <a:solidFill>
+              <a:schemeClr val="tx1"/>
+            </a:solidFill>
+            <a:ln>
+              <a:solidFill>
+                <a:schemeClr val="tx1"/>
+              </a:solidFill>
+            </a:ln>
+          </p:spPr>
+          <p:style>
+            <a:lnRef idx="2">
+              <a:schemeClr val="dk1">
+                <a:shade val="50000"/>
+              </a:schemeClr>
+            </a:lnRef>
+            <a:fillRef idx="1">
+              <a:schemeClr val="dk1"/>
+            </a:fillRef>
+            <a:effectRef idx="0">
+              <a:schemeClr val="dk1"/>
+            </a:effectRef>
+            <a:fontRef idx="minor">
+              <a:schemeClr val="lt1"/>
+            </a:fontRef>
+          </p:style>
+          <p:txBody>
+            <a:bodyPr rtlCol="0" anchor="ctr"/>
+            <a:lstStyle/>
+            <a:p>
+              <a:pPr algn="ctr"/>
+              <a:endParaRPr lang="zh-TW" altLang="en-US" sz="1630" dirty="0">
+                <a:solidFill>
+                  <a:schemeClr val="tx1"/>
+                </a:solidFill>
+                <a:latin typeface="Times New Roman" panose="02020603050405020304" pitchFamily="18" charset="0"/>
+                <a:cs typeface="Times New Roman" panose="02020603050405020304" pitchFamily="18" charset="0"/>
+              </a:endParaRPr>
+            </a:p>
+          </p:txBody>
+        </p:sp>
+      </p:grpSp>
+      <p:pic>
+        <p:nvPicPr>
+          <p:cNvPr id="105" name="圖片 104">
+            <a:extLst>
+              <a:ext uri="{FF2B5EF4-FFF2-40B4-BE49-F238E27FC236}">
+                <a16:creationId xmlns:a16="http://schemas.microsoft.com/office/drawing/2014/main" id="{6CBE0AD7-E644-49D6-BDC3-CC87DD7F37FE}"/>
+              </a:ext>
+            </a:extLst>
+          </p:cNvPr>
+          <p:cNvPicPr>
+            <a:picLocks noChangeAspect="1"/>
+          </p:cNvPicPr>
+          <p:nvPr/>
+        </p:nvPicPr>
+        <p:blipFill rotWithShape="1">
+          <a:blip r:embed="rId23">
+            <a:clrChange>
+              <a:clrFrom>
+                <a:srgbClr val="FFFFFF"/>
+              </a:clrFrom>
+              <a:clrTo>
+                <a:srgbClr val="FFFFFF">
+                  <a:alpha val="0"/>
+                </a:srgbClr>
+              </a:clrTo>
+            </a:clrChange>
+          </a:blip>
+          <a:srcRect r="56352"/>
+          <a:stretch/>
+        </p:blipFill>
+        <p:spPr>
+          <a:xfrm>
+            <a:off x="1389081" y="332668"/>
+            <a:ext cx="786294" cy="431112"/>
+          </a:xfrm>
+          <a:prstGeom prst="rect">
+            <a:avLst/>
+          </a:prstGeom>
+        </p:spPr>
+      </p:pic>
+      <p:pic>
+        <p:nvPicPr>
+          <p:cNvPr id="106" name="圖片 105">
+            <a:extLst>
+              <a:ext uri="{FF2B5EF4-FFF2-40B4-BE49-F238E27FC236}">
+                <a16:creationId xmlns:a16="http://schemas.microsoft.com/office/drawing/2014/main" id="{4F4EC159-C11D-47CE-93AA-2A67ABB46FA7}"/>
+              </a:ext>
+            </a:extLst>
+          </p:cNvPr>
+          <p:cNvPicPr>
+            <a:picLocks noChangeAspect="1"/>
+          </p:cNvPicPr>
+          <p:nvPr/>
+        </p:nvPicPr>
+        <p:blipFill rotWithShape="1">
+          <a:blip r:embed="rId23">
+            <a:clrChange>
+              <a:clrFrom>
+                <a:srgbClr val="FFFFFF"/>
+              </a:clrFrom>
+              <a:clrTo>
+                <a:srgbClr val="FFFFFF">
+                  <a:alpha val="0"/>
+                </a:srgbClr>
+              </a:clrTo>
+            </a:clrChange>
+          </a:blip>
+          <a:srcRect l="44978"/>
+          <a:stretch/>
+        </p:blipFill>
+        <p:spPr>
+          <a:xfrm>
+            <a:off x="1389081" y="2260737"/>
+            <a:ext cx="991185" cy="431112"/>
+          </a:xfrm>
+          <a:prstGeom prst="rect">
+            <a:avLst/>
+          </a:prstGeom>
+        </p:spPr>
+      </p:pic>
+      <p:pic>
+        <p:nvPicPr>
+          <p:cNvPr id="35" name="圖片 34">
+            <a:extLst>
+              <a:ext uri="{FF2B5EF4-FFF2-40B4-BE49-F238E27FC236}">
+                <a16:creationId xmlns:a16="http://schemas.microsoft.com/office/drawing/2014/main" id="{CA846FF8-896D-469D-AE01-3839E4A2EFC0}"/>
+              </a:ext>
+            </a:extLst>
+          </p:cNvPr>
+          <p:cNvPicPr>
+            <a:picLocks noChangeAspect="1"/>
+          </p:cNvPicPr>
+          <p:nvPr/>
+        </p:nvPicPr>
+        <p:blipFill rotWithShape="1">
+          <a:blip r:embed="rId24">
+            <a:clrChange>
+              <a:clrFrom>
+                <a:srgbClr val="FFFFFF"/>
+              </a:clrFrom>
+              <a:clrTo>
+                <a:srgbClr val="FFFFFF">
+                  <a:alpha val="0"/>
+                </a:srgbClr>
+              </a:clrTo>
+            </a:clrChange>
+            <a:extLst>
+              <a:ext uri="{28A0092B-C50C-407E-A947-70E740481C1C}">
+                <a14:useLocalDpi xmlns:a14="http://schemas.microsoft.com/office/drawing/2010/main" val="0"/>
+              </a:ext>
+            </a:extLst>
+          </a:blip>
+          <a:srcRect l="90781" t="8908" r="5569" b="70278"/>
+          <a:stretch/>
+        </p:blipFill>
+        <p:spPr>
+          <a:xfrm>
+            <a:off x="8079333" y="758927"/>
+            <a:ext cx="356439" cy="1354972"/>
+          </a:xfrm>
+          <a:prstGeom prst="rect">
+            <a:avLst/>
+          </a:prstGeom>
+        </p:spPr>
+      </p:pic>
+      <p:sp>
+        <p:nvSpPr>
+          <p:cNvPr id="36" name="矩形 35">
+            <a:extLst>
+              <a:ext uri="{FF2B5EF4-FFF2-40B4-BE49-F238E27FC236}">
+                <a16:creationId xmlns:a16="http://schemas.microsoft.com/office/drawing/2014/main" id="{23586459-BCEE-4006-9A0F-37020F4A9636}"/>
+              </a:ext>
+            </a:extLst>
+          </p:cNvPr>
+          <p:cNvSpPr/>
+          <p:nvPr/>
+        </p:nvSpPr>
+        <p:spPr>
+          <a:xfrm>
+            <a:off x="8033692" y="1942558"/>
+            <a:ext cx="487634" cy="343171"/>
+          </a:xfrm>
+          <a:prstGeom prst="rect">
+            <a:avLst/>
+          </a:prstGeom>
+        </p:spPr>
+        <p:txBody>
+          <a:bodyPr wrap="none">
+            <a:spAutoFit/>
+          </a:bodyPr>
+          <a:lstStyle/>
+          <a:p>
+            <a:r>
+              <a:rPr lang="en-US" altLang="zh-TW" sz="1630" dirty="0">
+                <a:latin typeface="Times New Roman" panose="02020603050405020304" pitchFamily="18" charset="0"/>
+                <a:cs typeface="Times New Roman" panose="02020603050405020304" pitchFamily="18" charset="0"/>
+              </a:rPr>
+              <a:t>a.u.</a:t>
+            </a:r>
+            <a:endParaRPr lang="zh-TW" altLang="en-US" sz="1630" dirty="0">
+              <a:latin typeface="Times New Roman" panose="02020603050405020304" pitchFamily="18" charset="0"/>
+              <a:cs typeface="Times New Roman" panose="02020603050405020304" pitchFamily="18" charset="0"/>
+            </a:endParaRPr>
+          </a:p>
+        </p:txBody>
+      </p:sp>
+      <p:sp>
+        <p:nvSpPr>
+          <p:cNvPr id="37" name="矩形 36">
+            <a:extLst>
+              <a:ext uri="{FF2B5EF4-FFF2-40B4-BE49-F238E27FC236}">
+                <a16:creationId xmlns:a16="http://schemas.microsoft.com/office/drawing/2014/main" id="{7B093E9B-BC5E-4A4D-9CC6-53EC3B51B052}"/>
+              </a:ext>
+            </a:extLst>
+          </p:cNvPr>
+          <p:cNvSpPr/>
+          <p:nvPr/>
+        </p:nvSpPr>
+        <p:spPr>
+          <a:xfrm>
+            <a:off x="8009121" y="3913623"/>
+            <a:ext cx="487634" cy="343171"/>
+          </a:xfrm>
+          <a:prstGeom prst="rect">
+            <a:avLst/>
+          </a:prstGeom>
+        </p:spPr>
+        <p:txBody>
+          <a:bodyPr wrap="none">
+            <a:spAutoFit/>
+          </a:bodyPr>
+          <a:lstStyle/>
+          <a:p>
+            <a:r>
+              <a:rPr lang="en-US" altLang="zh-TW" sz="1630" dirty="0">
+                <a:latin typeface="Times New Roman" panose="02020603050405020304" pitchFamily="18" charset="0"/>
+                <a:cs typeface="Times New Roman" panose="02020603050405020304" pitchFamily="18" charset="0"/>
+              </a:rPr>
+              <a:t>a.u.</a:t>
+            </a:r>
+            <a:endParaRPr lang="zh-TW" altLang="en-US" sz="1630" dirty="0">
+              <a:latin typeface="Times New Roman" panose="02020603050405020304" pitchFamily="18" charset="0"/>
+              <a:cs typeface="Times New Roman" panose="02020603050405020304" pitchFamily="18" charset="0"/>
+            </a:endParaRPr>
+          </a:p>
+        </p:txBody>
+      </p:sp>
+      <p:pic>
+        <p:nvPicPr>
+          <p:cNvPr id="38" name="圖片 37">
+            <a:extLst>
+              <a:ext uri="{FF2B5EF4-FFF2-40B4-BE49-F238E27FC236}">
+                <a16:creationId xmlns:a16="http://schemas.microsoft.com/office/drawing/2014/main" id="{E6CCE76B-EA68-4B1D-A777-EC704E4CDDD7}"/>
+              </a:ext>
+            </a:extLst>
+          </p:cNvPr>
+          <p:cNvPicPr>
+            <a:picLocks noChangeAspect="1"/>
+          </p:cNvPicPr>
+          <p:nvPr/>
+        </p:nvPicPr>
+        <p:blipFill rotWithShape="1">
+          <a:blip r:embed="rId25">
+            <a:clrChange>
+              <a:clrFrom>
+                <a:srgbClr val="FFFFFF"/>
+              </a:clrFrom>
+              <a:clrTo>
+                <a:srgbClr val="FFFFFF">
+                  <a:alpha val="0"/>
+                </a:srgbClr>
+              </a:clrTo>
+            </a:clrChange>
+          </a:blip>
+          <a:srcRect r="32321"/>
+          <a:stretch/>
+        </p:blipFill>
+        <p:spPr>
+          <a:xfrm>
+            <a:off x="8038477" y="2740637"/>
+            <a:ext cx="407456" cy="1328804"/>
+          </a:xfrm>
+          <a:prstGeom prst="rect">
+            <a:avLst/>
+          </a:prstGeom>
+        </p:spPr>
+      </p:pic>
+      <p:sp>
+        <p:nvSpPr>
+          <p:cNvPr id="39" name="矩形 38">
+            <a:extLst>
+              <a:ext uri="{FF2B5EF4-FFF2-40B4-BE49-F238E27FC236}">
+                <a16:creationId xmlns:a16="http://schemas.microsoft.com/office/drawing/2014/main" id="{3DAB0F83-1429-4C5E-8F46-7BEACD78C91C}"/>
+              </a:ext>
+            </a:extLst>
+          </p:cNvPr>
+          <p:cNvSpPr/>
+          <p:nvPr/>
+        </p:nvSpPr>
+        <p:spPr>
+          <a:xfrm>
+            <a:off x="8337233" y="634669"/>
+            <a:ext cx="288862" cy="343171"/>
+          </a:xfrm>
+          <a:prstGeom prst="rect">
+            <a:avLst/>
+          </a:prstGeom>
+        </p:spPr>
+        <p:txBody>
+          <a:bodyPr wrap="none">
+            <a:spAutoFit/>
+          </a:bodyPr>
+          <a:lstStyle/>
+          <a:p>
+            <a:r>
+              <a:rPr lang="en-US" altLang="zh-TW" sz="1630" dirty="0">
+                <a:latin typeface="Times New Roman" panose="02020603050405020304" pitchFamily="18" charset="0"/>
+                <a:cs typeface="Times New Roman" panose="02020603050405020304" pitchFamily="18" charset="0"/>
+              </a:rPr>
+              <a:t>1</a:t>
+            </a:r>
+            <a:endParaRPr lang="zh-TW" altLang="en-US" sz="1630" dirty="0">
+              <a:latin typeface="Times New Roman" panose="02020603050405020304" pitchFamily="18" charset="0"/>
+              <a:cs typeface="Times New Roman" panose="02020603050405020304" pitchFamily="18" charset="0"/>
+            </a:endParaRPr>
+          </a:p>
+        </p:txBody>
+      </p:sp>
+      <p:sp>
+        <p:nvSpPr>
+          <p:cNvPr id="40" name="矩形 39">
+            <a:extLst>
+              <a:ext uri="{FF2B5EF4-FFF2-40B4-BE49-F238E27FC236}">
+                <a16:creationId xmlns:a16="http://schemas.microsoft.com/office/drawing/2014/main" id="{997B7775-2417-4977-8D38-2F27B54E7063}"/>
+              </a:ext>
+            </a:extLst>
+          </p:cNvPr>
+          <p:cNvSpPr/>
+          <p:nvPr/>
+        </p:nvSpPr>
+        <p:spPr>
+          <a:xfrm>
+            <a:off x="8356283" y="1901494"/>
+            <a:ext cx="288862" cy="343171"/>
+          </a:xfrm>
+          <a:prstGeom prst="rect">
+            <a:avLst/>
+          </a:prstGeom>
+        </p:spPr>
+        <p:txBody>
+          <a:bodyPr wrap="none">
+            <a:spAutoFit/>
+          </a:bodyPr>
+          <a:lstStyle/>
+          <a:p>
+            <a:r>
+              <a:rPr lang="en-US" altLang="zh-TW" sz="1630" dirty="0">
+                <a:latin typeface="Times New Roman" panose="02020603050405020304" pitchFamily="18" charset="0"/>
+                <a:cs typeface="Times New Roman" panose="02020603050405020304" pitchFamily="18" charset="0"/>
+              </a:rPr>
+              <a:t>0</a:t>
+            </a:r>
+            <a:endParaRPr lang="zh-TW" altLang="en-US" sz="1630" dirty="0">
+              <a:latin typeface="Times New Roman" panose="02020603050405020304" pitchFamily="18" charset="0"/>
+              <a:cs typeface="Times New Roman" panose="02020603050405020304" pitchFamily="18" charset="0"/>
+            </a:endParaRPr>
+          </a:p>
+        </p:txBody>
+      </p:sp>
+      <p:sp>
+        <p:nvSpPr>
+          <p:cNvPr id="41" name="矩形 40">
+            <a:extLst>
+              <a:ext uri="{FF2B5EF4-FFF2-40B4-BE49-F238E27FC236}">
+                <a16:creationId xmlns:a16="http://schemas.microsoft.com/office/drawing/2014/main" id="{E9355848-586F-45EC-A61B-9AB13DBF1474}"/>
+              </a:ext>
+            </a:extLst>
+          </p:cNvPr>
+          <p:cNvSpPr/>
+          <p:nvPr/>
+        </p:nvSpPr>
+        <p:spPr>
+          <a:xfrm>
+            <a:off x="8346758" y="2588174"/>
+            <a:ext cx="288862" cy="343171"/>
+          </a:xfrm>
+          <a:prstGeom prst="rect">
+            <a:avLst/>
+          </a:prstGeom>
+        </p:spPr>
+        <p:txBody>
+          <a:bodyPr wrap="none">
+            <a:spAutoFit/>
+          </a:bodyPr>
+          <a:lstStyle/>
+          <a:p>
+            <a:r>
+              <a:rPr lang="en-US" altLang="zh-TW" sz="1630" dirty="0">
+                <a:latin typeface="Times New Roman" panose="02020603050405020304" pitchFamily="18" charset="0"/>
+                <a:cs typeface="Times New Roman" panose="02020603050405020304" pitchFamily="18" charset="0"/>
+              </a:rPr>
+              <a:t>1</a:t>
+            </a:r>
+            <a:endParaRPr lang="zh-TW" altLang="en-US" sz="1630" dirty="0">
+              <a:latin typeface="Times New Roman" panose="02020603050405020304" pitchFamily="18" charset="0"/>
+              <a:cs typeface="Times New Roman" panose="02020603050405020304" pitchFamily="18" charset="0"/>
+            </a:endParaRPr>
+          </a:p>
+        </p:txBody>
+      </p:sp>
+      <p:sp>
+        <p:nvSpPr>
+          <p:cNvPr id="42" name="矩形 41">
+            <a:extLst>
+              <a:ext uri="{FF2B5EF4-FFF2-40B4-BE49-F238E27FC236}">
+                <a16:creationId xmlns:a16="http://schemas.microsoft.com/office/drawing/2014/main" id="{EAB557D3-A11C-4303-9E25-ED7709E0AEAF}"/>
+              </a:ext>
+            </a:extLst>
+          </p:cNvPr>
+          <p:cNvSpPr/>
+          <p:nvPr/>
+        </p:nvSpPr>
+        <p:spPr>
+          <a:xfrm>
+            <a:off x="8365808" y="3826424"/>
+            <a:ext cx="357790" cy="343171"/>
+          </a:xfrm>
+          <a:prstGeom prst="rect">
+            <a:avLst/>
+          </a:prstGeom>
+        </p:spPr>
+        <p:txBody>
+          <a:bodyPr wrap="none">
+            <a:spAutoFit/>
+          </a:bodyPr>
+          <a:lstStyle/>
+          <a:p>
+            <a:r>
+              <a:rPr lang="en-US" altLang="zh-TW" sz="1630" dirty="0">
+                <a:latin typeface="Times New Roman" panose="02020603050405020304" pitchFamily="18" charset="0"/>
+                <a:cs typeface="Times New Roman" panose="02020603050405020304" pitchFamily="18" charset="0"/>
+              </a:rPr>
+              <a:t>-1</a:t>
+            </a:r>
+            <a:endParaRPr lang="zh-TW" altLang="en-US" sz="1630" dirty="0">
+              <a:latin typeface="Times New Roman" panose="02020603050405020304" pitchFamily="18" charset="0"/>
+              <a:cs typeface="Times New Roman" panose="02020603050405020304" pitchFamily="18" charset="0"/>
+            </a:endParaRPr>
+          </a:p>
+        </p:txBody>
+      </p:sp>
+      <p:pic>
+        <p:nvPicPr>
+          <p:cNvPr id="59" name="圖片 58">
+            <a:extLst>
+              <a:ext uri="{FF2B5EF4-FFF2-40B4-BE49-F238E27FC236}">
+                <a16:creationId xmlns:a16="http://schemas.microsoft.com/office/drawing/2014/main" id="{7EF1C809-3941-4B62-A831-47B1450BE15C}"/>
+              </a:ext>
+            </a:extLst>
+          </p:cNvPr>
+          <p:cNvPicPr>
+            <a:picLocks noChangeAspect="1"/>
+          </p:cNvPicPr>
+          <p:nvPr/>
+        </p:nvPicPr>
+        <p:blipFill rotWithShape="1">
+          <a:blip r:embed="rId2">
+            <a:clrChange>
+              <a:clrFrom>
+                <a:srgbClr val="FFFFFF"/>
+              </a:clrFrom>
+              <a:clrTo>
+                <a:srgbClr val="FFFFFF">
+                  <a:alpha val="0"/>
+                </a:srgbClr>
+              </a:clrTo>
+            </a:clrChange>
+            <a:extLst>
+              <a:ext uri="{28A0092B-C50C-407E-A947-70E740481C1C}">
+                <a14:useLocalDpi xmlns:a14="http://schemas.microsoft.com/office/drawing/2010/main" val="0"/>
+              </a:ext>
+            </a:extLst>
+          </a:blip>
+          <a:srcRect l="34715" r="51207"/>
+          <a:stretch/>
+        </p:blipFill>
+        <p:spPr>
+          <a:xfrm>
+            <a:off x="3974992" y="684093"/>
+            <a:ext cx="1400782" cy="1658288"/>
+          </a:xfrm>
+          <a:prstGeom prst="rect">
+            <a:avLst/>
+          </a:prstGeom>
+        </p:spPr>
+      </p:pic>
+      <p:pic>
+        <p:nvPicPr>
+          <p:cNvPr id="60" name="圖片 59">
+            <a:extLst>
+              <a:ext uri="{FF2B5EF4-FFF2-40B4-BE49-F238E27FC236}">
+                <a16:creationId xmlns:a16="http://schemas.microsoft.com/office/drawing/2014/main" id="{3AFC9ACE-7A82-40C4-A4DA-3A898945BFED}"/>
+              </a:ext>
+            </a:extLst>
+          </p:cNvPr>
+          <p:cNvPicPr>
+            <a:picLocks noChangeAspect="1"/>
+          </p:cNvPicPr>
+          <p:nvPr/>
+        </p:nvPicPr>
+        <p:blipFill rotWithShape="1">
+          <a:blip r:embed="rId3">
+            <a:clrChange>
+              <a:clrFrom>
+                <a:srgbClr val="FFFFFF"/>
+              </a:clrFrom>
+              <a:clrTo>
+                <a:srgbClr val="FFFFFF">
+                  <a:alpha val="0"/>
+                </a:srgbClr>
+              </a:clrTo>
+            </a:clrChange>
+            <a:extLst>
+              <a:ext uri="{28A0092B-C50C-407E-A947-70E740481C1C}">
+                <a14:useLocalDpi xmlns:a14="http://schemas.microsoft.com/office/drawing/2010/main" val="0"/>
+              </a:ext>
+            </a:extLst>
+          </a:blip>
+          <a:srcRect l="34422" r="51206"/>
+          <a:stretch/>
+        </p:blipFill>
+        <p:spPr>
+          <a:xfrm>
+            <a:off x="3955537" y="2583668"/>
+            <a:ext cx="1429965" cy="1658288"/>
+          </a:xfrm>
+          <a:prstGeom prst="rect">
+            <a:avLst/>
+          </a:prstGeom>
+        </p:spPr>
+      </p:pic>
+      <p:pic>
+        <p:nvPicPr>
+          <p:cNvPr id="61" name="圖片 60">
+            <a:extLst>
+              <a:ext uri="{FF2B5EF4-FFF2-40B4-BE49-F238E27FC236}">
+                <a16:creationId xmlns:a16="http://schemas.microsoft.com/office/drawing/2014/main" id="{51C4252C-691E-43E0-B86F-F5004BD95F01}"/>
+              </a:ext>
+            </a:extLst>
+          </p:cNvPr>
+          <p:cNvPicPr>
+            <a:picLocks noChangeAspect="1"/>
+          </p:cNvPicPr>
+          <p:nvPr/>
+        </p:nvPicPr>
+        <p:blipFill rotWithShape="1">
+          <a:blip r:embed="rId2">
+            <a:clrChange>
+              <a:clrFrom>
+                <a:srgbClr val="FFFFFF"/>
+              </a:clrFrom>
+              <a:clrTo>
+                <a:srgbClr val="FFFFFF">
+                  <a:alpha val="0"/>
+                </a:srgbClr>
+              </a:clrTo>
+            </a:clrChange>
+            <a:extLst>
+              <a:ext uri="{28A0092B-C50C-407E-A947-70E740481C1C}">
+                <a14:useLocalDpi xmlns:a14="http://schemas.microsoft.com/office/drawing/2010/main" val="0"/>
+              </a:ext>
+            </a:extLst>
+          </a:blip>
+          <a:srcRect l="51238" r="34390"/>
+          <a:stretch/>
+        </p:blipFill>
+        <p:spPr>
+          <a:xfrm>
+            <a:off x="5288226" y="684093"/>
+            <a:ext cx="1429966" cy="1658288"/>
+          </a:xfrm>
+          <a:prstGeom prst="rect">
+            <a:avLst/>
+          </a:prstGeom>
+        </p:spPr>
+      </p:pic>
+      <p:pic>
+        <p:nvPicPr>
+          <p:cNvPr id="62" name="圖片 61">
+            <a:extLst>
+              <a:ext uri="{FF2B5EF4-FFF2-40B4-BE49-F238E27FC236}">
+                <a16:creationId xmlns:a16="http://schemas.microsoft.com/office/drawing/2014/main" id="{424B62CF-A0E2-41A5-97E8-E008BA775218}"/>
+              </a:ext>
+            </a:extLst>
+          </p:cNvPr>
+          <p:cNvPicPr>
+            <a:picLocks noChangeAspect="1"/>
+          </p:cNvPicPr>
+          <p:nvPr/>
+        </p:nvPicPr>
+        <p:blipFill rotWithShape="1">
+          <a:blip r:embed="rId3">
+            <a:clrChange>
+              <a:clrFrom>
+                <a:srgbClr val="FFFFFF"/>
+              </a:clrFrom>
+              <a:clrTo>
+                <a:srgbClr val="FFFFFF">
+                  <a:alpha val="0"/>
+                </a:srgbClr>
+              </a:clrTo>
+            </a:clrChange>
+            <a:extLst>
+              <a:ext uri="{28A0092B-C50C-407E-A947-70E740481C1C}">
+                <a14:useLocalDpi xmlns:a14="http://schemas.microsoft.com/office/drawing/2010/main" val="0"/>
+              </a:ext>
+            </a:extLst>
+          </a:blip>
+          <a:srcRect l="51140" r="34586"/>
+          <a:stretch/>
+        </p:blipFill>
+        <p:spPr>
+          <a:xfrm>
+            <a:off x="5268770" y="2583668"/>
+            <a:ext cx="1420239" cy="1658288"/>
+          </a:xfrm>
+          <a:prstGeom prst="rect">
+            <a:avLst/>
+          </a:prstGeom>
+        </p:spPr>
+      </p:pic>
+      <p:pic>
+        <p:nvPicPr>
+          <p:cNvPr id="63" name="圖片 62">
+            <a:extLst>
+              <a:ext uri="{FF2B5EF4-FFF2-40B4-BE49-F238E27FC236}">
+                <a16:creationId xmlns:a16="http://schemas.microsoft.com/office/drawing/2014/main" id="{275B4CD4-B5F8-4790-8ED4-69C8B6DAF83C}"/>
+              </a:ext>
+            </a:extLst>
+          </p:cNvPr>
+          <p:cNvPicPr>
+            <a:picLocks noChangeAspect="1"/>
+          </p:cNvPicPr>
+          <p:nvPr/>
+        </p:nvPicPr>
+        <p:blipFill rotWithShape="1">
+          <a:blip r:embed="rId2">
+            <a:clrChange>
+              <a:clrFrom>
+                <a:srgbClr val="FFFFFF"/>
+              </a:clrFrom>
+              <a:clrTo>
+                <a:srgbClr val="FFFFFF">
+                  <a:alpha val="0"/>
+                </a:srgbClr>
+              </a:clrTo>
+            </a:clrChange>
+            <a:extLst>
+              <a:ext uri="{28A0092B-C50C-407E-A947-70E740481C1C}">
+                <a14:useLocalDpi xmlns:a14="http://schemas.microsoft.com/office/drawing/2010/main" val="0"/>
+              </a:ext>
+            </a:extLst>
+          </a:blip>
+          <a:srcRect l="68054" r="17173"/>
+          <a:stretch/>
+        </p:blipFill>
+        <p:spPr>
+          <a:xfrm>
+            <a:off x="6630642" y="684093"/>
+            <a:ext cx="1469863" cy="1658288"/>
+          </a:xfrm>
+          <a:prstGeom prst="rect">
+            <a:avLst/>
+          </a:prstGeom>
+        </p:spPr>
+      </p:pic>
+      <p:pic>
+        <p:nvPicPr>
+          <p:cNvPr id="64" name="圖片 63">
+            <a:extLst>
+              <a:ext uri="{FF2B5EF4-FFF2-40B4-BE49-F238E27FC236}">
+                <a16:creationId xmlns:a16="http://schemas.microsoft.com/office/drawing/2014/main" id="{C843C900-8265-48CB-96AF-A5B26DE32EDD}"/>
+              </a:ext>
+            </a:extLst>
+          </p:cNvPr>
+          <p:cNvPicPr>
+            <a:picLocks noChangeAspect="1"/>
+          </p:cNvPicPr>
+          <p:nvPr/>
+        </p:nvPicPr>
+        <p:blipFill rotWithShape="1">
+          <a:blip r:embed="rId3">
+            <a:clrChange>
+              <a:clrFrom>
+                <a:srgbClr val="FFFFFF"/>
+              </a:clrFrom>
+              <a:clrTo>
+                <a:srgbClr val="FFFFFF">
+                  <a:alpha val="0"/>
+                </a:srgbClr>
+              </a:clrTo>
+            </a:clrChange>
+            <a:extLst>
+              <a:ext uri="{28A0092B-C50C-407E-A947-70E740481C1C}">
+                <a14:useLocalDpi xmlns:a14="http://schemas.microsoft.com/office/drawing/2010/main" val="0"/>
+              </a:ext>
+            </a:extLst>
+          </a:blip>
+          <a:srcRect l="68347" r="17365"/>
+          <a:stretch/>
+        </p:blipFill>
+        <p:spPr>
+          <a:xfrm>
+            <a:off x="6640369" y="2583668"/>
+            <a:ext cx="1421630" cy="1658288"/>
+          </a:xfrm>
+          <a:prstGeom prst="rect">
+            <a:avLst/>
+          </a:prstGeom>
+        </p:spPr>
+      </p:pic>
+      <mc:AlternateContent xmlns:mc="http://schemas.openxmlformats.org/markup-compatibility/2006">
+        <mc:Choice xmlns:a14="http://schemas.microsoft.com/office/drawing/2010/main" Requires="a14">
+          <p:sp>
+            <p:nvSpPr>
+              <p:cNvPr id="47" name="矩形 46">
+                <a:extLst>
+                  <a:ext uri="{FF2B5EF4-FFF2-40B4-BE49-F238E27FC236}">
+                    <a16:creationId xmlns:a16="http://schemas.microsoft.com/office/drawing/2014/main" id="{0C022BE9-80C6-4AF4-8998-A1D5D06474C5}"/>
+                  </a:ext>
+                </a:extLst>
+              </p:cNvPr>
+              <p:cNvSpPr/>
+              <p:nvPr/>
+            </p:nvSpPr>
+            <p:spPr>
+              <a:xfrm>
+                <a:off x="1491761" y="787169"/>
+                <a:ext cx="889154" cy="343171"/>
+              </a:xfrm>
+              <a:prstGeom prst="rect">
+                <a:avLst/>
+              </a:prstGeom>
+            </p:spPr>
+            <p:txBody>
+              <a:bodyPr wrap="square">
+                <a:spAutoFit/>
+              </a:bodyPr>
+              <a:lstStyle/>
+              <a:p>
+                <a:pPr/>
+                <a14:m>
+                  <m:oMathPara xmlns:m="http://schemas.openxmlformats.org/officeDocument/2006/math">
+                    <m:oMathParaPr>
+                      <m:jc m:val="centerGroup"/>
+                    </m:oMathParaPr>
+                    <m:oMath xmlns:m="http://schemas.openxmlformats.org/officeDocument/2006/math">
+                      <m:r>
+                        <a:rPr lang="en-US" altLang="zh-TW" sz="1630" i="1">
+                          <a:latin typeface="Cambria Math" panose="02040503050406030204" pitchFamily="18" charset="0"/>
+                        </a:rPr>
+                        <m:t>ℓ=−2</m:t>
+                      </m:r>
+                    </m:oMath>
+                  </m:oMathPara>
+                </a14:m>
+                <a:endParaRPr lang="zh-TW" altLang="en-US" sz="1630" dirty="0">
+                  <a:latin typeface="Times New Roman" panose="02020603050405020304" pitchFamily="18" charset="0"/>
+                  <a:cs typeface="Times New Roman" panose="02020603050405020304" pitchFamily="18" charset="0"/>
+                </a:endParaRPr>
+              </a:p>
+            </p:txBody>
+          </p:sp>
+        </mc:Choice>
+        <mc:Fallback>
+          <p:sp>
+            <p:nvSpPr>
+              <p:cNvPr id="47" name="矩形 46">
+                <a:extLst>
+                  <a:ext uri="{FF2B5EF4-FFF2-40B4-BE49-F238E27FC236}">
+                    <a16:creationId xmlns:a16="http://schemas.microsoft.com/office/drawing/2014/main" id="{0C022BE9-80C6-4AF4-8998-A1D5D06474C5}"/>
+                  </a:ext>
+                </a:extLst>
+              </p:cNvPr>
+              <p:cNvSpPr>
+                <a:spLocks noRot="1" noChangeAspect="1" noMove="1" noResize="1" noEditPoints="1" noAdjustHandles="1" noChangeArrowheads="1" noChangeShapeType="1" noTextEdit="1"/>
+              </p:cNvSpPr>
+              <p:nvPr/>
+            </p:nvSpPr>
+            <p:spPr>
+              <a:xfrm>
+                <a:off x="1491761" y="787169"/>
+                <a:ext cx="889154" cy="343171"/>
+              </a:xfrm>
+              <a:prstGeom prst="rect">
+                <a:avLst/>
+              </a:prstGeom>
+              <a:blipFill>
+                <a:blip r:embed="rId26"/>
+                <a:stretch>
+                  <a:fillRect/>
+                </a:stretch>
+              </a:blipFill>
+            </p:spPr>
+            <p:txBody>
+              <a:bodyPr/>
+              <a:lstStyle/>
+              <a:p>
+                <a:r>
+                  <a:rPr lang="zh-TW" altLang="en-US">
+                    <a:noFill/>
+                  </a:rPr>
+                  <a:t> </a:t>
+                </a:r>
+              </a:p>
+            </p:txBody>
+          </p:sp>
+        </mc:Fallback>
+      </mc:AlternateContent>
+      <mc:AlternateContent xmlns:mc="http://schemas.openxmlformats.org/markup-compatibility/2006">
+        <mc:Choice xmlns:a14="http://schemas.microsoft.com/office/drawing/2010/main" Requires="a14">
+          <p:sp>
+            <p:nvSpPr>
+              <p:cNvPr id="49" name="矩形 48">
+                <a:extLst>
+                  <a:ext uri="{FF2B5EF4-FFF2-40B4-BE49-F238E27FC236}">
+                    <a16:creationId xmlns:a16="http://schemas.microsoft.com/office/drawing/2014/main" id="{51EC34B8-B9CA-4030-BE38-C481D6D20ED4}"/>
+                  </a:ext>
+                </a:extLst>
+              </p:cNvPr>
+              <p:cNvSpPr/>
+              <p:nvPr/>
+            </p:nvSpPr>
+            <p:spPr>
+              <a:xfrm>
+                <a:off x="2931144" y="787169"/>
+                <a:ext cx="889154" cy="343171"/>
+              </a:xfrm>
+              <a:prstGeom prst="rect">
+                <a:avLst/>
+              </a:prstGeom>
+            </p:spPr>
+            <p:txBody>
+              <a:bodyPr wrap="square">
+                <a:spAutoFit/>
+              </a:bodyPr>
+              <a:lstStyle/>
+              <a:p>
+                <a:pPr/>
+                <a14:m>
+                  <m:oMathPara xmlns:m="http://schemas.openxmlformats.org/officeDocument/2006/math">
+                    <m:oMathParaPr>
+                      <m:jc m:val="centerGroup"/>
+                    </m:oMathParaPr>
+                    <m:oMath xmlns:m="http://schemas.openxmlformats.org/officeDocument/2006/math">
+                      <m:r>
+                        <a:rPr lang="en-US" altLang="zh-TW" sz="1630" i="1">
+                          <a:latin typeface="Cambria Math" panose="02040503050406030204" pitchFamily="18" charset="0"/>
+                        </a:rPr>
+                        <m:t>ℓ=−1</m:t>
+                      </m:r>
+                    </m:oMath>
+                  </m:oMathPara>
+                </a14:m>
+                <a:endParaRPr lang="zh-TW" altLang="en-US" sz="1630" dirty="0">
+                  <a:latin typeface="Times New Roman" panose="02020603050405020304" pitchFamily="18" charset="0"/>
+                  <a:cs typeface="Times New Roman" panose="02020603050405020304" pitchFamily="18" charset="0"/>
+                </a:endParaRPr>
+              </a:p>
+            </p:txBody>
+          </p:sp>
+        </mc:Choice>
+        <mc:Fallback>
+          <p:sp>
+            <p:nvSpPr>
+              <p:cNvPr id="49" name="矩形 48">
+                <a:extLst>
+                  <a:ext uri="{FF2B5EF4-FFF2-40B4-BE49-F238E27FC236}">
+                    <a16:creationId xmlns:a16="http://schemas.microsoft.com/office/drawing/2014/main" id="{51EC34B8-B9CA-4030-BE38-C481D6D20ED4}"/>
+                  </a:ext>
+                </a:extLst>
+              </p:cNvPr>
+              <p:cNvSpPr>
+                <a:spLocks noRot="1" noChangeAspect="1" noMove="1" noResize="1" noEditPoints="1" noAdjustHandles="1" noChangeArrowheads="1" noChangeShapeType="1" noTextEdit="1"/>
+              </p:cNvSpPr>
+              <p:nvPr/>
+            </p:nvSpPr>
+            <p:spPr>
+              <a:xfrm>
+                <a:off x="2931144" y="787169"/>
+                <a:ext cx="889154" cy="343171"/>
+              </a:xfrm>
+              <a:prstGeom prst="rect">
+                <a:avLst/>
+              </a:prstGeom>
+              <a:blipFill>
+                <a:blip r:embed="rId27"/>
+                <a:stretch>
+                  <a:fillRect/>
+                </a:stretch>
+              </a:blipFill>
+            </p:spPr>
+            <p:txBody>
+              <a:bodyPr/>
+              <a:lstStyle/>
+              <a:p>
+                <a:r>
+                  <a:rPr lang="zh-TW" altLang="en-US">
+                    <a:noFill/>
+                  </a:rPr>
+                  <a:t> </a:t>
+                </a:r>
+              </a:p>
+            </p:txBody>
+          </p:sp>
+        </mc:Fallback>
+      </mc:AlternateContent>
+      <mc:AlternateContent xmlns:mc="http://schemas.openxmlformats.org/markup-compatibility/2006">
+        <mc:Choice xmlns:a14="http://schemas.microsoft.com/office/drawing/2010/main" Requires="a14">
+          <p:sp>
+            <p:nvSpPr>
+              <p:cNvPr id="50" name="矩形 49">
+                <a:extLst>
+                  <a:ext uri="{FF2B5EF4-FFF2-40B4-BE49-F238E27FC236}">
+                    <a16:creationId xmlns:a16="http://schemas.microsoft.com/office/drawing/2014/main" id="{7626E0B4-7CA2-459D-9601-04C6B32702D5}"/>
+                  </a:ext>
+                </a:extLst>
+              </p:cNvPr>
+              <p:cNvSpPr/>
+              <p:nvPr/>
+            </p:nvSpPr>
+            <p:spPr>
+              <a:xfrm>
+                <a:off x="4294327" y="787169"/>
+                <a:ext cx="733662" cy="343171"/>
+              </a:xfrm>
+              <a:prstGeom prst="rect">
+                <a:avLst/>
+              </a:prstGeom>
+            </p:spPr>
+            <p:txBody>
+              <a:bodyPr wrap="square">
+                <a:spAutoFit/>
+              </a:bodyPr>
+              <a:lstStyle/>
+              <a:p>
+                <a:pPr/>
+                <a14:m>
+                  <m:oMathPara xmlns:m="http://schemas.openxmlformats.org/officeDocument/2006/math">
+                    <m:oMathParaPr>
+                      <m:jc m:val="centerGroup"/>
+                    </m:oMathParaPr>
+                    <m:oMath xmlns:m="http://schemas.openxmlformats.org/officeDocument/2006/math">
+                      <m:r>
+                        <a:rPr lang="en-US" altLang="zh-TW" sz="1630" i="1">
+                          <a:latin typeface="Cambria Math" panose="02040503050406030204" pitchFamily="18" charset="0"/>
+                        </a:rPr>
+                        <m:t>ℓ=0</m:t>
+                      </m:r>
+                    </m:oMath>
+                  </m:oMathPara>
+                </a14:m>
+                <a:endParaRPr lang="zh-TW" altLang="en-US" sz="1630" dirty="0">
+                  <a:latin typeface="Times New Roman" panose="02020603050405020304" pitchFamily="18" charset="0"/>
+                  <a:cs typeface="Times New Roman" panose="02020603050405020304" pitchFamily="18" charset="0"/>
+                </a:endParaRPr>
+              </a:p>
+            </p:txBody>
+          </p:sp>
+        </mc:Choice>
+        <mc:Fallback>
+          <p:sp>
+            <p:nvSpPr>
+              <p:cNvPr id="50" name="矩形 49">
+                <a:extLst>
+                  <a:ext uri="{FF2B5EF4-FFF2-40B4-BE49-F238E27FC236}">
+                    <a16:creationId xmlns:a16="http://schemas.microsoft.com/office/drawing/2014/main" id="{7626E0B4-7CA2-459D-9601-04C6B32702D5}"/>
+                  </a:ext>
+                </a:extLst>
+              </p:cNvPr>
+              <p:cNvSpPr>
+                <a:spLocks noRot="1" noChangeAspect="1" noMove="1" noResize="1" noEditPoints="1" noAdjustHandles="1" noChangeArrowheads="1" noChangeShapeType="1" noTextEdit="1"/>
+              </p:cNvSpPr>
+              <p:nvPr/>
+            </p:nvSpPr>
+            <p:spPr>
+              <a:xfrm>
+                <a:off x="4294327" y="787169"/>
+                <a:ext cx="733662" cy="343171"/>
+              </a:xfrm>
+              <a:prstGeom prst="rect">
+                <a:avLst/>
+              </a:prstGeom>
+              <a:blipFill>
+                <a:blip r:embed="rId28"/>
+                <a:stretch>
+                  <a:fillRect/>
+                </a:stretch>
+              </a:blipFill>
+            </p:spPr>
+            <p:txBody>
+              <a:bodyPr/>
+              <a:lstStyle/>
+              <a:p>
+                <a:r>
+                  <a:rPr lang="zh-TW" altLang="en-US">
+                    <a:noFill/>
+                  </a:rPr>
+                  <a:t> </a:t>
+                </a:r>
+              </a:p>
+            </p:txBody>
+          </p:sp>
+        </mc:Fallback>
+      </mc:AlternateContent>
+      <mc:AlternateContent xmlns:mc="http://schemas.openxmlformats.org/markup-compatibility/2006">
+        <mc:Choice xmlns:a14="http://schemas.microsoft.com/office/drawing/2010/main" Requires="a14">
+          <p:sp>
+            <p:nvSpPr>
+              <p:cNvPr id="51" name="矩形 50">
+                <a:extLst>
+                  <a:ext uri="{FF2B5EF4-FFF2-40B4-BE49-F238E27FC236}">
+                    <a16:creationId xmlns:a16="http://schemas.microsoft.com/office/drawing/2014/main" id="{3F6CE0F2-6D19-4E6C-95F4-5A1A19791875}"/>
+                  </a:ext>
+                </a:extLst>
+              </p:cNvPr>
+              <p:cNvSpPr/>
+              <p:nvPr/>
+            </p:nvSpPr>
+            <p:spPr>
+              <a:xfrm>
+                <a:off x="5654418" y="787169"/>
+                <a:ext cx="733662" cy="343171"/>
+              </a:xfrm>
+              <a:prstGeom prst="rect">
+                <a:avLst/>
+              </a:prstGeom>
+            </p:spPr>
+            <p:txBody>
+              <a:bodyPr wrap="square">
+                <a:spAutoFit/>
+              </a:bodyPr>
+              <a:lstStyle/>
+              <a:p>
+                <a:pPr/>
+                <a14:m>
+                  <m:oMathPara xmlns:m="http://schemas.openxmlformats.org/officeDocument/2006/math">
+                    <m:oMathParaPr>
+                      <m:jc m:val="centerGroup"/>
+                    </m:oMathParaPr>
+                    <m:oMath xmlns:m="http://schemas.openxmlformats.org/officeDocument/2006/math">
+                      <m:r>
+                        <a:rPr lang="en-US" altLang="zh-TW" sz="1630" i="1">
+                          <a:latin typeface="Cambria Math" panose="02040503050406030204" pitchFamily="18" charset="0"/>
+                        </a:rPr>
+                        <m:t>ℓ=1</m:t>
+                      </m:r>
+                    </m:oMath>
+                  </m:oMathPara>
+                </a14:m>
+                <a:endParaRPr lang="zh-TW" altLang="en-US" sz="1630" dirty="0">
+                  <a:latin typeface="Times New Roman" panose="02020603050405020304" pitchFamily="18" charset="0"/>
+                  <a:cs typeface="Times New Roman" panose="02020603050405020304" pitchFamily="18" charset="0"/>
+                </a:endParaRPr>
+              </a:p>
+            </p:txBody>
+          </p:sp>
+        </mc:Choice>
+        <mc:Fallback>
+          <p:sp>
+            <p:nvSpPr>
+              <p:cNvPr id="51" name="矩形 50">
+                <a:extLst>
+                  <a:ext uri="{FF2B5EF4-FFF2-40B4-BE49-F238E27FC236}">
+                    <a16:creationId xmlns:a16="http://schemas.microsoft.com/office/drawing/2014/main" id="{3F6CE0F2-6D19-4E6C-95F4-5A1A19791875}"/>
+                  </a:ext>
+                </a:extLst>
+              </p:cNvPr>
+              <p:cNvSpPr>
+                <a:spLocks noRot="1" noChangeAspect="1" noMove="1" noResize="1" noEditPoints="1" noAdjustHandles="1" noChangeArrowheads="1" noChangeShapeType="1" noTextEdit="1"/>
+              </p:cNvSpPr>
+              <p:nvPr/>
+            </p:nvSpPr>
+            <p:spPr>
+              <a:xfrm>
+                <a:off x="5654418" y="787169"/>
+                <a:ext cx="733662" cy="343171"/>
+              </a:xfrm>
+              <a:prstGeom prst="rect">
+                <a:avLst/>
+              </a:prstGeom>
+              <a:blipFill>
+                <a:blip r:embed="rId29"/>
+                <a:stretch>
+                  <a:fillRect/>
+                </a:stretch>
+              </a:blipFill>
+            </p:spPr>
+            <p:txBody>
+              <a:bodyPr/>
+              <a:lstStyle/>
+              <a:p>
+                <a:r>
+                  <a:rPr lang="zh-TW" altLang="en-US">
+                    <a:noFill/>
+                  </a:rPr>
+                  <a:t> </a:t>
+                </a:r>
+              </a:p>
+            </p:txBody>
+          </p:sp>
+        </mc:Fallback>
+      </mc:AlternateContent>
+      <mc:AlternateContent xmlns:mc="http://schemas.openxmlformats.org/markup-compatibility/2006">
+        <mc:Choice xmlns:a14="http://schemas.microsoft.com/office/drawing/2010/main" Requires="a14">
+          <p:sp>
+            <p:nvSpPr>
+              <p:cNvPr id="52" name="矩形 51">
+                <a:extLst>
+                  <a:ext uri="{FF2B5EF4-FFF2-40B4-BE49-F238E27FC236}">
+                    <a16:creationId xmlns:a16="http://schemas.microsoft.com/office/drawing/2014/main" id="{0F4F07AD-DE02-4748-8EF5-507C2941CFC8}"/>
+                  </a:ext>
+                </a:extLst>
+              </p:cNvPr>
+              <p:cNvSpPr/>
+              <p:nvPr/>
+            </p:nvSpPr>
+            <p:spPr>
+              <a:xfrm>
+                <a:off x="6938309" y="787169"/>
+                <a:ext cx="733662" cy="343171"/>
+              </a:xfrm>
+              <a:prstGeom prst="rect">
+                <a:avLst/>
+              </a:prstGeom>
+            </p:spPr>
+            <p:txBody>
+              <a:bodyPr wrap="square">
+                <a:spAutoFit/>
+              </a:bodyPr>
+              <a:lstStyle/>
+              <a:p>
+                <a:pPr/>
+                <a14:m>
+                  <m:oMathPara xmlns:m="http://schemas.openxmlformats.org/officeDocument/2006/math">
+                    <m:oMathParaPr>
+                      <m:jc m:val="centerGroup"/>
+                    </m:oMathParaPr>
+                    <m:oMath xmlns:m="http://schemas.openxmlformats.org/officeDocument/2006/math">
+                      <m:r>
+                        <a:rPr lang="en-US" altLang="zh-TW" sz="1630" i="1">
+                          <a:latin typeface="Cambria Math" panose="02040503050406030204" pitchFamily="18" charset="0"/>
+                        </a:rPr>
+                        <m:t>ℓ=2</m:t>
+                      </m:r>
+                    </m:oMath>
+                  </m:oMathPara>
+                </a14:m>
+                <a:endParaRPr lang="zh-TW" altLang="en-US" sz="1630" dirty="0">
+                  <a:latin typeface="Times New Roman" panose="02020603050405020304" pitchFamily="18" charset="0"/>
+                  <a:cs typeface="Times New Roman" panose="02020603050405020304" pitchFamily="18" charset="0"/>
+                </a:endParaRPr>
+              </a:p>
+            </p:txBody>
+          </p:sp>
+        </mc:Choice>
+        <mc:Fallback>
+          <p:sp>
+            <p:nvSpPr>
+              <p:cNvPr id="52" name="矩形 51">
+                <a:extLst>
+                  <a:ext uri="{FF2B5EF4-FFF2-40B4-BE49-F238E27FC236}">
+                    <a16:creationId xmlns:a16="http://schemas.microsoft.com/office/drawing/2014/main" id="{0F4F07AD-DE02-4748-8EF5-507C2941CFC8}"/>
+                  </a:ext>
+                </a:extLst>
+              </p:cNvPr>
+              <p:cNvSpPr>
+                <a:spLocks noRot="1" noChangeAspect="1" noMove="1" noResize="1" noEditPoints="1" noAdjustHandles="1" noChangeArrowheads="1" noChangeShapeType="1" noTextEdit="1"/>
+              </p:cNvSpPr>
+              <p:nvPr/>
+            </p:nvSpPr>
+            <p:spPr>
+              <a:xfrm>
+                <a:off x="6938309" y="787169"/>
+                <a:ext cx="733662" cy="343171"/>
+              </a:xfrm>
+              <a:prstGeom prst="rect">
+                <a:avLst/>
+              </a:prstGeom>
+              <a:blipFill>
+                <a:blip r:embed="rId30"/>
+                <a:stretch>
+                  <a:fillRect/>
+                </a:stretch>
+              </a:blipFill>
+            </p:spPr>
+            <p:txBody>
+              <a:bodyPr/>
+              <a:lstStyle/>
+              <a:p>
+                <a:r>
+                  <a:rPr lang="zh-TW" altLang="en-US">
+                    <a:noFill/>
+                  </a:rPr>
+                  <a:t> </a:t>
+                </a:r>
+              </a:p>
+            </p:txBody>
+          </p:sp>
+        </mc:Fallback>
+      </mc:AlternateContent>
+      <mc:AlternateContent xmlns:mc="http://schemas.openxmlformats.org/markup-compatibility/2006">
+        <mc:Choice xmlns:a14="http://schemas.microsoft.com/office/drawing/2010/main" Requires="a14">
+          <p:sp>
+            <p:nvSpPr>
+              <p:cNvPr id="54" name="矩形 53">
+                <a:extLst>
+                  <a:ext uri="{FF2B5EF4-FFF2-40B4-BE49-F238E27FC236}">
+                    <a16:creationId xmlns:a16="http://schemas.microsoft.com/office/drawing/2014/main" id="{998758AE-B7B5-4A39-8A8A-9C4CDF0D9BF9}"/>
+                  </a:ext>
+                </a:extLst>
+              </p:cNvPr>
+              <p:cNvSpPr/>
+              <p:nvPr/>
+            </p:nvSpPr>
+            <p:spPr>
+              <a:xfrm>
+                <a:off x="1491761" y="2719988"/>
+                <a:ext cx="889154" cy="343171"/>
+              </a:xfrm>
+              <a:prstGeom prst="rect">
+                <a:avLst/>
+              </a:prstGeom>
+            </p:spPr>
+            <p:txBody>
+              <a:bodyPr wrap="square">
+                <a:spAutoFit/>
+              </a:bodyPr>
+              <a:lstStyle/>
+              <a:p>
+                <a:pPr/>
+                <a14:m>
+                  <m:oMathPara xmlns:m="http://schemas.openxmlformats.org/officeDocument/2006/math">
+                    <m:oMathParaPr>
+                      <m:jc m:val="centerGroup"/>
+                    </m:oMathParaPr>
+                    <m:oMath xmlns:m="http://schemas.openxmlformats.org/officeDocument/2006/math">
+                      <m:r>
+                        <a:rPr lang="en-US" altLang="zh-TW" sz="1630" i="1">
+                          <a:latin typeface="Cambria Math" panose="02040503050406030204" pitchFamily="18" charset="0"/>
+                        </a:rPr>
+                        <m:t>ℓ=−2</m:t>
+                      </m:r>
+                    </m:oMath>
+                  </m:oMathPara>
+                </a14:m>
+                <a:endParaRPr lang="zh-TW" altLang="en-US" sz="1630" dirty="0">
+                  <a:latin typeface="Times New Roman" panose="02020603050405020304" pitchFamily="18" charset="0"/>
+                  <a:cs typeface="Times New Roman" panose="02020603050405020304" pitchFamily="18" charset="0"/>
+                </a:endParaRPr>
+              </a:p>
+            </p:txBody>
+          </p:sp>
+        </mc:Choice>
+        <mc:Fallback>
+          <p:sp>
+            <p:nvSpPr>
+              <p:cNvPr id="54" name="矩形 53">
+                <a:extLst>
+                  <a:ext uri="{FF2B5EF4-FFF2-40B4-BE49-F238E27FC236}">
+                    <a16:creationId xmlns:a16="http://schemas.microsoft.com/office/drawing/2014/main" id="{998758AE-B7B5-4A39-8A8A-9C4CDF0D9BF9}"/>
+                  </a:ext>
+                </a:extLst>
+              </p:cNvPr>
+              <p:cNvSpPr>
+                <a:spLocks noRot="1" noChangeAspect="1" noMove="1" noResize="1" noEditPoints="1" noAdjustHandles="1" noChangeArrowheads="1" noChangeShapeType="1" noTextEdit="1"/>
+              </p:cNvSpPr>
+              <p:nvPr/>
+            </p:nvSpPr>
+            <p:spPr>
+              <a:xfrm>
+                <a:off x="1491761" y="2719988"/>
+                <a:ext cx="889154" cy="343171"/>
+              </a:xfrm>
+              <a:prstGeom prst="rect">
+                <a:avLst/>
+              </a:prstGeom>
+              <a:blipFill>
+                <a:blip r:embed="rId31"/>
+                <a:stretch>
+                  <a:fillRect/>
+                </a:stretch>
+              </a:blipFill>
+            </p:spPr>
+            <p:txBody>
+              <a:bodyPr/>
+              <a:lstStyle/>
+              <a:p>
+                <a:r>
+                  <a:rPr lang="zh-TW" altLang="en-US">
+                    <a:noFill/>
+                  </a:rPr>
+                  <a:t> </a:t>
+                </a:r>
+              </a:p>
+            </p:txBody>
+          </p:sp>
+        </mc:Fallback>
+      </mc:AlternateContent>
+      <mc:AlternateContent xmlns:mc="http://schemas.openxmlformats.org/markup-compatibility/2006">
+        <mc:Choice xmlns:a14="http://schemas.microsoft.com/office/drawing/2010/main" Requires="a14">
+          <p:sp>
+            <p:nvSpPr>
+              <p:cNvPr id="56" name="矩形 55">
+                <a:extLst>
+                  <a:ext uri="{FF2B5EF4-FFF2-40B4-BE49-F238E27FC236}">
+                    <a16:creationId xmlns:a16="http://schemas.microsoft.com/office/drawing/2014/main" id="{98783FC7-C31A-4177-B406-4D671DA17729}"/>
+                  </a:ext>
+                </a:extLst>
+              </p:cNvPr>
+              <p:cNvSpPr/>
+              <p:nvPr/>
+            </p:nvSpPr>
+            <p:spPr>
+              <a:xfrm>
+                <a:off x="2931144" y="2719989"/>
+                <a:ext cx="889154" cy="343171"/>
+              </a:xfrm>
+              <a:prstGeom prst="rect">
+                <a:avLst/>
+              </a:prstGeom>
+            </p:spPr>
+            <p:txBody>
+              <a:bodyPr wrap="square">
+                <a:spAutoFit/>
+              </a:bodyPr>
+              <a:lstStyle/>
+              <a:p>
+                <a:pPr/>
+                <a14:m>
+                  <m:oMathPara xmlns:m="http://schemas.openxmlformats.org/officeDocument/2006/math">
+                    <m:oMathParaPr>
+                      <m:jc m:val="centerGroup"/>
+                    </m:oMathParaPr>
+                    <m:oMath xmlns:m="http://schemas.openxmlformats.org/officeDocument/2006/math">
+                      <m:r>
+                        <a:rPr lang="en-US" altLang="zh-TW" sz="1630" i="1">
+                          <a:latin typeface="Cambria Math" panose="02040503050406030204" pitchFamily="18" charset="0"/>
+                        </a:rPr>
+                        <m:t>ℓ=−1</m:t>
+                      </m:r>
+                    </m:oMath>
+                  </m:oMathPara>
+                </a14:m>
+                <a:endParaRPr lang="zh-TW" altLang="en-US" sz="1630" dirty="0">
+                  <a:latin typeface="Times New Roman" panose="02020603050405020304" pitchFamily="18" charset="0"/>
+                  <a:cs typeface="Times New Roman" panose="02020603050405020304" pitchFamily="18" charset="0"/>
+                </a:endParaRPr>
+              </a:p>
+            </p:txBody>
+          </p:sp>
+        </mc:Choice>
+        <mc:Fallback>
+          <p:sp>
+            <p:nvSpPr>
+              <p:cNvPr id="56" name="矩形 55">
+                <a:extLst>
+                  <a:ext uri="{FF2B5EF4-FFF2-40B4-BE49-F238E27FC236}">
+                    <a16:creationId xmlns:a16="http://schemas.microsoft.com/office/drawing/2014/main" id="{98783FC7-C31A-4177-B406-4D671DA17729}"/>
+                  </a:ext>
+                </a:extLst>
+              </p:cNvPr>
+              <p:cNvSpPr>
+                <a:spLocks noRot="1" noChangeAspect="1" noMove="1" noResize="1" noEditPoints="1" noAdjustHandles="1" noChangeArrowheads="1" noChangeShapeType="1" noTextEdit="1"/>
+              </p:cNvSpPr>
+              <p:nvPr/>
+            </p:nvSpPr>
+            <p:spPr>
+              <a:xfrm>
+                <a:off x="2931144" y="2719989"/>
+                <a:ext cx="889154" cy="343171"/>
+              </a:xfrm>
+              <a:prstGeom prst="rect">
+                <a:avLst/>
+              </a:prstGeom>
+              <a:blipFill>
+                <a:blip r:embed="rId32"/>
+                <a:stretch>
+                  <a:fillRect/>
+                </a:stretch>
+              </a:blipFill>
+            </p:spPr>
+            <p:txBody>
+              <a:bodyPr/>
+              <a:lstStyle/>
+              <a:p>
+                <a:r>
+                  <a:rPr lang="zh-TW" altLang="en-US">
+                    <a:noFill/>
+                  </a:rPr>
+                  <a:t> </a:t>
+                </a:r>
+              </a:p>
+            </p:txBody>
+          </p:sp>
+        </mc:Fallback>
+      </mc:AlternateContent>
+      <mc:AlternateContent xmlns:mc="http://schemas.openxmlformats.org/markup-compatibility/2006">
+        <mc:Choice xmlns:a14="http://schemas.microsoft.com/office/drawing/2010/main" Requires="a14">
+          <p:sp>
+            <p:nvSpPr>
+              <p:cNvPr id="57" name="矩形 56">
+                <a:extLst>
+                  <a:ext uri="{FF2B5EF4-FFF2-40B4-BE49-F238E27FC236}">
+                    <a16:creationId xmlns:a16="http://schemas.microsoft.com/office/drawing/2014/main" id="{37D72A01-C052-4820-BBED-D2187CB98E18}"/>
+                  </a:ext>
+                </a:extLst>
+              </p:cNvPr>
+              <p:cNvSpPr/>
+              <p:nvPr/>
+            </p:nvSpPr>
+            <p:spPr>
+              <a:xfrm>
+                <a:off x="4294327" y="2719989"/>
+                <a:ext cx="733662" cy="343171"/>
+              </a:xfrm>
+              <a:prstGeom prst="rect">
+                <a:avLst/>
+              </a:prstGeom>
+            </p:spPr>
+            <p:txBody>
+              <a:bodyPr wrap="square">
+                <a:spAutoFit/>
+              </a:bodyPr>
+              <a:lstStyle/>
+              <a:p>
+                <a:pPr/>
+                <a14:m>
+                  <m:oMathPara xmlns:m="http://schemas.openxmlformats.org/officeDocument/2006/math">
+                    <m:oMathParaPr>
+                      <m:jc m:val="centerGroup"/>
+                    </m:oMathParaPr>
+                    <m:oMath xmlns:m="http://schemas.openxmlformats.org/officeDocument/2006/math">
+                      <m:r>
+                        <a:rPr lang="en-US" altLang="zh-TW" sz="1630" i="1">
+                          <a:latin typeface="Cambria Math" panose="02040503050406030204" pitchFamily="18" charset="0"/>
+                        </a:rPr>
+                        <m:t>ℓ=0</m:t>
+                      </m:r>
+                    </m:oMath>
+                  </m:oMathPara>
+                </a14:m>
+                <a:endParaRPr lang="zh-TW" altLang="en-US" sz="1630" dirty="0">
+                  <a:latin typeface="Times New Roman" panose="02020603050405020304" pitchFamily="18" charset="0"/>
+                  <a:cs typeface="Times New Roman" panose="02020603050405020304" pitchFamily="18" charset="0"/>
+                </a:endParaRPr>
+              </a:p>
+            </p:txBody>
+          </p:sp>
+        </mc:Choice>
+        <mc:Fallback>
+          <p:sp>
+            <p:nvSpPr>
+              <p:cNvPr id="57" name="矩形 56">
+                <a:extLst>
+                  <a:ext uri="{FF2B5EF4-FFF2-40B4-BE49-F238E27FC236}">
+                    <a16:creationId xmlns:a16="http://schemas.microsoft.com/office/drawing/2014/main" id="{37D72A01-C052-4820-BBED-D2187CB98E18}"/>
+                  </a:ext>
+                </a:extLst>
+              </p:cNvPr>
+              <p:cNvSpPr>
+                <a:spLocks noRot="1" noChangeAspect="1" noMove="1" noResize="1" noEditPoints="1" noAdjustHandles="1" noChangeArrowheads="1" noChangeShapeType="1" noTextEdit="1"/>
+              </p:cNvSpPr>
+              <p:nvPr/>
+            </p:nvSpPr>
+            <p:spPr>
+              <a:xfrm>
+                <a:off x="4294327" y="2719989"/>
+                <a:ext cx="733662" cy="343171"/>
+              </a:xfrm>
+              <a:prstGeom prst="rect">
+                <a:avLst/>
+              </a:prstGeom>
+              <a:blipFill>
+                <a:blip r:embed="rId33"/>
+                <a:stretch>
+                  <a:fillRect/>
+                </a:stretch>
+              </a:blipFill>
+            </p:spPr>
+            <p:txBody>
+              <a:bodyPr/>
+              <a:lstStyle/>
+              <a:p>
+                <a:r>
+                  <a:rPr lang="zh-TW" altLang="en-US">
+                    <a:noFill/>
+                  </a:rPr>
+                  <a:t> </a:t>
+                </a:r>
+              </a:p>
+            </p:txBody>
+          </p:sp>
+        </mc:Fallback>
+      </mc:AlternateContent>
+      <mc:AlternateContent xmlns:mc="http://schemas.openxmlformats.org/markup-compatibility/2006">
+        <mc:Choice xmlns:a14="http://schemas.microsoft.com/office/drawing/2010/main" Requires="a14">
+          <p:sp>
+            <p:nvSpPr>
+              <p:cNvPr id="82" name="矩形 81">
+                <a:extLst>
+                  <a:ext uri="{FF2B5EF4-FFF2-40B4-BE49-F238E27FC236}">
+                    <a16:creationId xmlns:a16="http://schemas.microsoft.com/office/drawing/2014/main" id="{990EE664-F023-4537-B835-620C68FC83B8}"/>
+                  </a:ext>
+                </a:extLst>
+              </p:cNvPr>
+              <p:cNvSpPr/>
+              <p:nvPr/>
+            </p:nvSpPr>
+            <p:spPr>
+              <a:xfrm>
+                <a:off x="5654418" y="2719989"/>
+                <a:ext cx="733662" cy="343171"/>
+              </a:xfrm>
+              <a:prstGeom prst="rect">
+                <a:avLst/>
+              </a:prstGeom>
+            </p:spPr>
+            <p:txBody>
+              <a:bodyPr wrap="square">
+                <a:spAutoFit/>
+              </a:bodyPr>
+              <a:lstStyle/>
+              <a:p>
+                <a:pPr/>
+                <a14:m>
+                  <m:oMathPara xmlns:m="http://schemas.openxmlformats.org/officeDocument/2006/math">
+                    <m:oMathParaPr>
+                      <m:jc m:val="centerGroup"/>
+                    </m:oMathParaPr>
+                    <m:oMath xmlns:m="http://schemas.openxmlformats.org/officeDocument/2006/math">
+                      <m:r>
+                        <a:rPr lang="en-US" altLang="zh-TW" sz="1630" i="1">
+                          <a:latin typeface="Cambria Math" panose="02040503050406030204" pitchFamily="18" charset="0"/>
+                        </a:rPr>
+                        <m:t>ℓ=1</m:t>
+                      </m:r>
+                    </m:oMath>
+                  </m:oMathPara>
+                </a14:m>
+                <a:endParaRPr lang="zh-TW" altLang="en-US" sz="1630" dirty="0">
+                  <a:latin typeface="Times New Roman" panose="02020603050405020304" pitchFamily="18" charset="0"/>
+                  <a:cs typeface="Times New Roman" panose="02020603050405020304" pitchFamily="18" charset="0"/>
+                </a:endParaRPr>
+              </a:p>
+            </p:txBody>
+          </p:sp>
+        </mc:Choice>
+        <mc:Fallback>
+          <p:sp>
+            <p:nvSpPr>
+              <p:cNvPr id="82" name="矩形 81">
+                <a:extLst>
+                  <a:ext uri="{FF2B5EF4-FFF2-40B4-BE49-F238E27FC236}">
+                    <a16:creationId xmlns:a16="http://schemas.microsoft.com/office/drawing/2014/main" id="{990EE664-F023-4537-B835-620C68FC83B8}"/>
+                  </a:ext>
+                </a:extLst>
+              </p:cNvPr>
+              <p:cNvSpPr>
+                <a:spLocks noRot="1" noChangeAspect="1" noMove="1" noResize="1" noEditPoints="1" noAdjustHandles="1" noChangeArrowheads="1" noChangeShapeType="1" noTextEdit="1"/>
+              </p:cNvSpPr>
+              <p:nvPr/>
+            </p:nvSpPr>
+            <p:spPr>
+              <a:xfrm>
+                <a:off x="5654418" y="2719989"/>
+                <a:ext cx="733662" cy="343171"/>
+              </a:xfrm>
+              <a:prstGeom prst="rect">
+                <a:avLst/>
+              </a:prstGeom>
+              <a:blipFill>
+                <a:blip r:embed="rId34"/>
+                <a:stretch>
+                  <a:fillRect/>
+                </a:stretch>
+              </a:blipFill>
+            </p:spPr>
+            <p:txBody>
+              <a:bodyPr/>
+              <a:lstStyle/>
+              <a:p>
+                <a:r>
+                  <a:rPr lang="zh-TW" altLang="en-US">
+                    <a:noFill/>
+                  </a:rPr>
+                  <a:t> </a:t>
+                </a:r>
+              </a:p>
+            </p:txBody>
+          </p:sp>
+        </mc:Fallback>
+      </mc:AlternateContent>
+      <mc:AlternateContent xmlns:mc="http://schemas.openxmlformats.org/markup-compatibility/2006">
+        <mc:Choice xmlns:a14="http://schemas.microsoft.com/office/drawing/2010/main" Requires="a14">
+          <p:sp>
+            <p:nvSpPr>
+              <p:cNvPr id="83" name="矩形 82">
+                <a:extLst>
+                  <a:ext uri="{FF2B5EF4-FFF2-40B4-BE49-F238E27FC236}">
+                    <a16:creationId xmlns:a16="http://schemas.microsoft.com/office/drawing/2014/main" id="{A9E16470-7720-49A3-9DC9-3F0C741E2468}"/>
+                  </a:ext>
+                </a:extLst>
+              </p:cNvPr>
+              <p:cNvSpPr/>
+              <p:nvPr/>
+            </p:nvSpPr>
+            <p:spPr>
+              <a:xfrm>
+                <a:off x="6938309" y="2719989"/>
+                <a:ext cx="733662" cy="343171"/>
+              </a:xfrm>
+              <a:prstGeom prst="rect">
+                <a:avLst/>
+              </a:prstGeom>
+            </p:spPr>
+            <p:txBody>
+              <a:bodyPr wrap="square">
+                <a:spAutoFit/>
+              </a:bodyPr>
+              <a:lstStyle/>
+              <a:p>
+                <a:pPr/>
+                <a14:m>
+                  <m:oMathPara xmlns:m="http://schemas.openxmlformats.org/officeDocument/2006/math">
+                    <m:oMathParaPr>
+                      <m:jc m:val="centerGroup"/>
+                    </m:oMathParaPr>
+                    <m:oMath xmlns:m="http://schemas.openxmlformats.org/officeDocument/2006/math">
+                      <m:r>
+                        <a:rPr lang="en-US" altLang="zh-TW" sz="1630" i="1">
+                          <a:latin typeface="Cambria Math" panose="02040503050406030204" pitchFamily="18" charset="0"/>
+                        </a:rPr>
+                        <m:t>ℓ=2</m:t>
+                      </m:r>
+                    </m:oMath>
+                  </m:oMathPara>
+                </a14:m>
+                <a:endParaRPr lang="zh-TW" altLang="en-US" sz="1630" dirty="0">
+                  <a:latin typeface="Times New Roman" panose="02020603050405020304" pitchFamily="18" charset="0"/>
+                  <a:cs typeface="Times New Roman" panose="02020603050405020304" pitchFamily="18" charset="0"/>
+                </a:endParaRPr>
+              </a:p>
+            </p:txBody>
+          </p:sp>
+        </mc:Choice>
+        <mc:Fallback>
+          <p:sp>
+            <p:nvSpPr>
+              <p:cNvPr id="83" name="矩形 82">
+                <a:extLst>
+                  <a:ext uri="{FF2B5EF4-FFF2-40B4-BE49-F238E27FC236}">
+                    <a16:creationId xmlns:a16="http://schemas.microsoft.com/office/drawing/2014/main" id="{A9E16470-7720-49A3-9DC9-3F0C741E2468}"/>
+                  </a:ext>
+                </a:extLst>
+              </p:cNvPr>
+              <p:cNvSpPr>
+                <a:spLocks noRot="1" noChangeAspect="1" noMove="1" noResize="1" noEditPoints="1" noAdjustHandles="1" noChangeArrowheads="1" noChangeShapeType="1" noTextEdit="1"/>
+              </p:cNvSpPr>
+              <p:nvPr/>
+            </p:nvSpPr>
+            <p:spPr>
+              <a:xfrm>
+                <a:off x="6938309" y="2719989"/>
+                <a:ext cx="733662" cy="343171"/>
+              </a:xfrm>
+              <a:prstGeom prst="rect">
+                <a:avLst/>
+              </a:prstGeom>
+              <a:blipFill>
+                <a:blip r:embed="rId35"/>
+                <a:stretch>
+                  <a:fillRect/>
+                </a:stretch>
+              </a:blipFill>
+            </p:spPr>
+            <p:txBody>
+              <a:bodyPr/>
+              <a:lstStyle/>
+              <a:p>
+                <a:r>
+                  <a:rPr lang="zh-TW" altLang="en-US">
+                    <a:noFill/>
+                  </a:rPr>
+                  <a:t> </a:t>
+                </a:r>
+              </a:p>
+            </p:txBody>
+          </p:sp>
+        </mc:Fallback>
+      </mc:AlternateContent>
+    </p:spTree>
+    <p:extLst>
+      <p:ext uri="{BB962C8B-B14F-4D97-AF65-F5344CB8AC3E}">
+        <p14:creationId xmlns:p14="http://schemas.microsoft.com/office/powerpoint/2010/main" val="1795068390"/>
+      </p:ext>
+    </p:extLst>
+  </p:cSld>
+  <p:clrMapOvr>
+    <a:masterClrMapping/>
+  </p:clrMapOvr>
+</p:sld>
+</file>
+
 <file path=ppt/theme/theme1.xml><?xml version="1.0" encoding="utf-8"?>
 <a:theme xmlns:a="http://schemas.openxmlformats.org/drawingml/2006/main" name="Office 佈景主題">
   <a:themeElements>

--- a/Final/Figures/A_C_transeverse.pptx
+++ b/Final/Figures/A_C_transeverse.pptx
@@ -244,7 +244,7 @@
           <a:p>
             <a:fld id="{CC6FB895-B65F-4EA9-9907-69D32227E72B}" type="datetimeFigureOut">
               <a:rPr lang="zh-TW" altLang="en-US" smtClean="0"/>
-              <a:t>2026/7/2</a:t>
+              <a:t>2026/7/18</a:t>
             </a:fld>
             <a:endParaRPr lang="zh-TW" altLang="en-US"/>
           </a:p>
@@ -414,7 +414,7 @@
           <a:p>
             <a:fld id="{CC6FB895-B65F-4EA9-9907-69D32227E72B}" type="datetimeFigureOut">
               <a:rPr lang="zh-TW" altLang="en-US" smtClean="0"/>
-              <a:t>2026/7/2</a:t>
+              <a:t>2026/7/18</a:t>
             </a:fld>
             <a:endParaRPr lang="zh-TW" altLang="en-US"/>
           </a:p>
@@ -594,7 +594,7 @@
           <a:p>
             <a:fld id="{CC6FB895-B65F-4EA9-9907-69D32227E72B}" type="datetimeFigureOut">
               <a:rPr lang="zh-TW" altLang="en-US" smtClean="0"/>
-              <a:t>2026/7/2</a:t>
+              <a:t>2026/7/18</a:t>
             </a:fld>
             <a:endParaRPr lang="zh-TW" altLang="en-US"/>
           </a:p>
@@ -764,7 +764,7 @@
           <a:p>
             <a:fld id="{CC6FB895-B65F-4EA9-9907-69D32227E72B}" type="datetimeFigureOut">
               <a:rPr lang="zh-TW" altLang="en-US" smtClean="0"/>
-              <a:t>2026/7/2</a:t>
+              <a:t>2026/7/18</a:t>
             </a:fld>
             <a:endParaRPr lang="zh-TW" altLang="en-US"/>
           </a:p>
@@ -1010,7 +1010,7 @@
           <a:p>
             <a:fld id="{CC6FB895-B65F-4EA9-9907-69D32227E72B}" type="datetimeFigureOut">
               <a:rPr lang="zh-TW" altLang="en-US" smtClean="0"/>
-              <a:t>2026/7/2</a:t>
+              <a:t>2026/7/18</a:t>
             </a:fld>
             <a:endParaRPr lang="zh-TW" altLang="en-US"/>
           </a:p>
@@ -1242,7 +1242,7 @@
           <a:p>
             <a:fld id="{CC6FB895-B65F-4EA9-9907-69D32227E72B}" type="datetimeFigureOut">
               <a:rPr lang="zh-TW" altLang="en-US" smtClean="0"/>
-              <a:t>2026/7/2</a:t>
+              <a:t>2026/7/18</a:t>
             </a:fld>
             <a:endParaRPr lang="zh-TW" altLang="en-US"/>
           </a:p>
@@ -1609,7 +1609,7 @@
           <a:p>
             <a:fld id="{CC6FB895-B65F-4EA9-9907-69D32227E72B}" type="datetimeFigureOut">
               <a:rPr lang="zh-TW" altLang="en-US" smtClean="0"/>
-              <a:t>2026/7/2</a:t>
+              <a:t>2026/7/18</a:t>
             </a:fld>
             <a:endParaRPr lang="zh-TW" altLang="en-US"/>
           </a:p>
@@ -1727,7 +1727,7 @@
           <a:p>
             <a:fld id="{CC6FB895-B65F-4EA9-9907-69D32227E72B}" type="datetimeFigureOut">
               <a:rPr lang="zh-TW" altLang="en-US" smtClean="0"/>
-              <a:t>2026/7/2</a:t>
+              <a:t>2026/7/18</a:t>
             </a:fld>
             <a:endParaRPr lang="zh-TW" altLang="en-US"/>
           </a:p>
@@ -1822,7 +1822,7 @@
           <a:p>
             <a:fld id="{CC6FB895-B65F-4EA9-9907-69D32227E72B}" type="datetimeFigureOut">
               <a:rPr lang="zh-TW" altLang="en-US" smtClean="0"/>
-              <a:t>2026/7/2</a:t>
+              <a:t>2026/7/18</a:t>
             </a:fld>
             <a:endParaRPr lang="zh-TW" altLang="en-US"/>
           </a:p>
@@ -2099,7 +2099,7 @@
           <a:p>
             <a:fld id="{CC6FB895-B65F-4EA9-9907-69D32227E72B}" type="datetimeFigureOut">
               <a:rPr lang="zh-TW" altLang="en-US" smtClean="0"/>
-              <a:t>2026/7/2</a:t>
+              <a:t>2026/7/18</a:t>
             </a:fld>
             <a:endParaRPr lang="zh-TW" altLang="en-US"/>
           </a:p>
@@ -2356,7 +2356,7 @@
           <a:p>
             <a:fld id="{CC6FB895-B65F-4EA9-9907-69D32227E72B}" type="datetimeFigureOut">
               <a:rPr lang="zh-TW" altLang="en-US" smtClean="0"/>
-              <a:t>2026/7/2</a:t>
+              <a:t>2026/7/18</a:t>
             </a:fld>
             <a:endParaRPr lang="zh-TW" altLang="en-US"/>
           </a:p>
@@ -2569,7 +2569,7 @@
           <a:p>
             <a:fld id="{CC6FB895-B65F-4EA9-9907-69D32227E72B}" type="datetimeFigureOut">
               <a:rPr lang="zh-TW" altLang="en-US" smtClean="0"/>
-              <a:t>2026/7/2</a:t>
+              <a:t>2026/7/18</a:t>
             </a:fld>
             <a:endParaRPr lang="zh-TW" altLang="en-US"/>
           </a:p>
@@ -2974,12 +2974,1583 @@
           <a:chExt cx="0" cy="0"/>
         </a:xfrm>
       </p:grpSpPr>
+      <p:pic>
+        <p:nvPicPr>
+          <p:cNvPr id="107" name="圖片 106">
+            <a:extLst>
+              <a:ext uri="{FF2B5EF4-FFF2-40B4-BE49-F238E27FC236}">
+                <a16:creationId xmlns:a16="http://schemas.microsoft.com/office/drawing/2014/main" id="{FDF85A7A-65CD-4331-BE69-08EF74276B4E}"/>
+              </a:ext>
+            </a:extLst>
+          </p:cNvPr>
+          <p:cNvPicPr>
+            <a:picLocks noChangeAspect="1"/>
+          </p:cNvPicPr>
+          <p:nvPr/>
+        </p:nvPicPr>
+        <p:blipFill rotWithShape="1">
+          <a:blip r:embed="rId2">
+            <a:clrChange>
+              <a:clrFrom>
+                <a:srgbClr val="FFFFFF"/>
+              </a:clrFrom>
+              <a:clrTo>
+                <a:srgbClr val="FFFFFF">
+                  <a:alpha val="0"/>
+                </a:srgbClr>
+              </a:clrTo>
+            </a:clrChange>
+            <a:extLst>
+              <a:ext uri="{28A0092B-C50C-407E-A947-70E740481C1C}">
+                <a14:useLocalDpi xmlns:a14="http://schemas.microsoft.com/office/drawing/2010/main" val="0"/>
+              </a:ext>
+            </a:extLst>
+          </a:blip>
+          <a:srcRect r="17173"/>
+          <a:stretch/>
+        </p:blipFill>
+        <p:spPr>
+          <a:xfrm>
+            <a:off x="417538" y="523234"/>
+            <a:ext cx="8241065" cy="1658288"/>
+          </a:xfrm>
+          <a:prstGeom prst="rect">
+            <a:avLst/>
+          </a:prstGeom>
+        </p:spPr>
+      </p:pic>
+      <p:pic>
+        <p:nvPicPr>
+          <p:cNvPr id="108" name="圖片 107">
+            <a:extLst>
+              <a:ext uri="{FF2B5EF4-FFF2-40B4-BE49-F238E27FC236}">
+                <a16:creationId xmlns:a16="http://schemas.microsoft.com/office/drawing/2014/main" id="{D9694FC0-CF9E-4E7D-B832-4E29AD164050}"/>
+              </a:ext>
+            </a:extLst>
+          </p:cNvPr>
+          <p:cNvPicPr>
+            <a:picLocks noChangeAspect="1"/>
+          </p:cNvPicPr>
+          <p:nvPr/>
+        </p:nvPicPr>
+        <p:blipFill rotWithShape="1">
+          <a:blip r:embed="rId3">
+            <a:clrChange>
+              <a:clrFrom>
+                <a:srgbClr val="FFFFFF"/>
+              </a:clrFrom>
+              <a:clrTo>
+                <a:srgbClr val="FFFFFF">
+                  <a:alpha val="0"/>
+                </a:srgbClr>
+              </a:clrTo>
+            </a:clrChange>
+            <a:extLst>
+              <a:ext uri="{28A0092B-C50C-407E-A947-70E740481C1C}">
+                <a14:useLocalDpi xmlns:a14="http://schemas.microsoft.com/office/drawing/2010/main" val="0"/>
+              </a:ext>
+            </a:extLst>
+          </a:blip>
+          <a:srcRect r="17365"/>
+          <a:stretch/>
+        </p:blipFill>
+        <p:spPr>
+          <a:xfrm>
+            <a:off x="417538" y="2753551"/>
+            <a:ext cx="8222015" cy="1658288"/>
+          </a:xfrm>
+          <a:prstGeom prst="rect">
+            <a:avLst/>
+          </a:prstGeom>
+        </p:spPr>
+      </p:pic>
+      <p:pic>
+        <p:nvPicPr>
+          <p:cNvPr id="43" name="圖片 42">
+            <a:extLst>
+              <a:ext uri="{FF2B5EF4-FFF2-40B4-BE49-F238E27FC236}">
+                <a16:creationId xmlns:a16="http://schemas.microsoft.com/office/drawing/2014/main" id="{29D9B646-6A27-4649-A2F6-80CFFF4DF4A1}"/>
+              </a:ext>
+            </a:extLst>
+          </p:cNvPr>
+          <p:cNvPicPr>
+            <a:picLocks noChangeAspect="1"/>
+          </p:cNvPicPr>
+          <p:nvPr/>
+        </p:nvPicPr>
+        <p:blipFill rotWithShape="1">
+          <a:blip r:embed="rId4">
+            <a:clrChange>
+              <a:clrFrom>
+                <a:srgbClr val="FFFFFF"/>
+              </a:clrFrom>
+              <a:clrTo>
+                <a:srgbClr val="FFFFFF">
+                  <a:alpha val="0"/>
+                </a:srgbClr>
+              </a:clrTo>
+            </a:clrChange>
+            <a:extLst>
+              <a:ext uri="{28A0092B-C50C-407E-A947-70E740481C1C}">
+                <a14:useLocalDpi xmlns:a14="http://schemas.microsoft.com/office/drawing/2010/main" val="0"/>
+              </a:ext>
+            </a:extLst>
+          </a:blip>
+          <a:srcRect l="84897" r="9472"/>
+          <a:stretch/>
+        </p:blipFill>
+        <p:spPr>
+          <a:xfrm>
+            <a:off x="8632004" y="2869566"/>
+            <a:ext cx="569632" cy="1680954"/>
+          </a:xfrm>
+          <a:prstGeom prst="rect">
+            <a:avLst/>
+          </a:prstGeom>
+        </p:spPr>
+      </p:pic>
+      <p:sp>
+        <p:nvSpPr>
+          <p:cNvPr id="44" name="矩形: 圓角 43">
+            <a:extLst>
+              <a:ext uri="{FF2B5EF4-FFF2-40B4-BE49-F238E27FC236}">
+                <a16:creationId xmlns:a16="http://schemas.microsoft.com/office/drawing/2014/main" id="{DC81CB28-05E7-4299-B7F1-04C2533125DA}"/>
+              </a:ext>
+            </a:extLst>
+          </p:cNvPr>
+          <p:cNvSpPr/>
+          <p:nvPr/>
+        </p:nvSpPr>
+        <p:spPr>
+          <a:xfrm>
+            <a:off x="428980" y="2832418"/>
+            <a:ext cx="8258198" cy="1720252"/>
+          </a:xfrm>
+          <a:prstGeom prst="roundRect">
+            <a:avLst>
+              <a:gd name="adj" fmla="val 6163"/>
+            </a:avLst>
+          </a:prstGeom>
+          <a:noFill/>
+          <a:ln w="9525" cap="flat" cmpd="sng" algn="ctr">
+            <a:solidFill>
+              <a:schemeClr val="accent2"/>
+            </a:solidFill>
+            <a:prstDash val="solid"/>
+            <a:round/>
+            <a:headEnd type="none" w="med" len="med"/>
+            <a:tailEnd type="none" w="med" len="med"/>
+          </a:ln>
+        </p:spPr>
+        <p:style>
+          <a:lnRef idx="0">
+            <a:scrgbClr r="0" g="0" b="0"/>
+          </a:lnRef>
+          <a:fillRef idx="0">
+            <a:scrgbClr r="0" g="0" b="0"/>
+          </a:fillRef>
+          <a:effectRef idx="0">
+            <a:scrgbClr r="0" g="0" b="0"/>
+          </a:effectRef>
+          <a:fontRef idx="minor">
+            <a:schemeClr val="accent2"/>
+          </a:fontRef>
+        </p:style>
+        <p:txBody>
+          <a:bodyPr rot="0" spcFirstLastPara="0" vertOverflow="overflow" horzOverflow="overflow" vert="horz" wrap="square" lIns="91440" tIns="45720" rIns="91440" bIns="45720" numCol="1" spcCol="0" rtlCol="0" fromWordArt="0" anchor="ctr" anchorCtr="0" forceAA="0" compatLnSpc="1">
+            <a:prstTxWarp prst="textNoShape">
+              <a:avLst/>
+            </a:prstTxWarp>
+            <a:noAutofit/>
+          </a:bodyPr>
+          <a:lstStyle/>
+          <a:p>
+            <a:pPr algn="ctr"/>
+            <a:endParaRPr lang="zh-TW" altLang="en-US" sz="1900" dirty="0">
+              <a:latin typeface="Times New Roman" panose="02020603050405020304" pitchFamily="18" charset="0"/>
+              <a:cs typeface="Times New Roman" panose="02020603050405020304" pitchFamily="18" charset="0"/>
+            </a:endParaRPr>
+          </a:p>
+        </p:txBody>
+      </p:sp>
+      <p:sp>
+        <p:nvSpPr>
+          <p:cNvPr id="45" name="矩形: 圓角 44">
+            <a:extLst>
+              <a:ext uri="{FF2B5EF4-FFF2-40B4-BE49-F238E27FC236}">
+                <a16:creationId xmlns:a16="http://schemas.microsoft.com/office/drawing/2014/main" id="{441AAA92-0554-47A1-8611-1C1C012F694C}"/>
+              </a:ext>
+            </a:extLst>
+          </p:cNvPr>
+          <p:cNvSpPr/>
+          <p:nvPr/>
+        </p:nvSpPr>
+        <p:spPr>
+          <a:xfrm>
+            <a:off x="429002" y="556341"/>
+            <a:ext cx="8258346" cy="1719011"/>
+          </a:xfrm>
+          <a:prstGeom prst="roundRect">
+            <a:avLst>
+              <a:gd name="adj" fmla="val 6163"/>
+            </a:avLst>
+          </a:prstGeom>
+          <a:noFill/>
+          <a:ln w="9525" cap="flat" cmpd="sng" algn="ctr">
+            <a:solidFill>
+              <a:schemeClr val="accent1"/>
+            </a:solidFill>
+            <a:prstDash val="solid"/>
+            <a:round/>
+            <a:headEnd type="none" w="med" len="med"/>
+            <a:tailEnd type="none" w="med" len="med"/>
+          </a:ln>
+        </p:spPr>
+        <p:style>
+          <a:lnRef idx="0">
+            <a:scrgbClr r="0" g="0" b="0"/>
+          </a:lnRef>
+          <a:fillRef idx="0">
+            <a:scrgbClr r="0" g="0" b="0"/>
+          </a:fillRef>
+          <a:effectRef idx="0">
+            <a:scrgbClr r="0" g="0" b="0"/>
+          </a:effectRef>
+          <a:fontRef idx="minor">
+            <a:schemeClr val="accent1"/>
+          </a:fontRef>
+        </p:style>
+        <p:txBody>
+          <a:bodyPr rot="0" spcFirstLastPara="0" vertOverflow="overflow" horzOverflow="overflow" vert="horz" wrap="square" lIns="91440" tIns="45720" rIns="91440" bIns="45720" numCol="1" spcCol="0" rtlCol="0" fromWordArt="0" anchor="ctr" anchorCtr="0" forceAA="0" compatLnSpc="1">
+            <a:prstTxWarp prst="textNoShape">
+              <a:avLst/>
+            </a:prstTxWarp>
+            <a:noAutofit/>
+          </a:bodyPr>
+          <a:lstStyle/>
+          <a:p>
+            <a:pPr algn="ctr"/>
+            <a:endParaRPr lang="zh-TW" altLang="en-US" sz="1900" dirty="0">
+              <a:latin typeface="Times New Roman" panose="02020603050405020304" pitchFamily="18" charset="0"/>
+              <a:cs typeface="Times New Roman" panose="02020603050405020304" pitchFamily="18" charset="0"/>
+            </a:endParaRPr>
+          </a:p>
+        </p:txBody>
+      </p:sp>
+      <mc:AlternateContent xmlns:mc="http://schemas.openxmlformats.org/markup-compatibility/2006">
+        <mc:Choice xmlns:a14="http://schemas.microsoft.com/office/drawing/2010/main" Requires="a14">
+          <p:sp>
+            <p:nvSpPr>
+              <p:cNvPr id="46" name="矩形 45">
+                <a:extLst>
+                  <a:ext uri="{FF2B5EF4-FFF2-40B4-BE49-F238E27FC236}">
+                    <a16:creationId xmlns:a16="http://schemas.microsoft.com/office/drawing/2014/main" id="{2068CE7F-6CD8-45E2-B176-93658BA0F5BA}"/>
+                  </a:ext>
+                </a:extLst>
+              </p:cNvPr>
+              <p:cNvSpPr/>
+              <p:nvPr/>
+            </p:nvSpPr>
+            <p:spPr>
+              <a:xfrm>
+                <a:off x="669512" y="1571143"/>
+                <a:ext cx="783035" cy="343171"/>
+              </a:xfrm>
+              <a:prstGeom prst="rect">
+                <a:avLst/>
+              </a:prstGeom>
+            </p:spPr>
+            <p:txBody>
+              <a:bodyPr wrap="none">
+                <a:spAutoFit/>
+              </a:bodyPr>
+              <a:lstStyle/>
+              <a:p>
+                <a:pPr/>
+                <a14:m>
+                  <m:oMathPara xmlns:m="http://schemas.openxmlformats.org/officeDocument/2006/math">
+                    <m:oMathParaPr>
+                      <m:jc m:val="centerGroup"/>
+                    </m:oMathParaPr>
+                    <m:oMath xmlns:m="http://schemas.openxmlformats.org/officeDocument/2006/math">
+                      <m:r>
+                        <a:rPr lang="en-US" altLang="zh-TW" sz="1630" i="1">
+                          <a:latin typeface="Cambria Math" panose="02040503050406030204" pitchFamily="18" charset="0"/>
+                        </a:rPr>
+                        <m:t>0.1 </m:t>
+                      </m:r>
+                      <m:sSub>
+                        <m:sSubPr>
+                          <m:ctrlPr>
+                            <a:rPr lang="en-US" altLang="zh-TW" sz="1630" i="1">
+                              <a:latin typeface="Cambria Math" panose="02040503050406030204" pitchFamily="18" charset="0"/>
+                            </a:rPr>
+                          </m:ctrlPr>
+                        </m:sSubPr>
+                        <m:e>
+                          <m:r>
+                            <a:rPr lang="en-US" altLang="zh-TW" sz="1630" i="1">
+                              <a:latin typeface="Cambria Math" panose="02040503050406030204" pitchFamily="18" charset="0"/>
+                            </a:rPr>
+                            <m:t>𝑄</m:t>
+                          </m:r>
+                        </m:e>
+                        <m:sub>
+                          <m:r>
+                            <a:rPr lang="en-US" altLang="zh-TW" sz="1630" i="1">
+                              <a:latin typeface="Cambria Math" panose="02040503050406030204" pitchFamily="18" charset="0"/>
+                            </a:rPr>
+                            <m:t>𝑐</m:t>
+                          </m:r>
+                        </m:sub>
+                      </m:sSub>
+                    </m:oMath>
+                  </m:oMathPara>
+                </a14:m>
+                <a:endParaRPr lang="zh-TW" altLang="en-US" sz="1630" dirty="0">
+                  <a:latin typeface="Times New Roman" panose="02020603050405020304" pitchFamily="18" charset="0"/>
+                  <a:cs typeface="Times New Roman" panose="02020603050405020304" pitchFamily="18" charset="0"/>
+                </a:endParaRPr>
+              </a:p>
+            </p:txBody>
+          </p:sp>
+        </mc:Choice>
+        <mc:Fallback>
+          <p:sp>
+            <p:nvSpPr>
+              <p:cNvPr id="46" name="矩形 45">
+                <a:extLst>
+                  <a:ext uri="{FF2B5EF4-FFF2-40B4-BE49-F238E27FC236}">
+                    <a16:creationId xmlns:a16="http://schemas.microsoft.com/office/drawing/2014/main" id="{2068CE7F-6CD8-45E2-B176-93658BA0F5BA}"/>
+                  </a:ext>
+                </a:extLst>
+              </p:cNvPr>
+              <p:cNvSpPr>
+                <a:spLocks noRot="1" noChangeAspect="1" noMove="1" noResize="1" noEditPoints="1" noAdjustHandles="1" noChangeArrowheads="1" noChangeShapeType="1" noTextEdit="1"/>
+              </p:cNvSpPr>
+              <p:nvPr/>
+            </p:nvSpPr>
+            <p:spPr>
+              <a:xfrm>
+                <a:off x="669512" y="1571143"/>
+                <a:ext cx="783035" cy="343171"/>
+              </a:xfrm>
+              <a:prstGeom prst="rect">
+                <a:avLst/>
+              </a:prstGeom>
+              <a:blipFill>
+                <a:blip r:embed="rId5"/>
+                <a:stretch>
+                  <a:fillRect b="-8929"/>
+                </a:stretch>
+              </a:blipFill>
+            </p:spPr>
+            <p:txBody>
+              <a:bodyPr/>
+              <a:lstStyle/>
+              <a:p>
+                <a:r>
+                  <a:rPr lang="zh-TW" altLang="en-US">
+                    <a:noFill/>
+                  </a:rPr>
+                  <a:t> </a:t>
+                </a:r>
+              </a:p>
+            </p:txBody>
+          </p:sp>
+        </mc:Fallback>
+      </mc:AlternateContent>
+      <mc:AlternateContent xmlns:mc="http://schemas.openxmlformats.org/markup-compatibility/2006">
+        <mc:Choice xmlns:a14="http://schemas.microsoft.com/office/drawing/2010/main" Requires="a14">
+          <p:sp>
+            <p:nvSpPr>
+              <p:cNvPr id="47" name="矩形 46">
+                <a:extLst>
+                  <a:ext uri="{FF2B5EF4-FFF2-40B4-BE49-F238E27FC236}">
+                    <a16:creationId xmlns:a16="http://schemas.microsoft.com/office/drawing/2014/main" id="{0C022BE9-80C6-4AF4-8998-A1D5D06474C5}"/>
+                  </a:ext>
+                </a:extLst>
+              </p:cNvPr>
+              <p:cNvSpPr/>
+              <p:nvPr/>
+            </p:nvSpPr>
+            <p:spPr>
+              <a:xfrm>
+                <a:off x="726897" y="1940760"/>
+                <a:ext cx="889154" cy="343171"/>
+              </a:xfrm>
+              <a:prstGeom prst="rect">
+                <a:avLst/>
+              </a:prstGeom>
+            </p:spPr>
+            <p:txBody>
+              <a:bodyPr wrap="none">
+                <a:spAutoFit/>
+              </a:bodyPr>
+              <a:lstStyle/>
+              <a:p>
+                <a:pPr/>
+                <a14:m>
+                  <m:oMathPara xmlns:m="http://schemas.openxmlformats.org/officeDocument/2006/math">
+                    <m:oMathParaPr>
+                      <m:jc m:val="centerGroup"/>
+                    </m:oMathParaPr>
+                    <m:oMath xmlns:m="http://schemas.openxmlformats.org/officeDocument/2006/math">
+                      <m:r>
+                        <a:rPr lang="en-US" altLang="zh-TW" sz="1630" i="1">
+                          <a:latin typeface="Cambria Math" panose="02040503050406030204" pitchFamily="18" charset="0"/>
+                        </a:rPr>
+                        <m:t>ℓ=−2</m:t>
+                      </m:r>
+                    </m:oMath>
+                  </m:oMathPara>
+                </a14:m>
+                <a:endParaRPr lang="zh-TW" altLang="en-US" sz="1630" dirty="0">
+                  <a:latin typeface="Times New Roman" panose="02020603050405020304" pitchFamily="18" charset="0"/>
+                  <a:cs typeface="Times New Roman" panose="02020603050405020304" pitchFamily="18" charset="0"/>
+                </a:endParaRPr>
+              </a:p>
+            </p:txBody>
+          </p:sp>
+        </mc:Choice>
+        <mc:Fallback>
+          <p:sp>
+            <p:nvSpPr>
+              <p:cNvPr id="47" name="矩形 46">
+                <a:extLst>
+                  <a:ext uri="{FF2B5EF4-FFF2-40B4-BE49-F238E27FC236}">
+                    <a16:creationId xmlns:a16="http://schemas.microsoft.com/office/drawing/2014/main" id="{0C022BE9-80C6-4AF4-8998-A1D5D06474C5}"/>
+                  </a:ext>
+                </a:extLst>
+              </p:cNvPr>
+              <p:cNvSpPr>
+                <a:spLocks noRot="1" noChangeAspect="1" noMove="1" noResize="1" noEditPoints="1" noAdjustHandles="1" noChangeArrowheads="1" noChangeShapeType="1" noTextEdit="1"/>
+              </p:cNvSpPr>
+              <p:nvPr/>
+            </p:nvSpPr>
+            <p:spPr>
+              <a:xfrm>
+                <a:off x="726897" y="1940760"/>
+                <a:ext cx="889154" cy="343171"/>
+              </a:xfrm>
+              <a:prstGeom prst="rect">
+                <a:avLst/>
+              </a:prstGeom>
+              <a:blipFill>
+                <a:blip r:embed="rId6"/>
+                <a:stretch>
+                  <a:fillRect/>
+                </a:stretch>
+              </a:blipFill>
+            </p:spPr>
+            <p:txBody>
+              <a:bodyPr/>
+              <a:lstStyle/>
+              <a:p>
+                <a:r>
+                  <a:rPr lang="zh-TW" altLang="en-US">
+                    <a:noFill/>
+                  </a:rPr>
+                  <a:t> </a:t>
+                </a:r>
+              </a:p>
+            </p:txBody>
+          </p:sp>
+        </mc:Fallback>
+      </mc:AlternateContent>
+      <mc:AlternateContent xmlns:mc="http://schemas.openxmlformats.org/markup-compatibility/2006">
+        <mc:Choice xmlns:a14="http://schemas.microsoft.com/office/drawing/2010/main" Requires="a14">
+          <p:sp>
+            <p:nvSpPr>
+              <p:cNvPr id="49" name="矩形 48">
+                <a:extLst>
+                  <a:ext uri="{FF2B5EF4-FFF2-40B4-BE49-F238E27FC236}">
+                    <a16:creationId xmlns:a16="http://schemas.microsoft.com/office/drawing/2014/main" id="{51EC34B8-B9CA-4030-BE38-C481D6D20ED4}"/>
+                  </a:ext>
+                </a:extLst>
+              </p:cNvPr>
+              <p:cNvSpPr/>
+              <p:nvPr/>
+            </p:nvSpPr>
+            <p:spPr>
+              <a:xfrm>
+                <a:off x="2509180" y="1940760"/>
+                <a:ext cx="889154" cy="343171"/>
+              </a:xfrm>
+              <a:prstGeom prst="rect">
+                <a:avLst/>
+              </a:prstGeom>
+            </p:spPr>
+            <p:txBody>
+              <a:bodyPr wrap="none">
+                <a:spAutoFit/>
+              </a:bodyPr>
+              <a:lstStyle/>
+              <a:p>
+                <a:pPr/>
+                <a14:m>
+                  <m:oMathPara xmlns:m="http://schemas.openxmlformats.org/officeDocument/2006/math">
+                    <m:oMathParaPr>
+                      <m:jc m:val="centerGroup"/>
+                    </m:oMathParaPr>
+                    <m:oMath xmlns:m="http://schemas.openxmlformats.org/officeDocument/2006/math">
+                      <m:r>
+                        <a:rPr lang="en-US" altLang="zh-TW" sz="1630" i="1">
+                          <a:latin typeface="Cambria Math" panose="02040503050406030204" pitchFamily="18" charset="0"/>
+                        </a:rPr>
+                        <m:t>ℓ=−1</m:t>
+                      </m:r>
+                    </m:oMath>
+                  </m:oMathPara>
+                </a14:m>
+                <a:endParaRPr lang="zh-TW" altLang="en-US" sz="1630" dirty="0">
+                  <a:latin typeface="Times New Roman" panose="02020603050405020304" pitchFamily="18" charset="0"/>
+                  <a:cs typeface="Times New Roman" panose="02020603050405020304" pitchFamily="18" charset="0"/>
+                </a:endParaRPr>
+              </a:p>
+            </p:txBody>
+          </p:sp>
+        </mc:Choice>
+        <mc:Fallback>
+          <p:sp>
+            <p:nvSpPr>
+              <p:cNvPr id="49" name="矩形 48">
+                <a:extLst>
+                  <a:ext uri="{FF2B5EF4-FFF2-40B4-BE49-F238E27FC236}">
+                    <a16:creationId xmlns:a16="http://schemas.microsoft.com/office/drawing/2014/main" id="{51EC34B8-B9CA-4030-BE38-C481D6D20ED4}"/>
+                  </a:ext>
+                </a:extLst>
+              </p:cNvPr>
+              <p:cNvSpPr>
+                <a:spLocks noRot="1" noChangeAspect="1" noMove="1" noResize="1" noEditPoints="1" noAdjustHandles="1" noChangeArrowheads="1" noChangeShapeType="1" noTextEdit="1"/>
+              </p:cNvSpPr>
+              <p:nvPr/>
+            </p:nvSpPr>
+            <p:spPr>
+              <a:xfrm>
+                <a:off x="2509180" y="1940760"/>
+                <a:ext cx="889154" cy="343171"/>
+              </a:xfrm>
+              <a:prstGeom prst="rect">
+                <a:avLst/>
+              </a:prstGeom>
+              <a:blipFill>
+                <a:blip r:embed="rId7"/>
+                <a:stretch>
+                  <a:fillRect/>
+                </a:stretch>
+              </a:blipFill>
+            </p:spPr>
+            <p:txBody>
+              <a:bodyPr/>
+              <a:lstStyle/>
+              <a:p>
+                <a:r>
+                  <a:rPr lang="zh-TW" altLang="en-US">
+                    <a:noFill/>
+                  </a:rPr>
+                  <a:t> </a:t>
+                </a:r>
+              </a:p>
+            </p:txBody>
+          </p:sp>
+        </mc:Fallback>
+      </mc:AlternateContent>
+      <mc:AlternateContent xmlns:mc="http://schemas.openxmlformats.org/markup-compatibility/2006">
+        <mc:Choice xmlns:a14="http://schemas.microsoft.com/office/drawing/2010/main" Requires="a14">
+          <p:sp>
+            <p:nvSpPr>
+              <p:cNvPr id="50" name="矩形 49">
+                <a:extLst>
+                  <a:ext uri="{FF2B5EF4-FFF2-40B4-BE49-F238E27FC236}">
+                    <a16:creationId xmlns:a16="http://schemas.microsoft.com/office/drawing/2014/main" id="{7626E0B4-7CA2-459D-9601-04C6B32702D5}"/>
+                  </a:ext>
+                </a:extLst>
+              </p:cNvPr>
+              <p:cNvSpPr/>
+              <p:nvPr/>
+            </p:nvSpPr>
+            <p:spPr>
+              <a:xfrm>
+                <a:off x="4162153" y="1940760"/>
+                <a:ext cx="733662" cy="343171"/>
+              </a:xfrm>
+              <a:prstGeom prst="rect">
+                <a:avLst/>
+              </a:prstGeom>
+            </p:spPr>
+            <p:txBody>
+              <a:bodyPr wrap="none">
+                <a:spAutoFit/>
+              </a:bodyPr>
+              <a:lstStyle/>
+              <a:p>
+                <a:pPr/>
+                <a14:m>
+                  <m:oMathPara xmlns:m="http://schemas.openxmlformats.org/officeDocument/2006/math">
+                    <m:oMathParaPr>
+                      <m:jc m:val="centerGroup"/>
+                    </m:oMathParaPr>
+                    <m:oMath xmlns:m="http://schemas.openxmlformats.org/officeDocument/2006/math">
+                      <m:r>
+                        <a:rPr lang="en-US" altLang="zh-TW" sz="1630" i="1">
+                          <a:latin typeface="Cambria Math" panose="02040503050406030204" pitchFamily="18" charset="0"/>
+                        </a:rPr>
+                        <m:t>ℓ=0</m:t>
+                      </m:r>
+                    </m:oMath>
+                  </m:oMathPara>
+                </a14:m>
+                <a:endParaRPr lang="zh-TW" altLang="en-US" sz="1630" dirty="0">
+                  <a:latin typeface="Times New Roman" panose="02020603050405020304" pitchFamily="18" charset="0"/>
+                  <a:cs typeface="Times New Roman" panose="02020603050405020304" pitchFamily="18" charset="0"/>
+                </a:endParaRPr>
+              </a:p>
+            </p:txBody>
+          </p:sp>
+        </mc:Choice>
+        <mc:Fallback>
+          <p:sp>
+            <p:nvSpPr>
+              <p:cNvPr id="50" name="矩形 49">
+                <a:extLst>
+                  <a:ext uri="{FF2B5EF4-FFF2-40B4-BE49-F238E27FC236}">
+                    <a16:creationId xmlns:a16="http://schemas.microsoft.com/office/drawing/2014/main" id="{7626E0B4-7CA2-459D-9601-04C6B32702D5}"/>
+                  </a:ext>
+                </a:extLst>
+              </p:cNvPr>
+              <p:cNvSpPr>
+                <a:spLocks noRot="1" noChangeAspect="1" noMove="1" noResize="1" noEditPoints="1" noAdjustHandles="1" noChangeArrowheads="1" noChangeShapeType="1" noTextEdit="1"/>
+              </p:cNvSpPr>
+              <p:nvPr/>
+            </p:nvSpPr>
+            <p:spPr>
+              <a:xfrm>
+                <a:off x="4162153" y="1940760"/>
+                <a:ext cx="733662" cy="343171"/>
+              </a:xfrm>
+              <a:prstGeom prst="rect">
+                <a:avLst/>
+              </a:prstGeom>
+              <a:blipFill>
+                <a:blip r:embed="rId8"/>
+                <a:stretch>
+                  <a:fillRect/>
+                </a:stretch>
+              </a:blipFill>
+            </p:spPr>
+            <p:txBody>
+              <a:bodyPr/>
+              <a:lstStyle/>
+              <a:p>
+                <a:r>
+                  <a:rPr lang="zh-TW" altLang="en-US">
+                    <a:noFill/>
+                  </a:rPr>
+                  <a:t> </a:t>
+                </a:r>
+              </a:p>
+            </p:txBody>
+          </p:sp>
+        </mc:Fallback>
+      </mc:AlternateContent>
+      <mc:AlternateContent xmlns:mc="http://schemas.openxmlformats.org/markup-compatibility/2006">
+        <mc:Choice xmlns:a14="http://schemas.microsoft.com/office/drawing/2010/main" Requires="a14">
+          <p:sp>
+            <p:nvSpPr>
+              <p:cNvPr id="51" name="矩形 50">
+                <a:extLst>
+                  <a:ext uri="{FF2B5EF4-FFF2-40B4-BE49-F238E27FC236}">
+                    <a16:creationId xmlns:a16="http://schemas.microsoft.com/office/drawing/2014/main" id="{3F6CE0F2-6D19-4E6C-95F4-5A1A19791875}"/>
+                  </a:ext>
+                </a:extLst>
+              </p:cNvPr>
+              <p:cNvSpPr/>
+              <p:nvPr/>
+            </p:nvSpPr>
+            <p:spPr>
+              <a:xfrm>
+                <a:off x="5918254" y="1940760"/>
+                <a:ext cx="733662" cy="343171"/>
+              </a:xfrm>
+              <a:prstGeom prst="rect">
+                <a:avLst/>
+              </a:prstGeom>
+            </p:spPr>
+            <p:txBody>
+              <a:bodyPr wrap="none">
+                <a:spAutoFit/>
+              </a:bodyPr>
+              <a:lstStyle/>
+              <a:p>
+                <a:pPr/>
+                <a14:m>
+                  <m:oMathPara xmlns:m="http://schemas.openxmlformats.org/officeDocument/2006/math">
+                    <m:oMathParaPr>
+                      <m:jc m:val="centerGroup"/>
+                    </m:oMathParaPr>
+                    <m:oMath xmlns:m="http://schemas.openxmlformats.org/officeDocument/2006/math">
+                      <m:r>
+                        <a:rPr lang="en-US" altLang="zh-TW" sz="1630" i="1">
+                          <a:latin typeface="Cambria Math" panose="02040503050406030204" pitchFamily="18" charset="0"/>
+                        </a:rPr>
+                        <m:t>ℓ=1</m:t>
+                      </m:r>
+                    </m:oMath>
+                  </m:oMathPara>
+                </a14:m>
+                <a:endParaRPr lang="zh-TW" altLang="en-US" sz="1630" dirty="0">
+                  <a:latin typeface="Times New Roman" panose="02020603050405020304" pitchFamily="18" charset="0"/>
+                  <a:cs typeface="Times New Roman" panose="02020603050405020304" pitchFamily="18" charset="0"/>
+                </a:endParaRPr>
+              </a:p>
+            </p:txBody>
+          </p:sp>
+        </mc:Choice>
+        <mc:Fallback>
+          <p:sp>
+            <p:nvSpPr>
+              <p:cNvPr id="51" name="矩形 50">
+                <a:extLst>
+                  <a:ext uri="{FF2B5EF4-FFF2-40B4-BE49-F238E27FC236}">
+                    <a16:creationId xmlns:a16="http://schemas.microsoft.com/office/drawing/2014/main" id="{3F6CE0F2-6D19-4E6C-95F4-5A1A19791875}"/>
+                  </a:ext>
+                </a:extLst>
+              </p:cNvPr>
+              <p:cNvSpPr>
+                <a:spLocks noRot="1" noChangeAspect="1" noMove="1" noResize="1" noEditPoints="1" noAdjustHandles="1" noChangeArrowheads="1" noChangeShapeType="1" noTextEdit="1"/>
+              </p:cNvSpPr>
+              <p:nvPr/>
+            </p:nvSpPr>
+            <p:spPr>
+              <a:xfrm>
+                <a:off x="5918254" y="1940760"/>
+                <a:ext cx="733662" cy="343171"/>
+              </a:xfrm>
+              <a:prstGeom prst="rect">
+                <a:avLst/>
+              </a:prstGeom>
+              <a:blipFill>
+                <a:blip r:embed="rId9"/>
+                <a:stretch>
+                  <a:fillRect/>
+                </a:stretch>
+              </a:blipFill>
+            </p:spPr>
+            <p:txBody>
+              <a:bodyPr/>
+              <a:lstStyle/>
+              <a:p>
+                <a:r>
+                  <a:rPr lang="zh-TW" altLang="en-US">
+                    <a:noFill/>
+                  </a:rPr>
+                  <a:t> </a:t>
+                </a:r>
+              </a:p>
+            </p:txBody>
+          </p:sp>
+        </mc:Fallback>
+      </mc:AlternateContent>
+      <mc:AlternateContent xmlns:mc="http://schemas.openxmlformats.org/markup-compatibility/2006">
+        <mc:Choice xmlns:a14="http://schemas.microsoft.com/office/drawing/2010/main" Requires="a14">
+          <p:sp>
+            <p:nvSpPr>
+              <p:cNvPr id="52" name="矩形 51">
+                <a:extLst>
+                  <a:ext uri="{FF2B5EF4-FFF2-40B4-BE49-F238E27FC236}">
+                    <a16:creationId xmlns:a16="http://schemas.microsoft.com/office/drawing/2014/main" id="{0F4F07AD-DE02-4748-8EF5-507C2941CFC8}"/>
+                  </a:ext>
+                </a:extLst>
+              </p:cNvPr>
+              <p:cNvSpPr/>
+              <p:nvPr/>
+            </p:nvSpPr>
+            <p:spPr>
+              <a:xfrm>
+                <a:off x="7545045" y="1940760"/>
+                <a:ext cx="733662" cy="343171"/>
+              </a:xfrm>
+              <a:prstGeom prst="rect">
+                <a:avLst/>
+              </a:prstGeom>
+            </p:spPr>
+            <p:txBody>
+              <a:bodyPr wrap="none">
+                <a:spAutoFit/>
+              </a:bodyPr>
+              <a:lstStyle/>
+              <a:p>
+                <a:pPr/>
+                <a14:m>
+                  <m:oMathPara xmlns:m="http://schemas.openxmlformats.org/officeDocument/2006/math">
+                    <m:oMathParaPr>
+                      <m:jc m:val="centerGroup"/>
+                    </m:oMathParaPr>
+                    <m:oMath xmlns:m="http://schemas.openxmlformats.org/officeDocument/2006/math">
+                      <m:r>
+                        <a:rPr lang="en-US" altLang="zh-TW" sz="1630" i="1">
+                          <a:latin typeface="Cambria Math" panose="02040503050406030204" pitchFamily="18" charset="0"/>
+                        </a:rPr>
+                        <m:t>ℓ=2</m:t>
+                      </m:r>
+                    </m:oMath>
+                  </m:oMathPara>
+                </a14:m>
+                <a:endParaRPr lang="zh-TW" altLang="en-US" sz="1630" dirty="0">
+                  <a:latin typeface="Times New Roman" panose="02020603050405020304" pitchFamily="18" charset="0"/>
+                  <a:cs typeface="Times New Roman" panose="02020603050405020304" pitchFamily="18" charset="0"/>
+                </a:endParaRPr>
+              </a:p>
+            </p:txBody>
+          </p:sp>
+        </mc:Choice>
+        <mc:Fallback>
+          <p:sp>
+            <p:nvSpPr>
+              <p:cNvPr id="52" name="矩形 51">
+                <a:extLst>
+                  <a:ext uri="{FF2B5EF4-FFF2-40B4-BE49-F238E27FC236}">
+                    <a16:creationId xmlns:a16="http://schemas.microsoft.com/office/drawing/2014/main" id="{0F4F07AD-DE02-4748-8EF5-507C2941CFC8}"/>
+                  </a:ext>
+                </a:extLst>
+              </p:cNvPr>
+              <p:cNvSpPr>
+                <a:spLocks noRot="1" noChangeAspect="1" noMove="1" noResize="1" noEditPoints="1" noAdjustHandles="1" noChangeArrowheads="1" noChangeShapeType="1" noTextEdit="1"/>
+              </p:cNvSpPr>
+              <p:nvPr/>
+            </p:nvSpPr>
+            <p:spPr>
+              <a:xfrm>
+                <a:off x="7545045" y="1940760"/>
+                <a:ext cx="733662" cy="343171"/>
+              </a:xfrm>
+              <a:prstGeom prst="rect">
+                <a:avLst/>
+              </a:prstGeom>
+              <a:blipFill>
+                <a:blip r:embed="rId10"/>
+                <a:stretch>
+                  <a:fillRect/>
+                </a:stretch>
+              </a:blipFill>
+            </p:spPr>
+            <p:txBody>
+              <a:bodyPr/>
+              <a:lstStyle/>
+              <a:p>
+                <a:r>
+                  <a:rPr lang="zh-TW" altLang="en-US">
+                    <a:noFill/>
+                  </a:rPr>
+                  <a:t> </a:t>
+                </a:r>
+              </a:p>
+            </p:txBody>
+          </p:sp>
+        </mc:Fallback>
+      </mc:AlternateContent>
+      <mc:AlternateContent xmlns:mc="http://schemas.openxmlformats.org/markup-compatibility/2006">
+        <mc:Choice xmlns:a14="http://schemas.microsoft.com/office/drawing/2010/main" Requires="a14">
+          <p:sp>
+            <p:nvSpPr>
+              <p:cNvPr id="53" name="矩形 52">
+                <a:extLst>
+                  <a:ext uri="{FF2B5EF4-FFF2-40B4-BE49-F238E27FC236}">
+                    <a16:creationId xmlns:a16="http://schemas.microsoft.com/office/drawing/2014/main" id="{D8163A59-21D2-4AEC-A55C-42C7FC0D3453}"/>
+                  </a:ext>
+                </a:extLst>
+              </p:cNvPr>
+              <p:cNvSpPr/>
+              <p:nvPr/>
+            </p:nvSpPr>
+            <p:spPr>
+              <a:xfrm>
+                <a:off x="669512" y="3882330"/>
+                <a:ext cx="783035" cy="343171"/>
+              </a:xfrm>
+              <a:prstGeom prst="rect">
+                <a:avLst/>
+              </a:prstGeom>
+            </p:spPr>
+            <p:txBody>
+              <a:bodyPr wrap="none">
+                <a:spAutoFit/>
+              </a:bodyPr>
+              <a:lstStyle/>
+              <a:p>
+                <a:pPr/>
+                <a14:m>
+                  <m:oMathPara xmlns:m="http://schemas.openxmlformats.org/officeDocument/2006/math">
+                    <m:oMathParaPr>
+                      <m:jc m:val="centerGroup"/>
+                    </m:oMathParaPr>
+                    <m:oMath xmlns:m="http://schemas.openxmlformats.org/officeDocument/2006/math">
+                      <m:r>
+                        <a:rPr lang="en-US" altLang="zh-TW" sz="1630" i="1">
+                          <a:latin typeface="Cambria Math" panose="02040503050406030204" pitchFamily="18" charset="0"/>
+                        </a:rPr>
+                        <m:t>0.1 </m:t>
+                      </m:r>
+                      <m:sSub>
+                        <m:sSubPr>
+                          <m:ctrlPr>
+                            <a:rPr lang="en-US" altLang="zh-TW" sz="1630" i="1">
+                              <a:latin typeface="Cambria Math" panose="02040503050406030204" pitchFamily="18" charset="0"/>
+                            </a:rPr>
+                          </m:ctrlPr>
+                        </m:sSubPr>
+                        <m:e>
+                          <m:r>
+                            <a:rPr lang="en-US" altLang="zh-TW" sz="1630" i="1">
+                              <a:latin typeface="Cambria Math" panose="02040503050406030204" pitchFamily="18" charset="0"/>
+                            </a:rPr>
+                            <m:t>𝑄</m:t>
+                          </m:r>
+                        </m:e>
+                        <m:sub>
+                          <m:r>
+                            <a:rPr lang="en-US" altLang="zh-TW" sz="1630" i="1">
+                              <a:latin typeface="Cambria Math" panose="02040503050406030204" pitchFamily="18" charset="0"/>
+                            </a:rPr>
+                            <m:t>𝑐</m:t>
+                          </m:r>
+                        </m:sub>
+                      </m:sSub>
+                    </m:oMath>
+                  </m:oMathPara>
+                </a14:m>
+                <a:endParaRPr lang="zh-TW" altLang="en-US" sz="1630" dirty="0">
+                  <a:latin typeface="Times New Roman" panose="02020603050405020304" pitchFamily="18" charset="0"/>
+                  <a:cs typeface="Times New Roman" panose="02020603050405020304" pitchFamily="18" charset="0"/>
+                </a:endParaRPr>
+              </a:p>
+            </p:txBody>
+          </p:sp>
+        </mc:Choice>
+        <mc:Fallback>
+          <p:sp>
+            <p:nvSpPr>
+              <p:cNvPr id="53" name="矩形 52">
+                <a:extLst>
+                  <a:ext uri="{FF2B5EF4-FFF2-40B4-BE49-F238E27FC236}">
+                    <a16:creationId xmlns:a16="http://schemas.microsoft.com/office/drawing/2014/main" id="{D8163A59-21D2-4AEC-A55C-42C7FC0D3453}"/>
+                  </a:ext>
+                </a:extLst>
+              </p:cNvPr>
+              <p:cNvSpPr>
+                <a:spLocks noRot="1" noChangeAspect="1" noMove="1" noResize="1" noEditPoints="1" noAdjustHandles="1" noChangeArrowheads="1" noChangeShapeType="1" noTextEdit="1"/>
+              </p:cNvSpPr>
+              <p:nvPr/>
+            </p:nvSpPr>
+            <p:spPr>
+              <a:xfrm>
+                <a:off x="669512" y="3882330"/>
+                <a:ext cx="783035" cy="343171"/>
+              </a:xfrm>
+              <a:prstGeom prst="rect">
+                <a:avLst/>
+              </a:prstGeom>
+              <a:blipFill>
+                <a:blip r:embed="rId11"/>
+                <a:stretch>
+                  <a:fillRect b="-8929"/>
+                </a:stretch>
+              </a:blipFill>
+            </p:spPr>
+            <p:txBody>
+              <a:bodyPr/>
+              <a:lstStyle/>
+              <a:p>
+                <a:r>
+                  <a:rPr lang="zh-TW" altLang="en-US">
+                    <a:noFill/>
+                  </a:rPr>
+                  <a:t> </a:t>
+                </a:r>
+              </a:p>
+            </p:txBody>
+          </p:sp>
+        </mc:Fallback>
+      </mc:AlternateContent>
+      <mc:AlternateContent xmlns:mc="http://schemas.openxmlformats.org/markup-compatibility/2006">
+        <mc:Choice xmlns:a14="http://schemas.microsoft.com/office/drawing/2010/main" Requires="a14">
+          <p:sp>
+            <p:nvSpPr>
+              <p:cNvPr id="54" name="矩形 53">
+                <a:extLst>
+                  <a:ext uri="{FF2B5EF4-FFF2-40B4-BE49-F238E27FC236}">
+                    <a16:creationId xmlns:a16="http://schemas.microsoft.com/office/drawing/2014/main" id="{998758AE-B7B5-4A39-8A8A-9C4CDF0D9BF9}"/>
+                  </a:ext>
+                </a:extLst>
+              </p:cNvPr>
+              <p:cNvSpPr/>
+              <p:nvPr/>
+            </p:nvSpPr>
+            <p:spPr>
+              <a:xfrm>
+                <a:off x="726897" y="4204321"/>
+                <a:ext cx="889154" cy="343171"/>
+              </a:xfrm>
+              <a:prstGeom prst="rect">
+                <a:avLst/>
+              </a:prstGeom>
+            </p:spPr>
+            <p:txBody>
+              <a:bodyPr wrap="none">
+                <a:spAutoFit/>
+              </a:bodyPr>
+              <a:lstStyle/>
+              <a:p>
+                <a:pPr/>
+                <a14:m>
+                  <m:oMathPara xmlns:m="http://schemas.openxmlformats.org/officeDocument/2006/math">
+                    <m:oMathParaPr>
+                      <m:jc m:val="centerGroup"/>
+                    </m:oMathParaPr>
+                    <m:oMath xmlns:m="http://schemas.openxmlformats.org/officeDocument/2006/math">
+                      <m:r>
+                        <a:rPr lang="en-US" altLang="zh-TW" sz="1630" i="1">
+                          <a:latin typeface="Cambria Math" panose="02040503050406030204" pitchFamily="18" charset="0"/>
+                        </a:rPr>
+                        <m:t>ℓ=−2</m:t>
+                      </m:r>
+                    </m:oMath>
+                  </m:oMathPara>
+                </a14:m>
+                <a:endParaRPr lang="zh-TW" altLang="en-US" sz="1630" dirty="0">
+                  <a:latin typeface="Times New Roman" panose="02020603050405020304" pitchFamily="18" charset="0"/>
+                  <a:cs typeface="Times New Roman" panose="02020603050405020304" pitchFamily="18" charset="0"/>
+                </a:endParaRPr>
+              </a:p>
+            </p:txBody>
+          </p:sp>
+        </mc:Choice>
+        <mc:Fallback>
+          <p:sp>
+            <p:nvSpPr>
+              <p:cNvPr id="54" name="矩形 53">
+                <a:extLst>
+                  <a:ext uri="{FF2B5EF4-FFF2-40B4-BE49-F238E27FC236}">
+                    <a16:creationId xmlns:a16="http://schemas.microsoft.com/office/drawing/2014/main" id="{998758AE-B7B5-4A39-8A8A-9C4CDF0D9BF9}"/>
+                  </a:ext>
+                </a:extLst>
+              </p:cNvPr>
+              <p:cNvSpPr>
+                <a:spLocks noRot="1" noChangeAspect="1" noMove="1" noResize="1" noEditPoints="1" noAdjustHandles="1" noChangeArrowheads="1" noChangeShapeType="1" noTextEdit="1"/>
+              </p:cNvSpPr>
+              <p:nvPr/>
+            </p:nvSpPr>
+            <p:spPr>
+              <a:xfrm>
+                <a:off x="726897" y="4204321"/>
+                <a:ext cx="889154" cy="343171"/>
+              </a:xfrm>
+              <a:prstGeom prst="rect">
+                <a:avLst/>
+              </a:prstGeom>
+              <a:blipFill>
+                <a:blip r:embed="rId12"/>
+                <a:stretch>
+                  <a:fillRect/>
+                </a:stretch>
+              </a:blipFill>
+            </p:spPr>
+            <p:txBody>
+              <a:bodyPr/>
+              <a:lstStyle/>
+              <a:p>
+                <a:r>
+                  <a:rPr lang="zh-TW" altLang="en-US">
+                    <a:noFill/>
+                  </a:rPr>
+                  <a:t> </a:t>
+                </a:r>
+              </a:p>
+            </p:txBody>
+          </p:sp>
+        </mc:Fallback>
+      </mc:AlternateContent>
+      <mc:AlternateContent xmlns:mc="http://schemas.openxmlformats.org/markup-compatibility/2006">
+        <mc:Choice xmlns:a14="http://schemas.microsoft.com/office/drawing/2010/main" Requires="a14">
+          <p:sp>
+            <p:nvSpPr>
+              <p:cNvPr id="56" name="矩形 55">
+                <a:extLst>
+                  <a:ext uri="{FF2B5EF4-FFF2-40B4-BE49-F238E27FC236}">
+                    <a16:creationId xmlns:a16="http://schemas.microsoft.com/office/drawing/2014/main" id="{98783FC7-C31A-4177-B406-4D671DA17729}"/>
+                  </a:ext>
+                </a:extLst>
+              </p:cNvPr>
+              <p:cNvSpPr/>
+              <p:nvPr/>
+            </p:nvSpPr>
+            <p:spPr>
+              <a:xfrm>
+                <a:off x="2509180" y="4204322"/>
+                <a:ext cx="889154" cy="343171"/>
+              </a:xfrm>
+              <a:prstGeom prst="rect">
+                <a:avLst/>
+              </a:prstGeom>
+            </p:spPr>
+            <p:txBody>
+              <a:bodyPr wrap="none">
+                <a:spAutoFit/>
+              </a:bodyPr>
+              <a:lstStyle/>
+              <a:p>
+                <a:pPr/>
+                <a14:m>
+                  <m:oMathPara xmlns:m="http://schemas.openxmlformats.org/officeDocument/2006/math">
+                    <m:oMathParaPr>
+                      <m:jc m:val="centerGroup"/>
+                    </m:oMathParaPr>
+                    <m:oMath xmlns:m="http://schemas.openxmlformats.org/officeDocument/2006/math">
+                      <m:r>
+                        <a:rPr lang="en-US" altLang="zh-TW" sz="1630" i="1">
+                          <a:latin typeface="Cambria Math" panose="02040503050406030204" pitchFamily="18" charset="0"/>
+                        </a:rPr>
+                        <m:t>ℓ=−1</m:t>
+                      </m:r>
+                    </m:oMath>
+                  </m:oMathPara>
+                </a14:m>
+                <a:endParaRPr lang="zh-TW" altLang="en-US" sz="1630" dirty="0">
+                  <a:latin typeface="Times New Roman" panose="02020603050405020304" pitchFamily="18" charset="0"/>
+                  <a:cs typeface="Times New Roman" panose="02020603050405020304" pitchFamily="18" charset="0"/>
+                </a:endParaRPr>
+              </a:p>
+            </p:txBody>
+          </p:sp>
+        </mc:Choice>
+        <mc:Fallback>
+          <p:sp>
+            <p:nvSpPr>
+              <p:cNvPr id="56" name="矩形 55">
+                <a:extLst>
+                  <a:ext uri="{FF2B5EF4-FFF2-40B4-BE49-F238E27FC236}">
+                    <a16:creationId xmlns:a16="http://schemas.microsoft.com/office/drawing/2014/main" id="{98783FC7-C31A-4177-B406-4D671DA17729}"/>
+                  </a:ext>
+                </a:extLst>
+              </p:cNvPr>
+              <p:cNvSpPr>
+                <a:spLocks noRot="1" noChangeAspect="1" noMove="1" noResize="1" noEditPoints="1" noAdjustHandles="1" noChangeArrowheads="1" noChangeShapeType="1" noTextEdit="1"/>
+              </p:cNvSpPr>
+              <p:nvPr/>
+            </p:nvSpPr>
+            <p:spPr>
+              <a:xfrm>
+                <a:off x="2509180" y="4204322"/>
+                <a:ext cx="889154" cy="343171"/>
+              </a:xfrm>
+              <a:prstGeom prst="rect">
+                <a:avLst/>
+              </a:prstGeom>
+              <a:blipFill>
+                <a:blip r:embed="rId13"/>
+                <a:stretch>
+                  <a:fillRect/>
+                </a:stretch>
+              </a:blipFill>
+            </p:spPr>
+            <p:txBody>
+              <a:bodyPr/>
+              <a:lstStyle/>
+              <a:p>
+                <a:r>
+                  <a:rPr lang="zh-TW" altLang="en-US">
+                    <a:noFill/>
+                  </a:rPr>
+                  <a:t> </a:t>
+                </a:r>
+              </a:p>
+            </p:txBody>
+          </p:sp>
+        </mc:Fallback>
+      </mc:AlternateContent>
+      <mc:AlternateContent xmlns:mc="http://schemas.openxmlformats.org/markup-compatibility/2006">
+        <mc:Choice xmlns:a14="http://schemas.microsoft.com/office/drawing/2010/main" Requires="a14">
+          <p:sp>
+            <p:nvSpPr>
+              <p:cNvPr id="57" name="矩形 56">
+                <a:extLst>
+                  <a:ext uri="{FF2B5EF4-FFF2-40B4-BE49-F238E27FC236}">
+                    <a16:creationId xmlns:a16="http://schemas.microsoft.com/office/drawing/2014/main" id="{37D72A01-C052-4820-BBED-D2187CB98E18}"/>
+                  </a:ext>
+                </a:extLst>
+              </p:cNvPr>
+              <p:cNvSpPr/>
+              <p:nvPr/>
+            </p:nvSpPr>
+            <p:spPr>
+              <a:xfrm>
+                <a:off x="4162153" y="4204322"/>
+                <a:ext cx="733662" cy="343171"/>
+              </a:xfrm>
+              <a:prstGeom prst="rect">
+                <a:avLst/>
+              </a:prstGeom>
+            </p:spPr>
+            <p:txBody>
+              <a:bodyPr wrap="none">
+                <a:spAutoFit/>
+              </a:bodyPr>
+              <a:lstStyle/>
+              <a:p>
+                <a:pPr/>
+                <a14:m>
+                  <m:oMathPara xmlns:m="http://schemas.openxmlformats.org/officeDocument/2006/math">
+                    <m:oMathParaPr>
+                      <m:jc m:val="centerGroup"/>
+                    </m:oMathParaPr>
+                    <m:oMath xmlns:m="http://schemas.openxmlformats.org/officeDocument/2006/math">
+                      <m:r>
+                        <a:rPr lang="en-US" altLang="zh-TW" sz="1630" i="1">
+                          <a:latin typeface="Cambria Math" panose="02040503050406030204" pitchFamily="18" charset="0"/>
+                        </a:rPr>
+                        <m:t>ℓ=0</m:t>
+                      </m:r>
+                    </m:oMath>
+                  </m:oMathPara>
+                </a14:m>
+                <a:endParaRPr lang="zh-TW" altLang="en-US" sz="1630" dirty="0">
+                  <a:latin typeface="Times New Roman" panose="02020603050405020304" pitchFamily="18" charset="0"/>
+                  <a:cs typeface="Times New Roman" panose="02020603050405020304" pitchFamily="18" charset="0"/>
+                </a:endParaRPr>
+              </a:p>
+            </p:txBody>
+          </p:sp>
+        </mc:Choice>
+        <mc:Fallback>
+          <p:sp>
+            <p:nvSpPr>
+              <p:cNvPr id="57" name="矩形 56">
+                <a:extLst>
+                  <a:ext uri="{FF2B5EF4-FFF2-40B4-BE49-F238E27FC236}">
+                    <a16:creationId xmlns:a16="http://schemas.microsoft.com/office/drawing/2014/main" id="{37D72A01-C052-4820-BBED-D2187CB98E18}"/>
+                  </a:ext>
+                </a:extLst>
+              </p:cNvPr>
+              <p:cNvSpPr>
+                <a:spLocks noRot="1" noChangeAspect="1" noMove="1" noResize="1" noEditPoints="1" noAdjustHandles="1" noChangeArrowheads="1" noChangeShapeType="1" noTextEdit="1"/>
+              </p:cNvSpPr>
+              <p:nvPr/>
+            </p:nvSpPr>
+            <p:spPr>
+              <a:xfrm>
+                <a:off x="4162153" y="4204322"/>
+                <a:ext cx="733662" cy="343171"/>
+              </a:xfrm>
+              <a:prstGeom prst="rect">
+                <a:avLst/>
+              </a:prstGeom>
+              <a:blipFill>
+                <a:blip r:embed="rId14"/>
+                <a:stretch>
+                  <a:fillRect/>
+                </a:stretch>
+              </a:blipFill>
+            </p:spPr>
+            <p:txBody>
+              <a:bodyPr/>
+              <a:lstStyle/>
+              <a:p>
+                <a:r>
+                  <a:rPr lang="zh-TW" altLang="en-US">
+                    <a:noFill/>
+                  </a:rPr>
+                  <a:t> </a:t>
+                </a:r>
+              </a:p>
+            </p:txBody>
+          </p:sp>
+        </mc:Fallback>
+      </mc:AlternateContent>
+      <mc:AlternateContent xmlns:mc="http://schemas.openxmlformats.org/markup-compatibility/2006">
+        <mc:Choice xmlns:a14="http://schemas.microsoft.com/office/drawing/2010/main" Requires="a14">
+          <p:sp>
+            <p:nvSpPr>
+              <p:cNvPr id="82" name="矩形 81">
+                <a:extLst>
+                  <a:ext uri="{FF2B5EF4-FFF2-40B4-BE49-F238E27FC236}">
+                    <a16:creationId xmlns:a16="http://schemas.microsoft.com/office/drawing/2014/main" id="{990EE664-F023-4537-B835-620C68FC83B8}"/>
+                  </a:ext>
+                </a:extLst>
+              </p:cNvPr>
+              <p:cNvSpPr/>
+              <p:nvPr/>
+            </p:nvSpPr>
+            <p:spPr>
+              <a:xfrm>
+                <a:off x="5918254" y="4204322"/>
+                <a:ext cx="733662" cy="343171"/>
+              </a:xfrm>
+              <a:prstGeom prst="rect">
+                <a:avLst/>
+              </a:prstGeom>
+            </p:spPr>
+            <p:txBody>
+              <a:bodyPr wrap="none">
+                <a:spAutoFit/>
+              </a:bodyPr>
+              <a:lstStyle/>
+              <a:p>
+                <a:pPr/>
+                <a14:m>
+                  <m:oMathPara xmlns:m="http://schemas.openxmlformats.org/officeDocument/2006/math">
+                    <m:oMathParaPr>
+                      <m:jc m:val="centerGroup"/>
+                    </m:oMathParaPr>
+                    <m:oMath xmlns:m="http://schemas.openxmlformats.org/officeDocument/2006/math">
+                      <m:r>
+                        <a:rPr lang="en-US" altLang="zh-TW" sz="1630" i="1">
+                          <a:latin typeface="Cambria Math" panose="02040503050406030204" pitchFamily="18" charset="0"/>
+                        </a:rPr>
+                        <m:t>ℓ=1</m:t>
+                      </m:r>
+                    </m:oMath>
+                  </m:oMathPara>
+                </a14:m>
+                <a:endParaRPr lang="zh-TW" altLang="en-US" sz="1630" dirty="0">
+                  <a:latin typeface="Times New Roman" panose="02020603050405020304" pitchFamily="18" charset="0"/>
+                  <a:cs typeface="Times New Roman" panose="02020603050405020304" pitchFamily="18" charset="0"/>
+                </a:endParaRPr>
+              </a:p>
+            </p:txBody>
+          </p:sp>
+        </mc:Choice>
+        <mc:Fallback>
+          <p:sp>
+            <p:nvSpPr>
+              <p:cNvPr id="82" name="矩形 81">
+                <a:extLst>
+                  <a:ext uri="{FF2B5EF4-FFF2-40B4-BE49-F238E27FC236}">
+                    <a16:creationId xmlns:a16="http://schemas.microsoft.com/office/drawing/2014/main" id="{990EE664-F023-4537-B835-620C68FC83B8}"/>
+                  </a:ext>
+                </a:extLst>
+              </p:cNvPr>
+              <p:cNvSpPr>
+                <a:spLocks noRot="1" noChangeAspect="1" noMove="1" noResize="1" noEditPoints="1" noAdjustHandles="1" noChangeArrowheads="1" noChangeShapeType="1" noTextEdit="1"/>
+              </p:cNvSpPr>
+              <p:nvPr/>
+            </p:nvSpPr>
+            <p:spPr>
+              <a:xfrm>
+                <a:off x="5918254" y="4204322"/>
+                <a:ext cx="733662" cy="343171"/>
+              </a:xfrm>
+              <a:prstGeom prst="rect">
+                <a:avLst/>
+              </a:prstGeom>
+              <a:blipFill>
+                <a:blip r:embed="rId15"/>
+                <a:stretch>
+                  <a:fillRect/>
+                </a:stretch>
+              </a:blipFill>
+            </p:spPr>
+            <p:txBody>
+              <a:bodyPr/>
+              <a:lstStyle/>
+              <a:p>
+                <a:r>
+                  <a:rPr lang="zh-TW" altLang="en-US">
+                    <a:noFill/>
+                  </a:rPr>
+                  <a:t> </a:t>
+                </a:r>
+              </a:p>
+            </p:txBody>
+          </p:sp>
+        </mc:Fallback>
+      </mc:AlternateContent>
+      <mc:AlternateContent xmlns:mc="http://schemas.openxmlformats.org/markup-compatibility/2006">
+        <mc:Choice xmlns:a14="http://schemas.microsoft.com/office/drawing/2010/main" Requires="a14">
+          <p:sp>
+            <p:nvSpPr>
+              <p:cNvPr id="83" name="矩形 82">
+                <a:extLst>
+                  <a:ext uri="{FF2B5EF4-FFF2-40B4-BE49-F238E27FC236}">
+                    <a16:creationId xmlns:a16="http://schemas.microsoft.com/office/drawing/2014/main" id="{A9E16470-7720-49A3-9DC9-3F0C741E2468}"/>
+                  </a:ext>
+                </a:extLst>
+              </p:cNvPr>
+              <p:cNvSpPr/>
+              <p:nvPr/>
+            </p:nvSpPr>
+            <p:spPr>
+              <a:xfrm>
+                <a:off x="7545045" y="4204322"/>
+                <a:ext cx="733662" cy="343171"/>
+              </a:xfrm>
+              <a:prstGeom prst="rect">
+                <a:avLst/>
+              </a:prstGeom>
+            </p:spPr>
+            <p:txBody>
+              <a:bodyPr wrap="none">
+                <a:spAutoFit/>
+              </a:bodyPr>
+              <a:lstStyle/>
+              <a:p>
+                <a:pPr/>
+                <a14:m>
+                  <m:oMathPara xmlns:m="http://schemas.openxmlformats.org/officeDocument/2006/math">
+                    <m:oMathParaPr>
+                      <m:jc m:val="centerGroup"/>
+                    </m:oMathParaPr>
+                    <m:oMath xmlns:m="http://schemas.openxmlformats.org/officeDocument/2006/math">
+                      <m:r>
+                        <a:rPr lang="en-US" altLang="zh-TW" sz="1630" i="1">
+                          <a:latin typeface="Cambria Math" panose="02040503050406030204" pitchFamily="18" charset="0"/>
+                        </a:rPr>
+                        <m:t>ℓ=2</m:t>
+                      </m:r>
+                    </m:oMath>
+                  </m:oMathPara>
+                </a14:m>
+                <a:endParaRPr lang="zh-TW" altLang="en-US" sz="1630" dirty="0">
+                  <a:latin typeface="Times New Roman" panose="02020603050405020304" pitchFamily="18" charset="0"/>
+                  <a:cs typeface="Times New Roman" panose="02020603050405020304" pitchFamily="18" charset="0"/>
+                </a:endParaRPr>
+              </a:p>
+            </p:txBody>
+          </p:sp>
+        </mc:Choice>
+        <mc:Fallback>
+          <p:sp>
+            <p:nvSpPr>
+              <p:cNvPr id="83" name="矩形 82">
+                <a:extLst>
+                  <a:ext uri="{FF2B5EF4-FFF2-40B4-BE49-F238E27FC236}">
+                    <a16:creationId xmlns:a16="http://schemas.microsoft.com/office/drawing/2014/main" id="{A9E16470-7720-49A3-9DC9-3F0C741E2468}"/>
+                  </a:ext>
+                </a:extLst>
+              </p:cNvPr>
+              <p:cNvSpPr>
+                <a:spLocks noRot="1" noChangeAspect="1" noMove="1" noResize="1" noEditPoints="1" noAdjustHandles="1" noChangeArrowheads="1" noChangeShapeType="1" noTextEdit="1"/>
+              </p:cNvSpPr>
+              <p:nvPr/>
+            </p:nvSpPr>
+            <p:spPr>
+              <a:xfrm>
+                <a:off x="7545045" y="4204322"/>
+                <a:ext cx="733662" cy="343171"/>
+              </a:xfrm>
+              <a:prstGeom prst="rect">
+                <a:avLst/>
+              </a:prstGeom>
+              <a:blipFill>
+                <a:blip r:embed="rId16"/>
+                <a:stretch>
+                  <a:fillRect/>
+                </a:stretch>
+              </a:blipFill>
+            </p:spPr>
+            <p:txBody>
+              <a:bodyPr/>
+              <a:lstStyle/>
+              <a:p>
+                <a:r>
+                  <a:rPr lang="zh-TW" altLang="en-US">
+                    <a:noFill/>
+                  </a:rPr>
+                  <a:t> </a:t>
+                </a:r>
+              </a:p>
+            </p:txBody>
+          </p:sp>
+        </mc:Fallback>
+      </mc:AlternateContent>
+      <p:sp>
+        <p:nvSpPr>
+          <p:cNvPr id="84" name="矩形 83">
+            <a:extLst>
+              <a:ext uri="{FF2B5EF4-FFF2-40B4-BE49-F238E27FC236}">
+                <a16:creationId xmlns:a16="http://schemas.microsoft.com/office/drawing/2014/main" id="{937C9061-1189-48F8-AA7F-3E862A0FA958}"/>
+              </a:ext>
+            </a:extLst>
+          </p:cNvPr>
+          <p:cNvSpPr/>
+          <p:nvPr/>
+        </p:nvSpPr>
+        <p:spPr>
+          <a:xfrm rot="5400000">
+            <a:off x="8637052" y="1329285"/>
+            <a:ext cx="1359668" cy="343171"/>
+          </a:xfrm>
+          <a:prstGeom prst="rect">
+            <a:avLst/>
+          </a:prstGeom>
+        </p:spPr>
+        <p:txBody>
+          <a:bodyPr wrap="none">
+            <a:spAutoFit/>
+          </a:bodyPr>
+          <a:lstStyle/>
+          <a:p>
+            <a:r>
+              <a:rPr lang="en-US" altLang="zh-TW" sz="1630" dirty="0">
+                <a:latin typeface="Times New Roman" panose="02020603050405020304" pitchFamily="18" charset="0"/>
+                <a:cs typeface="Times New Roman" panose="02020603050405020304" pitchFamily="18" charset="0"/>
+              </a:rPr>
+              <a:t>arbitrary units</a:t>
+            </a:r>
+            <a:endParaRPr lang="zh-TW" altLang="en-US" sz="1630" dirty="0">
+              <a:latin typeface="Times New Roman" panose="02020603050405020304" pitchFamily="18" charset="0"/>
+              <a:cs typeface="Times New Roman" panose="02020603050405020304" pitchFamily="18" charset="0"/>
+            </a:endParaRPr>
+          </a:p>
+        </p:txBody>
+      </p:sp>
+      <p:sp>
+        <p:nvSpPr>
+          <p:cNvPr id="85" name="矩形 84">
+            <a:extLst>
+              <a:ext uri="{FF2B5EF4-FFF2-40B4-BE49-F238E27FC236}">
+                <a16:creationId xmlns:a16="http://schemas.microsoft.com/office/drawing/2014/main" id="{F4C1FE40-E458-4B65-9C8D-44E12C408F42}"/>
+              </a:ext>
+            </a:extLst>
+          </p:cNvPr>
+          <p:cNvSpPr/>
+          <p:nvPr/>
+        </p:nvSpPr>
+        <p:spPr>
+          <a:xfrm rot="5400000">
+            <a:off x="8637052" y="3551145"/>
+            <a:ext cx="1359668" cy="343171"/>
+          </a:xfrm>
+          <a:prstGeom prst="rect">
+            <a:avLst/>
+          </a:prstGeom>
+        </p:spPr>
+        <p:txBody>
+          <a:bodyPr wrap="none">
+            <a:spAutoFit/>
+          </a:bodyPr>
+          <a:lstStyle/>
+          <a:p>
+            <a:r>
+              <a:rPr lang="en-US" altLang="zh-TW" sz="1630" dirty="0">
+                <a:latin typeface="Times New Roman" panose="02020603050405020304" pitchFamily="18" charset="0"/>
+                <a:cs typeface="Times New Roman" panose="02020603050405020304" pitchFamily="18" charset="0"/>
+              </a:rPr>
+              <a:t>arbitrary units</a:t>
+            </a:r>
+            <a:endParaRPr lang="zh-TW" altLang="en-US" sz="1630" dirty="0">
+              <a:latin typeface="Times New Roman" panose="02020603050405020304" pitchFamily="18" charset="0"/>
+              <a:cs typeface="Times New Roman" panose="02020603050405020304" pitchFamily="18" charset="0"/>
+            </a:endParaRPr>
+          </a:p>
+        </p:txBody>
+      </p:sp>
       <p:grpSp>
         <p:nvGrpSpPr>
-          <p:cNvPr id="6" name="群組 5">
+          <p:cNvPr id="86" name="群組 85">
             <a:extLst>
               <a:ext uri="{FF2B5EF4-FFF2-40B4-BE49-F238E27FC236}">
-                <a16:creationId xmlns:a16="http://schemas.microsoft.com/office/drawing/2014/main" id="{929EF5A8-0DF9-4B6C-9B0D-DBAB7DD6A55E}"/>
+                <a16:creationId xmlns:a16="http://schemas.microsoft.com/office/drawing/2014/main" id="{83B5F868-82DF-4B6B-A7DC-2FEC1536BE02}"/>
               </a:ext>
             </a:extLst>
           </p:cNvPr>
@@ -2988,300 +4559,38 @@
         </p:nvGrpSpPr>
         <p:grpSpPr>
           <a:xfrm>
-            <a:off x="417538" y="36797"/>
-            <a:ext cx="9070933" cy="4515873"/>
-            <a:chOff x="207610" y="84702"/>
-            <a:chExt cx="9070933" cy="4515873"/>
+            <a:off x="976315" y="855576"/>
+            <a:ext cx="703953" cy="629156"/>
+            <a:chOff x="-1051588" y="926660"/>
+            <a:chExt cx="645259" cy="576699"/>
           </a:xfrm>
         </p:grpSpPr>
-        <p:pic>
-          <p:nvPicPr>
-            <p:cNvPr id="107" name="圖片 106">
-              <a:extLst>
-                <a:ext uri="{FF2B5EF4-FFF2-40B4-BE49-F238E27FC236}">
-                  <a16:creationId xmlns:a16="http://schemas.microsoft.com/office/drawing/2014/main" id="{FDF85A7A-65CD-4331-BE69-08EF74276B4E}"/>
-                </a:ext>
-              </a:extLst>
-            </p:cNvPr>
-            <p:cNvPicPr>
-              <a:picLocks noChangeAspect="1"/>
-            </p:cNvPicPr>
-            <p:nvPr/>
-          </p:nvPicPr>
-          <p:blipFill rotWithShape="1">
-            <a:blip r:embed="rId2">
-              <a:clrChange>
-                <a:clrFrom>
-                  <a:srgbClr val="FFFFFF"/>
-                </a:clrFrom>
-                <a:clrTo>
-                  <a:srgbClr val="FFFFFF">
-                    <a:alpha val="0"/>
-                  </a:srgbClr>
-                </a:clrTo>
-              </a:clrChange>
-              <a:extLst>
-                <a:ext uri="{28A0092B-C50C-407E-A947-70E740481C1C}">
-                  <a14:useLocalDpi xmlns:a14="http://schemas.microsoft.com/office/drawing/2010/main" val="0"/>
-                </a:ext>
-              </a:extLst>
-            </a:blip>
-            <a:srcRect r="17173"/>
-            <a:stretch/>
-          </p:blipFill>
-          <p:spPr>
-            <a:xfrm>
-              <a:off x="207610" y="571139"/>
-              <a:ext cx="8241065" cy="1658288"/>
-            </a:xfrm>
-            <a:prstGeom prst="rect">
-              <a:avLst/>
-            </a:prstGeom>
-          </p:spPr>
-        </p:pic>
-        <p:pic>
-          <p:nvPicPr>
-            <p:cNvPr id="108" name="圖片 107">
-              <a:extLst>
-                <a:ext uri="{FF2B5EF4-FFF2-40B4-BE49-F238E27FC236}">
-                  <a16:creationId xmlns:a16="http://schemas.microsoft.com/office/drawing/2014/main" id="{D9694FC0-CF9E-4E7D-B832-4E29AD164050}"/>
-                </a:ext>
-              </a:extLst>
-            </p:cNvPr>
-            <p:cNvPicPr>
-              <a:picLocks noChangeAspect="1"/>
-            </p:cNvPicPr>
-            <p:nvPr/>
-          </p:nvPicPr>
-          <p:blipFill rotWithShape="1">
-            <a:blip r:embed="rId3">
-              <a:clrChange>
-                <a:clrFrom>
-                  <a:srgbClr val="FFFFFF"/>
-                </a:clrFrom>
-                <a:clrTo>
-                  <a:srgbClr val="FFFFFF">
-                    <a:alpha val="0"/>
-                  </a:srgbClr>
-                </a:clrTo>
-              </a:clrChange>
-              <a:extLst>
-                <a:ext uri="{28A0092B-C50C-407E-A947-70E740481C1C}">
-                  <a14:useLocalDpi xmlns:a14="http://schemas.microsoft.com/office/drawing/2010/main" val="0"/>
-                </a:ext>
-              </a:extLst>
-            </a:blip>
-            <a:srcRect r="17365"/>
-            <a:stretch/>
-          </p:blipFill>
-          <p:spPr>
-            <a:xfrm>
-              <a:off x="207610" y="2801456"/>
-              <a:ext cx="8222015" cy="1658288"/>
-            </a:xfrm>
-            <a:prstGeom prst="rect">
-              <a:avLst/>
-            </a:prstGeom>
-          </p:spPr>
-        </p:pic>
-        <p:pic>
-          <p:nvPicPr>
-            <p:cNvPr id="43" name="圖片 42">
-              <a:extLst>
-                <a:ext uri="{FF2B5EF4-FFF2-40B4-BE49-F238E27FC236}">
-                  <a16:creationId xmlns:a16="http://schemas.microsoft.com/office/drawing/2014/main" id="{29D9B646-6A27-4649-A2F6-80CFFF4DF4A1}"/>
-                </a:ext>
-              </a:extLst>
-            </p:cNvPr>
-            <p:cNvPicPr>
-              <a:picLocks noChangeAspect="1"/>
-            </p:cNvPicPr>
-            <p:nvPr/>
-          </p:nvPicPr>
-          <p:blipFill rotWithShape="1">
-            <a:blip r:embed="rId4">
-              <a:clrChange>
-                <a:clrFrom>
-                  <a:srgbClr val="FFFFFF"/>
-                </a:clrFrom>
-                <a:clrTo>
-                  <a:srgbClr val="FFFFFF">
-                    <a:alpha val="0"/>
-                  </a:srgbClr>
-                </a:clrTo>
-              </a:clrChange>
-              <a:extLst>
-                <a:ext uri="{28A0092B-C50C-407E-A947-70E740481C1C}">
-                  <a14:useLocalDpi xmlns:a14="http://schemas.microsoft.com/office/drawing/2010/main" val="0"/>
-                </a:ext>
-              </a:extLst>
-            </a:blip>
-            <a:srcRect l="84897" r="9472"/>
-            <a:stretch/>
-          </p:blipFill>
-          <p:spPr>
-            <a:xfrm>
-              <a:off x="8422076" y="2917471"/>
-              <a:ext cx="569632" cy="1680954"/>
-            </a:xfrm>
-            <a:prstGeom prst="rect">
-              <a:avLst/>
-            </a:prstGeom>
-          </p:spPr>
-        </p:pic>
-        <p:sp>
-          <p:nvSpPr>
-            <p:cNvPr id="44" name="矩形: 圓角 43">
-              <a:extLst>
-                <a:ext uri="{FF2B5EF4-FFF2-40B4-BE49-F238E27FC236}">
-                  <a16:creationId xmlns:a16="http://schemas.microsoft.com/office/drawing/2014/main" id="{DC81CB28-05E7-4299-B7F1-04C2533125DA}"/>
-                </a:ext>
-              </a:extLst>
-            </p:cNvPr>
-            <p:cNvSpPr/>
-            <p:nvPr/>
-          </p:nvSpPr>
-          <p:spPr>
-            <a:xfrm>
-              <a:off x="219052" y="2880323"/>
-              <a:ext cx="8258198" cy="1720252"/>
-            </a:xfrm>
-            <a:prstGeom prst="roundRect">
-              <a:avLst>
-                <a:gd name="adj" fmla="val 6163"/>
-              </a:avLst>
-            </a:prstGeom>
-            <a:noFill/>
-            <a:ln w="9525" cap="flat" cmpd="sng" algn="ctr">
-              <a:solidFill>
-                <a:schemeClr val="accent2"/>
-              </a:solidFill>
-              <a:prstDash val="solid"/>
-              <a:round/>
-              <a:headEnd type="none" w="med" len="med"/>
-              <a:tailEnd type="none" w="med" len="med"/>
-            </a:ln>
-          </p:spPr>
-          <p:style>
-            <a:lnRef idx="0">
-              <a:scrgbClr r="0" g="0" b="0"/>
-            </a:lnRef>
-            <a:fillRef idx="0">
-              <a:scrgbClr r="0" g="0" b="0"/>
-            </a:fillRef>
-            <a:effectRef idx="0">
-              <a:scrgbClr r="0" g="0" b="0"/>
-            </a:effectRef>
-            <a:fontRef idx="minor">
-              <a:schemeClr val="accent2"/>
-            </a:fontRef>
-          </p:style>
-          <p:txBody>
-            <a:bodyPr rot="0" spcFirstLastPara="0" vertOverflow="overflow" horzOverflow="overflow" vert="horz" wrap="square" lIns="91440" tIns="45720" rIns="91440" bIns="45720" numCol="1" spcCol="0" rtlCol="0" fromWordArt="0" anchor="ctr" anchorCtr="0" forceAA="0" compatLnSpc="1">
-              <a:prstTxWarp prst="textNoShape">
-                <a:avLst/>
-              </a:prstTxWarp>
-              <a:noAutofit/>
-            </a:bodyPr>
-            <a:lstStyle/>
-            <a:p>
-              <a:pPr algn="ctr"/>
-              <a:endParaRPr lang="zh-TW" altLang="en-US" sz="1900" dirty="0">
-                <a:latin typeface="Times New Roman" panose="02020603050405020304" pitchFamily="18" charset="0"/>
-                <a:cs typeface="Times New Roman" panose="02020603050405020304" pitchFamily="18" charset="0"/>
-              </a:endParaRPr>
-            </a:p>
-          </p:txBody>
-        </p:sp>
-        <p:sp>
-          <p:nvSpPr>
-            <p:cNvPr id="45" name="矩形: 圓角 44">
-              <a:extLst>
-                <a:ext uri="{FF2B5EF4-FFF2-40B4-BE49-F238E27FC236}">
-                  <a16:creationId xmlns:a16="http://schemas.microsoft.com/office/drawing/2014/main" id="{441AAA92-0554-47A1-8611-1C1C012F694C}"/>
-                </a:ext>
-              </a:extLst>
-            </p:cNvPr>
-            <p:cNvSpPr/>
-            <p:nvPr/>
-          </p:nvSpPr>
-          <p:spPr>
-            <a:xfrm>
-              <a:off x="219074" y="604246"/>
-              <a:ext cx="8258346" cy="1719011"/>
-            </a:xfrm>
-            <a:prstGeom prst="roundRect">
-              <a:avLst>
-                <a:gd name="adj" fmla="val 6163"/>
-              </a:avLst>
-            </a:prstGeom>
-            <a:noFill/>
-            <a:ln w="9525" cap="flat" cmpd="sng" algn="ctr">
-              <a:solidFill>
-                <a:schemeClr val="accent1"/>
-              </a:solidFill>
-              <a:prstDash val="solid"/>
-              <a:round/>
-              <a:headEnd type="none" w="med" len="med"/>
-              <a:tailEnd type="none" w="med" len="med"/>
-            </a:ln>
-          </p:spPr>
-          <p:style>
-            <a:lnRef idx="0">
-              <a:scrgbClr r="0" g="0" b="0"/>
-            </a:lnRef>
-            <a:fillRef idx="0">
-              <a:scrgbClr r="0" g="0" b="0"/>
-            </a:fillRef>
-            <a:effectRef idx="0">
-              <a:scrgbClr r="0" g="0" b="0"/>
-            </a:effectRef>
-            <a:fontRef idx="minor">
-              <a:schemeClr val="accent1"/>
-            </a:fontRef>
-          </p:style>
-          <p:txBody>
-            <a:bodyPr rot="0" spcFirstLastPara="0" vertOverflow="overflow" horzOverflow="overflow" vert="horz" wrap="square" lIns="91440" tIns="45720" rIns="91440" bIns="45720" numCol="1" spcCol="0" rtlCol="0" fromWordArt="0" anchor="ctr" anchorCtr="0" forceAA="0" compatLnSpc="1">
-              <a:prstTxWarp prst="textNoShape">
-                <a:avLst/>
-              </a:prstTxWarp>
-              <a:noAutofit/>
-            </a:bodyPr>
-            <a:lstStyle/>
-            <a:p>
-              <a:pPr algn="ctr"/>
-              <a:endParaRPr lang="zh-TW" altLang="en-US" sz="1900" dirty="0">
-                <a:latin typeface="Times New Roman" panose="02020603050405020304" pitchFamily="18" charset="0"/>
-                <a:cs typeface="Times New Roman" panose="02020603050405020304" pitchFamily="18" charset="0"/>
-              </a:endParaRPr>
-            </a:p>
-          </p:txBody>
-        </p:sp>
         <mc:AlternateContent xmlns:mc="http://schemas.openxmlformats.org/markup-compatibility/2006" xmlns:a14="http://schemas.microsoft.com/office/drawing/2010/main">
           <mc:Choice Requires="a14">
             <p:sp>
               <p:nvSpPr>
-                <p:cNvPr id="46" name="矩形 45">
+                <p:cNvPr id="87" name="文字方塊 86">
                   <a:extLst>
                     <a:ext uri="{FF2B5EF4-FFF2-40B4-BE49-F238E27FC236}">
-                      <a16:creationId xmlns:a16="http://schemas.microsoft.com/office/drawing/2014/main" id="{2068CE7F-6CD8-45E2-B176-93658BA0F5BA}"/>
+                      <a16:creationId xmlns:a16="http://schemas.microsoft.com/office/drawing/2014/main" id="{BD55CD46-F76A-40C8-8FEF-3E8617CDE787}"/>
                     </a:ext>
                   </a:extLst>
                 </p:cNvPr>
-                <p:cNvSpPr/>
+                <p:cNvSpPr txBox="1"/>
                 <p:nvPr/>
               </p:nvSpPr>
               <p:spPr>
                 <a:xfrm>
-                  <a:off x="459584" y="1619048"/>
-                  <a:ext cx="783035" cy="343171"/>
+                  <a:off x="-1051588" y="926660"/>
+                  <a:ext cx="323387" cy="335658"/>
                 </a:xfrm>
                 <a:prstGeom prst="rect">
                   <a:avLst/>
                 </a:prstGeom>
+                <a:noFill/>
               </p:spPr>
               <p:txBody>
-                <a:bodyPr wrap="none">
+                <a:bodyPr wrap="square" rtlCol="0">
                   <a:spAutoFit/>
                 </a:bodyPr>
                 <a:lstStyle/>
@@ -3293,41 +4602,35 @@
                         <m:jc m:val="centerGroup"/>
                       </m:oMathParaPr>
                       <m:oMath xmlns:m="http://schemas.openxmlformats.org/officeDocument/2006/math">
-                        <m:r>
-                          <a:rPr lang="en-US" altLang="zh-TW" sz="1630" i="1">
-                            <a:latin typeface="Cambria Math" panose="02040503050406030204" pitchFamily="18" charset="0"/>
-                          </a:rPr>
-                          <m:t>0.1 </m:t>
-                        </m:r>
                         <m:sSub>
                           <m:sSubPr>
                             <m:ctrlPr>
-                              <a:rPr lang="en-US" altLang="zh-TW" sz="1630" i="1">
+                              <a:rPr lang="en-US" altLang="zh-TW" sz="1630" b="1" i="1">
                                 <a:latin typeface="Cambria Math" panose="02040503050406030204" pitchFamily="18" charset="0"/>
                               </a:rPr>
                             </m:ctrlPr>
                           </m:sSubPr>
                           <m:e>
                             <m:r>
-                              <a:rPr lang="en-US" altLang="zh-TW" sz="1630" i="1">
+                              <a:rPr lang="en-US" altLang="zh-TW" sz="1630" b="1" i="1">
                                 <a:latin typeface="Cambria Math" panose="02040503050406030204" pitchFamily="18" charset="0"/>
                               </a:rPr>
-                              <m:t>𝑄</m:t>
+                              <m:t>𝒒</m:t>
                             </m:r>
                           </m:e>
                           <m:sub>
                             <m:r>
-                              <a:rPr lang="en-US" altLang="zh-TW" sz="1630" i="1">
+                              <a:rPr lang="en-US" altLang="zh-TW" sz="1630" b="1" i="1">
                                 <a:latin typeface="Cambria Math" panose="02040503050406030204" pitchFamily="18" charset="0"/>
                               </a:rPr>
-                              <m:t>𝑐</m:t>
+                              <m:t>𝒚</m:t>
                             </m:r>
                           </m:sub>
                         </m:sSub>
                       </m:oMath>
                     </m:oMathPara>
                   </a14:m>
-                  <a:endParaRPr lang="zh-TW" altLang="en-US" sz="1630" dirty="0">
+                  <a:endParaRPr lang="en-US" altLang="zh-TW" sz="1630" dirty="0">
                     <a:latin typeface="Times New Roman" panose="02020603050405020304" pitchFamily="18" charset="0"/>
                     <a:cs typeface="Times New Roman" panose="02020603050405020304" pitchFamily="18" charset="0"/>
                   </a:endParaRPr>
@@ -3338,30 +4641,30 @@
           <mc:Fallback xmlns="">
             <p:sp>
               <p:nvSpPr>
-                <p:cNvPr id="46" name="矩形 45">
+                <p:cNvPr id="80" name="文字方塊 79">
                   <a:extLst>
                     <a:ext uri="{FF2B5EF4-FFF2-40B4-BE49-F238E27FC236}">
-                      <a16:creationId xmlns:a16="http://schemas.microsoft.com/office/drawing/2014/main" id="{2068CE7F-6CD8-45E2-B176-93658BA0F5BA}"/>
+                      <a16:creationId xmlns:a16="http://schemas.microsoft.com/office/drawing/2014/main" id="{0A2654E9-3006-4B11-B911-23ACB1C2DDC4}"/>
                     </a:ext>
                   </a:extLst>
                 </p:cNvPr>
-                <p:cNvSpPr>
+                <p:cNvSpPr txBox="1">
                   <a:spLocks noRot="1" noChangeAspect="1" noMove="1" noResize="1" noEditPoints="1" noAdjustHandles="1" noChangeArrowheads="1" noChangeShapeType="1" noTextEdit="1"/>
                 </p:cNvSpPr>
                 <p:nvPr/>
               </p:nvSpPr>
               <p:spPr>
                 <a:xfrm>
-                  <a:off x="459584" y="1619048"/>
-                  <a:ext cx="783035" cy="343171"/>
+                  <a:off x="-1051588" y="926660"/>
+                  <a:ext cx="323387" cy="335658"/>
                 </a:xfrm>
                 <a:prstGeom prst="rect">
                   <a:avLst/>
                 </a:prstGeom>
                 <a:blipFill>
-                  <a:blip r:embed="rId5"/>
+                  <a:blip r:embed="rId19"/>
                   <a:stretch>
-                    <a:fillRect b="-8929"/>
+                    <a:fillRect r="-3448" b="-1667"/>
                   </a:stretch>
                 </a:blipFill>
               </p:spPr>
@@ -3384,27 +4687,28 @@
           <mc:Choice Requires="a14">
             <p:sp>
               <p:nvSpPr>
-                <p:cNvPr id="47" name="矩形 46">
+                <p:cNvPr id="96" name="文字方塊 95">
                   <a:extLst>
                     <a:ext uri="{FF2B5EF4-FFF2-40B4-BE49-F238E27FC236}">
-                      <a16:creationId xmlns:a16="http://schemas.microsoft.com/office/drawing/2014/main" id="{0C022BE9-80C6-4AF4-8998-A1D5D06474C5}"/>
+                      <a16:creationId xmlns:a16="http://schemas.microsoft.com/office/drawing/2014/main" id="{1F9BA172-17FD-49D5-A01A-92CA18058D98}"/>
                     </a:ext>
                   </a:extLst>
                 </p:cNvPr>
-                <p:cNvSpPr/>
+                <p:cNvSpPr txBox="1"/>
                 <p:nvPr/>
               </p:nvSpPr>
               <p:spPr>
                 <a:xfrm>
-                  <a:off x="516969" y="1988665"/>
-                  <a:ext cx="889154" cy="343171"/>
+                  <a:off x="-813248" y="1188801"/>
+                  <a:ext cx="406919" cy="314558"/>
                 </a:xfrm>
                 <a:prstGeom prst="rect">
                   <a:avLst/>
                 </a:prstGeom>
+                <a:noFill/>
               </p:spPr>
               <p:txBody>
-                <a:bodyPr wrap="none">
+                <a:bodyPr wrap="square" rtlCol="0">
                   <a:spAutoFit/>
                 </a:bodyPr>
                 <a:lstStyle/>
@@ -3416,16 +4720,35 @@
                         <m:jc m:val="centerGroup"/>
                       </m:oMathParaPr>
                       <m:oMath xmlns:m="http://schemas.openxmlformats.org/officeDocument/2006/math">
-                        <m:r>
-                          <a:rPr lang="en-US" altLang="zh-TW" sz="1630" i="1">
-                            <a:latin typeface="Cambria Math" panose="02040503050406030204" pitchFamily="18" charset="0"/>
-                          </a:rPr>
-                          <m:t>ℓ=−2</m:t>
-                        </m:r>
+                        <m:sSub>
+                          <m:sSubPr>
+                            <m:ctrlPr>
+                              <a:rPr lang="en-US" altLang="zh-TW" sz="1630" b="1" i="1">
+                                <a:latin typeface="Cambria Math" panose="02040503050406030204" pitchFamily="18" charset="0"/>
+                              </a:rPr>
+                            </m:ctrlPr>
+                          </m:sSubPr>
+                          <m:e>
+                            <m:r>
+                              <a:rPr lang="en-US" altLang="zh-TW" sz="1630" b="1" i="1">
+                                <a:latin typeface="Cambria Math" panose="02040503050406030204" pitchFamily="18" charset="0"/>
+                              </a:rPr>
+                              <m:t>𝒒</m:t>
+                            </m:r>
+                          </m:e>
+                          <m:sub>
+                            <m:r>
+                              <a:rPr lang="en-US" altLang="zh-TW" sz="1630" b="1" i="1">
+                                <a:latin typeface="Cambria Math" panose="02040503050406030204" pitchFamily="18" charset="0"/>
+                              </a:rPr>
+                              <m:t>𝒙</m:t>
+                            </m:r>
+                          </m:sub>
+                        </m:sSub>
                       </m:oMath>
                     </m:oMathPara>
                   </a14:m>
-                  <a:endParaRPr lang="zh-TW" altLang="en-US" sz="1630" dirty="0">
+                  <a:endParaRPr lang="en-US" altLang="zh-TW" sz="1630" dirty="0">
                     <a:latin typeface="Times New Roman" panose="02020603050405020304" pitchFamily="18" charset="0"/>
                     <a:cs typeface="Times New Roman" panose="02020603050405020304" pitchFamily="18" charset="0"/>
                   </a:endParaRPr>
@@ -3436,30 +4759,295 @@
           <mc:Fallback xmlns="">
             <p:sp>
               <p:nvSpPr>
-                <p:cNvPr id="47" name="矩形 46">
+                <p:cNvPr id="81" name="文字方塊 80">
                   <a:extLst>
                     <a:ext uri="{FF2B5EF4-FFF2-40B4-BE49-F238E27FC236}">
-                      <a16:creationId xmlns:a16="http://schemas.microsoft.com/office/drawing/2014/main" id="{0C022BE9-80C6-4AF4-8998-A1D5D06474C5}"/>
+                      <a16:creationId xmlns:a16="http://schemas.microsoft.com/office/drawing/2014/main" id="{47E81467-D25E-4BB7-94DE-E307D45DD949}"/>
                     </a:ext>
                   </a:extLst>
                 </p:cNvPr>
-                <p:cNvSpPr>
+                <p:cNvSpPr txBox="1">
                   <a:spLocks noRot="1" noChangeAspect="1" noMove="1" noResize="1" noEditPoints="1" noAdjustHandles="1" noChangeArrowheads="1" noChangeShapeType="1" noTextEdit="1"/>
                 </p:cNvSpPr>
                 <p:nvPr/>
               </p:nvSpPr>
               <p:spPr>
                 <a:xfrm>
-                  <a:off x="516969" y="1988665"/>
-                  <a:ext cx="889154" cy="343171"/>
+                  <a:off x="-813248" y="1188801"/>
+                  <a:ext cx="406919" cy="314558"/>
                 </a:xfrm>
                 <a:prstGeom prst="rect">
                   <a:avLst/>
                 </a:prstGeom>
                 <a:blipFill>
-                  <a:blip r:embed="rId6"/>
+                  <a:blip r:embed="rId20"/>
                   <a:stretch>
-                    <a:fillRect/>
+                    <a:fillRect b="-5263"/>
+                  </a:stretch>
+                </a:blipFill>
+              </p:spPr>
+              <p:txBody>
+                <a:bodyPr/>
+                <a:lstStyle/>
+                <a:p>
+                  <a:r>
+                    <a:rPr lang="zh-TW" altLang="en-US">
+                      <a:noFill/>
+                    </a:rPr>
+                    <a:t> </a:t>
+                  </a:r>
+                </a:p>
+              </p:txBody>
+            </p:sp>
+          </mc:Fallback>
+        </mc:AlternateContent>
+        <p:sp>
+          <p:nvSpPr>
+            <p:cNvPr id="97" name="箭號: 向右 96">
+              <a:extLst>
+                <a:ext uri="{FF2B5EF4-FFF2-40B4-BE49-F238E27FC236}">
+                  <a16:creationId xmlns:a16="http://schemas.microsoft.com/office/drawing/2014/main" id="{2C7CA38B-E7B2-4225-B8BC-952574CCD2AC}"/>
+                </a:ext>
+              </a:extLst>
+            </p:cNvPr>
+            <p:cNvSpPr/>
+            <p:nvPr/>
+          </p:nvSpPr>
+          <p:spPr>
+            <a:xfrm>
+              <a:off x="-837092" y="1356364"/>
+              <a:ext cx="92654" cy="27541"/>
+            </a:xfrm>
+            <a:prstGeom prst="rightArrow">
+              <a:avLst>
+                <a:gd name="adj1" fmla="val 50000"/>
+                <a:gd name="adj2" fmla="val 99023"/>
+              </a:avLst>
+            </a:prstGeom>
+            <a:solidFill>
+              <a:schemeClr val="tx1"/>
+            </a:solidFill>
+            <a:ln>
+              <a:solidFill>
+                <a:schemeClr val="tx1"/>
+              </a:solidFill>
+            </a:ln>
+          </p:spPr>
+          <p:style>
+            <a:lnRef idx="2">
+              <a:schemeClr val="dk1">
+                <a:shade val="50000"/>
+              </a:schemeClr>
+            </a:lnRef>
+            <a:fillRef idx="1">
+              <a:schemeClr val="dk1"/>
+            </a:fillRef>
+            <a:effectRef idx="0">
+              <a:schemeClr val="dk1"/>
+            </a:effectRef>
+            <a:fontRef idx="minor">
+              <a:schemeClr val="lt1"/>
+            </a:fontRef>
+          </p:style>
+          <p:txBody>
+            <a:bodyPr rtlCol="0" anchor="ctr"/>
+            <a:lstStyle/>
+            <a:p>
+              <a:pPr algn="ctr"/>
+              <a:endParaRPr lang="zh-TW" altLang="en-US" sz="1630">
+                <a:solidFill>
+                  <a:schemeClr val="tx1"/>
+                </a:solidFill>
+                <a:latin typeface="Times New Roman" panose="02020603050405020304" pitchFamily="18" charset="0"/>
+                <a:cs typeface="Times New Roman" panose="02020603050405020304" pitchFamily="18" charset="0"/>
+              </a:endParaRPr>
+            </a:p>
+          </p:txBody>
+        </p:sp>
+        <p:sp>
+          <p:nvSpPr>
+            <p:cNvPr id="98" name="箭號: 向右 97">
+              <a:extLst>
+                <a:ext uri="{FF2B5EF4-FFF2-40B4-BE49-F238E27FC236}">
+                  <a16:creationId xmlns:a16="http://schemas.microsoft.com/office/drawing/2014/main" id="{03D676CE-2788-42E2-A47E-69212772F843}"/>
+                </a:ext>
+              </a:extLst>
+            </p:cNvPr>
+            <p:cNvSpPr/>
+            <p:nvPr/>
+          </p:nvSpPr>
+          <p:spPr>
+            <a:xfrm rot="16200000">
+              <a:off x="-877012" y="1316853"/>
+              <a:ext cx="91764" cy="27808"/>
+            </a:xfrm>
+            <a:prstGeom prst="rightArrow">
+              <a:avLst>
+                <a:gd name="adj1" fmla="val 50000"/>
+                <a:gd name="adj2" fmla="val 99023"/>
+              </a:avLst>
+            </a:prstGeom>
+            <a:solidFill>
+              <a:schemeClr val="tx1"/>
+            </a:solidFill>
+            <a:ln>
+              <a:solidFill>
+                <a:schemeClr val="tx1"/>
+              </a:solidFill>
+            </a:ln>
+          </p:spPr>
+          <p:style>
+            <a:lnRef idx="2">
+              <a:schemeClr val="dk1">
+                <a:shade val="50000"/>
+              </a:schemeClr>
+            </a:lnRef>
+            <a:fillRef idx="1">
+              <a:schemeClr val="dk1"/>
+            </a:fillRef>
+            <a:effectRef idx="0">
+              <a:schemeClr val="dk1"/>
+            </a:effectRef>
+            <a:fontRef idx="minor">
+              <a:schemeClr val="lt1"/>
+            </a:fontRef>
+          </p:style>
+          <p:txBody>
+            <a:bodyPr rtlCol="0" anchor="ctr"/>
+            <a:lstStyle/>
+            <a:p>
+              <a:pPr algn="ctr"/>
+              <a:endParaRPr lang="zh-TW" altLang="en-US" sz="1630" dirty="0">
+                <a:solidFill>
+                  <a:schemeClr val="tx1"/>
+                </a:solidFill>
+                <a:latin typeface="Times New Roman" panose="02020603050405020304" pitchFamily="18" charset="0"/>
+                <a:cs typeface="Times New Roman" panose="02020603050405020304" pitchFamily="18" charset="0"/>
+              </a:endParaRPr>
+            </a:p>
+          </p:txBody>
+        </p:sp>
+      </p:grpSp>
+      <p:grpSp>
+        <p:nvGrpSpPr>
+          <p:cNvPr id="99" name="群組 98">
+            <a:extLst>
+              <a:ext uri="{FF2B5EF4-FFF2-40B4-BE49-F238E27FC236}">
+                <a16:creationId xmlns:a16="http://schemas.microsoft.com/office/drawing/2014/main" id="{469F717A-C89F-4550-9B7B-B8F161D20D3D}"/>
+              </a:ext>
+            </a:extLst>
+          </p:cNvPr>
+          <p:cNvGrpSpPr/>
+          <p:nvPr/>
+        </p:nvGrpSpPr>
+        <p:grpSpPr>
+          <a:xfrm>
+            <a:off x="978625" y="3102109"/>
+            <a:ext cx="688366" cy="625691"/>
+            <a:chOff x="-1026188" y="931423"/>
+            <a:chExt cx="630972" cy="573523"/>
+          </a:xfrm>
+        </p:grpSpPr>
+        <mc:AlternateContent xmlns:mc="http://schemas.openxmlformats.org/markup-compatibility/2006" xmlns:a14="http://schemas.microsoft.com/office/drawing/2010/main">
+          <mc:Choice Requires="a14">
+            <p:sp>
+              <p:nvSpPr>
+                <p:cNvPr id="100" name="文字方塊 99">
+                  <a:extLst>
+                    <a:ext uri="{FF2B5EF4-FFF2-40B4-BE49-F238E27FC236}">
+                      <a16:creationId xmlns:a16="http://schemas.microsoft.com/office/drawing/2014/main" id="{26274BA1-2423-4B88-BF19-FC08EEB0196B}"/>
+                    </a:ext>
+                  </a:extLst>
+                </p:cNvPr>
+                <p:cNvSpPr txBox="1"/>
+                <p:nvPr/>
+              </p:nvSpPr>
+              <p:spPr>
+                <a:xfrm>
+                  <a:off x="-1026188" y="931423"/>
+                  <a:ext cx="323387" cy="335658"/>
+                </a:xfrm>
+                <a:prstGeom prst="rect">
+                  <a:avLst/>
+                </a:prstGeom>
+                <a:noFill/>
+              </p:spPr>
+              <p:txBody>
+                <a:bodyPr wrap="square" rtlCol="0">
+                  <a:spAutoFit/>
+                </a:bodyPr>
+                <a:lstStyle/>
+                <a:p>
+                  <a:pPr/>
+                  <a14:m>
+                    <m:oMathPara xmlns:m="http://schemas.openxmlformats.org/officeDocument/2006/math">
+                      <m:oMathParaPr>
+                        <m:jc m:val="centerGroup"/>
+                      </m:oMathParaPr>
+                      <m:oMath xmlns:m="http://schemas.openxmlformats.org/officeDocument/2006/math">
+                        <m:sSub>
+                          <m:sSubPr>
+                            <m:ctrlPr>
+                              <a:rPr lang="en-US" altLang="zh-TW" sz="1630" b="1" i="1">
+                                <a:latin typeface="Cambria Math" panose="02040503050406030204" pitchFamily="18" charset="0"/>
+                              </a:rPr>
+                            </m:ctrlPr>
+                          </m:sSubPr>
+                          <m:e>
+                            <m:r>
+                              <a:rPr lang="en-US" altLang="zh-TW" sz="1630" b="1" i="1">
+                                <a:latin typeface="Cambria Math" panose="02040503050406030204" pitchFamily="18" charset="0"/>
+                              </a:rPr>
+                              <m:t>𝒒</m:t>
+                            </m:r>
+                          </m:e>
+                          <m:sub>
+                            <m:r>
+                              <a:rPr lang="en-US" altLang="zh-TW" sz="1630" b="1" i="1">
+                                <a:latin typeface="Cambria Math" panose="02040503050406030204" pitchFamily="18" charset="0"/>
+                              </a:rPr>
+                              <m:t>𝒚</m:t>
+                            </m:r>
+                          </m:sub>
+                        </m:sSub>
+                      </m:oMath>
+                    </m:oMathPara>
+                  </a14:m>
+                  <a:endParaRPr lang="en-US" altLang="zh-TW" sz="1630" dirty="0">
+                    <a:latin typeface="Times New Roman" panose="02020603050405020304" pitchFamily="18" charset="0"/>
+                    <a:cs typeface="Times New Roman" panose="02020603050405020304" pitchFamily="18" charset="0"/>
+                  </a:endParaRPr>
+                </a:p>
+              </p:txBody>
+            </p:sp>
+          </mc:Choice>
+          <mc:Fallback xmlns="">
+            <p:sp>
+              <p:nvSpPr>
+                <p:cNvPr id="91" name="文字方塊 90">
+                  <a:extLst>
+                    <a:ext uri="{FF2B5EF4-FFF2-40B4-BE49-F238E27FC236}">
+                      <a16:creationId xmlns:a16="http://schemas.microsoft.com/office/drawing/2014/main" id="{48683BE6-7C91-45D6-99F7-2C602C34D8E5}"/>
+                    </a:ext>
+                  </a:extLst>
+                </p:cNvPr>
+                <p:cNvSpPr txBox="1">
+                  <a:spLocks noRot="1" noChangeAspect="1" noMove="1" noResize="1" noEditPoints="1" noAdjustHandles="1" noChangeArrowheads="1" noChangeShapeType="1" noTextEdit="1"/>
+                </p:cNvSpPr>
+                <p:nvPr/>
+              </p:nvSpPr>
+              <p:spPr>
+                <a:xfrm>
+                  <a:off x="-1026188" y="931423"/>
+                  <a:ext cx="323387" cy="335658"/>
+                </a:xfrm>
+                <a:prstGeom prst="rect">
+                  <a:avLst/>
+                </a:prstGeom>
+                <a:blipFill>
+                  <a:blip r:embed="rId21"/>
+                  <a:stretch>
+                    <a:fillRect r="-3448"/>
                   </a:stretch>
                 </a:blipFill>
               </p:spPr>
@@ -3482,27 +5070,28 @@
           <mc:Choice Requires="a14">
             <p:sp>
               <p:nvSpPr>
-                <p:cNvPr id="49" name="矩形 48">
+                <p:cNvPr id="101" name="文字方塊 100">
                   <a:extLst>
                     <a:ext uri="{FF2B5EF4-FFF2-40B4-BE49-F238E27FC236}">
-                      <a16:creationId xmlns:a16="http://schemas.microsoft.com/office/drawing/2014/main" id="{51EC34B8-B9CA-4030-BE38-C481D6D20ED4}"/>
+                      <a16:creationId xmlns:a16="http://schemas.microsoft.com/office/drawing/2014/main" id="{E26D9775-85BB-4006-B91E-7B673CCCDDE1}"/>
                     </a:ext>
                   </a:extLst>
                 </p:cNvPr>
-                <p:cNvSpPr/>
+                <p:cNvSpPr txBox="1"/>
                 <p:nvPr/>
               </p:nvSpPr>
               <p:spPr>
                 <a:xfrm>
-                  <a:off x="2299252" y="1988665"/>
-                  <a:ext cx="889154" cy="343171"/>
+                  <a:off x="-802135" y="1190388"/>
+                  <a:ext cx="406919" cy="314558"/>
                 </a:xfrm>
                 <a:prstGeom prst="rect">
                   <a:avLst/>
                 </a:prstGeom>
+                <a:noFill/>
               </p:spPr>
               <p:txBody>
-                <a:bodyPr wrap="none">
+                <a:bodyPr wrap="square" rtlCol="0">
                   <a:spAutoFit/>
                 </a:bodyPr>
                 <a:lstStyle/>
@@ -3514,16 +5103,35 @@
                         <m:jc m:val="centerGroup"/>
                       </m:oMathParaPr>
                       <m:oMath xmlns:m="http://schemas.openxmlformats.org/officeDocument/2006/math">
-                        <m:r>
-                          <a:rPr lang="en-US" altLang="zh-TW" sz="1630" i="1">
-                            <a:latin typeface="Cambria Math" panose="02040503050406030204" pitchFamily="18" charset="0"/>
-                          </a:rPr>
-                          <m:t>ℓ=−1</m:t>
-                        </m:r>
+                        <m:sSub>
+                          <m:sSubPr>
+                            <m:ctrlPr>
+                              <a:rPr lang="en-US" altLang="zh-TW" sz="1630" b="1" i="1">
+                                <a:latin typeface="Cambria Math" panose="02040503050406030204" pitchFamily="18" charset="0"/>
+                              </a:rPr>
+                            </m:ctrlPr>
+                          </m:sSubPr>
+                          <m:e>
+                            <m:r>
+                              <a:rPr lang="en-US" altLang="zh-TW" sz="1630" b="1" i="1">
+                                <a:latin typeface="Cambria Math" panose="02040503050406030204" pitchFamily="18" charset="0"/>
+                              </a:rPr>
+                              <m:t>𝒒</m:t>
+                            </m:r>
+                          </m:e>
+                          <m:sub>
+                            <m:r>
+                              <a:rPr lang="en-US" altLang="zh-TW" sz="1630" b="1" i="1">
+                                <a:latin typeface="Cambria Math" panose="02040503050406030204" pitchFamily="18" charset="0"/>
+                              </a:rPr>
+                              <m:t>𝒙</m:t>
+                            </m:r>
+                          </m:sub>
+                        </m:sSub>
                       </m:oMath>
                     </m:oMathPara>
                   </a14:m>
-                  <a:endParaRPr lang="zh-TW" altLang="en-US" sz="1630" dirty="0">
+                  <a:endParaRPr lang="en-US" altLang="zh-TW" sz="1630" dirty="0">
                     <a:latin typeface="Times New Roman" panose="02020603050405020304" pitchFamily="18" charset="0"/>
                     <a:cs typeface="Times New Roman" panose="02020603050405020304" pitchFamily="18" charset="0"/>
                   </a:endParaRPr>
@@ -3534,937 +5142,30 @@
           <mc:Fallback xmlns="">
             <p:sp>
               <p:nvSpPr>
-                <p:cNvPr id="49" name="矩形 48">
+                <p:cNvPr id="92" name="文字方塊 91">
                   <a:extLst>
                     <a:ext uri="{FF2B5EF4-FFF2-40B4-BE49-F238E27FC236}">
-                      <a16:creationId xmlns:a16="http://schemas.microsoft.com/office/drawing/2014/main" id="{51EC34B8-B9CA-4030-BE38-C481D6D20ED4}"/>
+                      <a16:creationId xmlns:a16="http://schemas.microsoft.com/office/drawing/2014/main" id="{9E8963A5-F392-4029-B309-DD9A00CE0887}"/>
                     </a:ext>
                   </a:extLst>
                 </p:cNvPr>
-                <p:cNvSpPr>
+                <p:cNvSpPr txBox="1">
                   <a:spLocks noRot="1" noChangeAspect="1" noMove="1" noResize="1" noEditPoints="1" noAdjustHandles="1" noChangeArrowheads="1" noChangeShapeType="1" noTextEdit="1"/>
                 </p:cNvSpPr>
                 <p:nvPr/>
               </p:nvSpPr>
               <p:spPr>
                 <a:xfrm>
-                  <a:off x="2299252" y="1988665"/>
-                  <a:ext cx="889154" cy="343171"/>
+                  <a:off x="-802135" y="1190388"/>
+                  <a:ext cx="406919" cy="314558"/>
                 </a:xfrm>
                 <a:prstGeom prst="rect">
                   <a:avLst/>
                 </a:prstGeom>
                 <a:blipFill>
-                  <a:blip r:embed="rId7"/>
+                  <a:blip r:embed="rId22"/>
                   <a:stretch>
-                    <a:fillRect/>
-                  </a:stretch>
-                </a:blipFill>
-              </p:spPr>
-              <p:txBody>
-                <a:bodyPr/>
-                <a:lstStyle/>
-                <a:p>
-                  <a:r>
-                    <a:rPr lang="zh-TW" altLang="en-US">
-                      <a:noFill/>
-                    </a:rPr>
-                    <a:t> </a:t>
-                  </a:r>
-                </a:p>
-              </p:txBody>
-            </p:sp>
-          </mc:Fallback>
-        </mc:AlternateContent>
-        <mc:AlternateContent xmlns:mc="http://schemas.openxmlformats.org/markup-compatibility/2006" xmlns:a14="http://schemas.microsoft.com/office/drawing/2010/main">
-          <mc:Choice Requires="a14">
-            <p:sp>
-              <p:nvSpPr>
-                <p:cNvPr id="50" name="矩形 49">
-                  <a:extLst>
-                    <a:ext uri="{FF2B5EF4-FFF2-40B4-BE49-F238E27FC236}">
-                      <a16:creationId xmlns:a16="http://schemas.microsoft.com/office/drawing/2014/main" id="{7626E0B4-7CA2-459D-9601-04C6B32702D5}"/>
-                    </a:ext>
-                  </a:extLst>
-                </p:cNvPr>
-                <p:cNvSpPr/>
-                <p:nvPr/>
-              </p:nvSpPr>
-              <p:spPr>
-                <a:xfrm>
-                  <a:off x="3952225" y="1988665"/>
-                  <a:ext cx="733662" cy="343171"/>
-                </a:xfrm>
-                <a:prstGeom prst="rect">
-                  <a:avLst/>
-                </a:prstGeom>
-              </p:spPr>
-              <p:txBody>
-                <a:bodyPr wrap="none">
-                  <a:spAutoFit/>
-                </a:bodyPr>
-                <a:lstStyle/>
-                <a:p>
-                  <a:pPr/>
-                  <a14:m>
-                    <m:oMathPara xmlns:m="http://schemas.openxmlformats.org/officeDocument/2006/math">
-                      <m:oMathParaPr>
-                        <m:jc m:val="centerGroup"/>
-                      </m:oMathParaPr>
-                      <m:oMath xmlns:m="http://schemas.openxmlformats.org/officeDocument/2006/math">
-                        <m:r>
-                          <a:rPr lang="en-US" altLang="zh-TW" sz="1630" i="1">
-                            <a:latin typeface="Cambria Math" panose="02040503050406030204" pitchFamily="18" charset="0"/>
-                          </a:rPr>
-                          <m:t>ℓ=0</m:t>
-                        </m:r>
-                      </m:oMath>
-                    </m:oMathPara>
-                  </a14:m>
-                  <a:endParaRPr lang="zh-TW" altLang="en-US" sz="1630" dirty="0">
-                    <a:latin typeface="Times New Roman" panose="02020603050405020304" pitchFamily="18" charset="0"/>
-                    <a:cs typeface="Times New Roman" panose="02020603050405020304" pitchFamily="18" charset="0"/>
-                  </a:endParaRPr>
-                </a:p>
-              </p:txBody>
-            </p:sp>
-          </mc:Choice>
-          <mc:Fallback xmlns="">
-            <p:sp>
-              <p:nvSpPr>
-                <p:cNvPr id="50" name="矩形 49">
-                  <a:extLst>
-                    <a:ext uri="{FF2B5EF4-FFF2-40B4-BE49-F238E27FC236}">
-                      <a16:creationId xmlns:a16="http://schemas.microsoft.com/office/drawing/2014/main" id="{7626E0B4-7CA2-459D-9601-04C6B32702D5}"/>
-                    </a:ext>
-                  </a:extLst>
-                </p:cNvPr>
-                <p:cNvSpPr>
-                  <a:spLocks noRot="1" noChangeAspect="1" noMove="1" noResize="1" noEditPoints="1" noAdjustHandles="1" noChangeArrowheads="1" noChangeShapeType="1" noTextEdit="1"/>
-                </p:cNvSpPr>
-                <p:nvPr/>
-              </p:nvSpPr>
-              <p:spPr>
-                <a:xfrm>
-                  <a:off x="3952225" y="1988665"/>
-                  <a:ext cx="733662" cy="343171"/>
-                </a:xfrm>
-                <a:prstGeom prst="rect">
-                  <a:avLst/>
-                </a:prstGeom>
-                <a:blipFill>
-                  <a:blip r:embed="rId8"/>
-                  <a:stretch>
-                    <a:fillRect/>
-                  </a:stretch>
-                </a:blipFill>
-              </p:spPr>
-              <p:txBody>
-                <a:bodyPr/>
-                <a:lstStyle/>
-                <a:p>
-                  <a:r>
-                    <a:rPr lang="zh-TW" altLang="en-US">
-                      <a:noFill/>
-                    </a:rPr>
-                    <a:t> </a:t>
-                  </a:r>
-                </a:p>
-              </p:txBody>
-            </p:sp>
-          </mc:Fallback>
-        </mc:AlternateContent>
-        <mc:AlternateContent xmlns:mc="http://schemas.openxmlformats.org/markup-compatibility/2006" xmlns:a14="http://schemas.microsoft.com/office/drawing/2010/main">
-          <mc:Choice Requires="a14">
-            <p:sp>
-              <p:nvSpPr>
-                <p:cNvPr id="51" name="矩形 50">
-                  <a:extLst>
-                    <a:ext uri="{FF2B5EF4-FFF2-40B4-BE49-F238E27FC236}">
-                      <a16:creationId xmlns:a16="http://schemas.microsoft.com/office/drawing/2014/main" id="{3F6CE0F2-6D19-4E6C-95F4-5A1A19791875}"/>
-                    </a:ext>
-                  </a:extLst>
-                </p:cNvPr>
-                <p:cNvSpPr/>
-                <p:nvPr/>
-              </p:nvSpPr>
-              <p:spPr>
-                <a:xfrm>
-                  <a:off x="5708326" y="1988665"/>
-                  <a:ext cx="733662" cy="343171"/>
-                </a:xfrm>
-                <a:prstGeom prst="rect">
-                  <a:avLst/>
-                </a:prstGeom>
-              </p:spPr>
-              <p:txBody>
-                <a:bodyPr wrap="none">
-                  <a:spAutoFit/>
-                </a:bodyPr>
-                <a:lstStyle/>
-                <a:p>
-                  <a:pPr/>
-                  <a14:m>
-                    <m:oMathPara xmlns:m="http://schemas.openxmlformats.org/officeDocument/2006/math">
-                      <m:oMathParaPr>
-                        <m:jc m:val="centerGroup"/>
-                      </m:oMathParaPr>
-                      <m:oMath xmlns:m="http://schemas.openxmlformats.org/officeDocument/2006/math">
-                        <m:r>
-                          <a:rPr lang="en-US" altLang="zh-TW" sz="1630" i="1">
-                            <a:latin typeface="Cambria Math" panose="02040503050406030204" pitchFamily="18" charset="0"/>
-                          </a:rPr>
-                          <m:t>ℓ=1</m:t>
-                        </m:r>
-                      </m:oMath>
-                    </m:oMathPara>
-                  </a14:m>
-                  <a:endParaRPr lang="zh-TW" altLang="en-US" sz="1630" dirty="0">
-                    <a:latin typeface="Times New Roman" panose="02020603050405020304" pitchFamily="18" charset="0"/>
-                    <a:cs typeface="Times New Roman" panose="02020603050405020304" pitchFamily="18" charset="0"/>
-                  </a:endParaRPr>
-                </a:p>
-              </p:txBody>
-            </p:sp>
-          </mc:Choice>
-          <mc:Fallback xmlns="">
-            <p:sp>
-              <p:nvSpPr>
-                <p:cNvPr id="51" name="矩形 50">
-                  <a:extLst>
-                    <a:ext uri="{FF2B5EF4-FFF2-40B4-BE49-F238E27FC236}">
-                      <a16:creationId xmlns:a16="http://schemas.microsoft.com/office/drawing/2014/main" id="{3F6CE0F2-6D19-4E6C-95F4-5A1A19791875}"/>
-                    </a:ext>
-                  </a:extLst>
-                </p:cNvPr>
-                <p:cNvSpPr>
-                  <a:spLocks noRot="1" noChangeAspect="1" noMove="1" noResize="1" noEditPoints="1" noAdjustHandles="1" noChangeArrowheads="1" noChangeShapeType="1" noTextEdit="1"/>
-                </p:cNvSpPr>
-                <p:nvPr/>
-              </p:nvSpPr>
-              <p:spPr>
-                <a:xfrm>
-                  <a:off x="5708326" y="1988665"/>
-                  <a:ext cx="733662" cy="343171"/>
-                </a:xfrm>
-                <a:prstGeom prst="rect">
-                  <a:avLst/>
-                </a:prstGeom>
-                <a:blipFill>
-                  <a:blip r:embed="rId9"/>
-                  <a:stretch>
-                    <a:fillRect/>
-                  </a:stretch>
-                </a:blipFill>
-              </p:spPr>
-              <p:txBody>
-                <a:bodyPr/>
-                <a:lstStyle/>
-                <a:p>
-                  <a:r>
-                    <a:rPr lang="zh-TW" altLang="en-US">
-                      <a:noFill/>
-                    </a:rPr>
-                    <a:t> </a:t>
-                  </a:r>
-                </a:p>
-              </p:txBody>
-            </p:sp>
-          </mc:Fallback>
-        </mc:AlternateContent>
-        <mc:AlternateContent xmlns:mc="http://schemas.openxmlformats.org/markup-compatibility/2006" xmlns:a14="http://schemas.microsoft.com/office/drawing/2010/main">
-          <mc:Choice Requires="a14">
-            <p:sp>
-              <p:nvSpPr>
-                <p:cNvPr id="52" name="矩形 51">
-                  <a:extLst>
-                    <a:ext uri="{FF2B5EF4-FFF2-40B4-BE49-F238E27FC236}">
-                      <a16:creationId xmlns:a16="http://schemas.microsoft.com/office/drawing/2014/main" id="{0F4F07AD-DE02-4748-8EF5-507C2941CFC8}"/>
-                    </a:ext>
-                  </a:extLst>
-                </p:cNvPr>
-                <p:cNvSpPr/>
-                <p:nvPr/>
-              </p:nvSpPr>
-              <p:spPr>
-                <a:xfrm>
-                  <a:off x="7335117" y="1988665"/>
-                  <a:ext cx="733662" cy="343171"/>
-                </a:xfrm>
-                <a:prstGeom prst="rect">
-                  <a:avLst/>
-                </a:prstGeom>
-              </p:spPr>
-              <p:txBody>
-                <a:bodyPr wrap="none">
-                  <a:spAutoFit/>
-                </a:bodyPr>
-                <a:lstStyle/>
-                <a:p>
-                  <a:pPr/>
-                  <a14:m>
-                    <m:oMathPara xmlns:m="http://schemas.openxmlformats.org/officeDocument/2006/math">
-                      <m:oMathParaPr>
-                        <m:jc m:val="centerGroup"/>
-                      </m:oMathParaPr>
-                      <m:oMath xmlns:m="http://schemas.openxmlformats.org/officeDocument/2006/math">
-                        <m:r>
-                          <a:rPr lang="en-US" altLang="zh-TW" sz="1630" i="1">
-                            <a:latin typeface="Cambria Math" panose="02040503050406030204" pitchFamily="18" charset="0"/>
-                          </a:rPr>
-                          <m:t>ℓ=2</m:t>
-                        </m:r>
-                      </m:oMath>
-                    </m:oMathPara>
-                  </a14:m>
-                  <a:endParaRPr lang="zh-TW" altLang="en-US" sz="1630" dirty="0">
-                    <a:latin typeface="Times New Roman" panose="02020603050405020304" pitchFamily="18" charset="0"/>
-                    <a:cs typeface="Times New Roman" panose="02020603050405020304" pitchFamily="18" charset="0"/>
-                  </a:endParaRPr>
-                </a:p>
-              </p:txBody>
-            </p:sp>
-          </mc:Choice>
-          <mc:Fallback xmlns="">
-            <p:sp>
-              <p:nvSpPr>
-                <p:cNvPr id="52" name="矩形 51">
-                  <a:extLst>
-                    <a:ext uri="{FF2B5EF4-FFF2-40B4-BE49-F238E27FC236}">
-                      <a16:creationId xmlns:a16="http://schemas.microsoft.com/office/drawing/2014/main" id="{0F4F07AD-DE02-4748-8EF5-507C2941CFC8}"/>
-                    </a:ext>
-                  </a:extLst>
-                </p:cNvPr>
-                <p:cNvSpPr>
-                  <a:spLocks noRot="1" noChangeAspect="1" noMove="1" noResize="1" noEditPoints="1" noAdjustHandles="1" noChangeArrowheads="1" noChangeShapeType="1" noTextEdit="1"/>
-                </p:cNvSpPr>
-                <p:nvPr/>
-              </p:nvSpPr>
-              <p:spPr>
-                <a:xfrm>
-                  <a:off x="7335117" y="1988665"/>
-                  <a:ext cx="733662" cy="343171"/>
-                </a:xfrm>
-                <a:prstGeom prst="rect">
-                  <a:avLst/>
-                </a:prstGeom>
-                <a:blipFill>
-                  <a:blip r:embed="rId10"/>
-                  <a:stretch>
-                    <a:fillRect/>
-                  </a:stretch>
-                </a:blipFill>
-              </p:spPr>
-              <p:txBody>
-                <a:bodyPr/>
-                <a:lstStyle/>
-                <a:p>
-                  <a:r>
-                    <a:rPr lang="zh-TW" altLang="en-US">
-                      <a:noFill/>
-                    </a:rPr>
-                    <a:t> </a:t>
-                  </a:r>
-                </a:p>
-              </p:txBody>
-            </p:sp>
-          </mc:Fallback>
-        </mc:AlternateContent>
-        <mc:AlternateContent xmlns:mc="http://schemas.openxmlformats.org/markup-compatibility/2006" xmlns:a14="http://schemas.microsoft.com/office/drawing/2010/main">
-          <mc:Choice Requires="a14">
-            <p:sp>
-              <p:nvSpPr>
-                <p:cNvPr id="53" name="矩形 52">
-                  <a:extLst>
-                    <a:ext uri="{FF2B5EF4-FFF2-40B4-BE49-F238E27FC236}">
-                      <a16:creationId xmlns:a16="http://schemas.microsoft.com/office/drawing/2014/main" id="{D8163A59-21D2-4AEC-A55C-42C7FC0D3453}"/>
-                    </a:ext>
-                  </a:extLst>
-                </p:cNvPr>
-                <p:cNvSpPr/>
-                <p:nvPr/>
-              </p:nvSpPr>
-              <p:spPr>
-                <a:xfrm>
-                  <a:off x="459584" y="3930235"/>
-                  <a:ext cx="783035" cy="343171"/>
-                </a:xfrm>
-                <a:prstGeom prst="rect">
-                  <a:avLst/>
-                </a:prstGeom>
-              </p:spPr>
-              <p:txBody>
-                <a:bodyPr wrap="none">
-                  <a:spAutoFit/>
-                </a:bodyPr>
-                <a:lstStyle/>
-                <a:p>
-                  <a:pPr/>
-                  <a14:m>
-                    <m:oMathPara xmlns:m="http://schemas.openxmlformats.org/officeDocument/2006/math">
-                      <m:oMathParaPr>
-                        <m:jc m:val="centerGroup"/>
-                      </m:oMathParaPr>
-                      <m:oMath xmlns:m="http://schemas.openxmlformats.org/officeDocument/2006/math">
-                        <m:r>
-                          <a:rPr lang="en-US" altLang="zh-TW" sz="1630" i="1">
-                            <a:latin typeface="Cambria Math" panose="02040503050406030204" pitchFamily="18" charset="0"/>
-                          </a:rPr>
-                          <m:t>0.1 </m:t>
-                        </m:r>
-                        <m:sSub>
-                          <m:sSubPr>
-                            <m:ctrlPr>
-                              <a:rPr lang="en-US" altLang="zh-TW" sz="1630" i="1">
-                                <a:latin typeface="Cambria Math" panose="02040503050406030204" pitchFamily="18" charset="0"/>
-                              </a:rPr>
-                            </m:ctrlPr>
-                          </m:sSubPr>
-                          <m:e>
-                            <m:r>
-                              <a:rPr lang="en-US" altLang="zh-TW" sz="1630" i="1">
-                                <a:latin typeface="Cambria Math" panose="02040503050406030204" pitchFamily="18" charset="0"/>
-                              </a:rPr>
-                              <m:t>𝑄</m:t>
-                            </m:r>
-                          </m:e>
-                          <m:sub>
-                            <m:r>
-                              <a:rPr lang="en-US" altLang="zh-TW" sz="1630" i="1">
-                                <a:latin typeface="Cambria Math" panose="02040503050406030204" pitchFamily="18" charset="0"/>
-                              </a:rPr>
-                              <m:t>𝑐</m:t>
-                            </m:r>
-                          </m:sub>
-                        </m:sSub>
-                      </m:oMath>
-                    </m:oMathPara>
-                  </a14:m>
-                  <a:endParaRPr lang="zh-TW" altLang="en-US" sz="1630" dirty="0">
-                    <a:latin typeface="Times New Roman" panose="02020603050405020304" pitchFamily="18" charset="0"/>
-                    <a:cs typeface="Times New Roman" panose="02020603050405020304" pitchFamily="18" charset="0"/>
-                  </a:endParaRPr>
-                </a:p>
-              </p:txBody>
-            </p:sp>
-          </mc:Choice>
-          <mc:Fallback xmlns="">
-            <p:sp>
-              <p:nvSpPr>
-                <p:cNvPr id="53" name="矩形 52">
-                  <a:extLst>
-                    <a:ext uri="{FF2B5EF4-FFF2-40B4-BE49-F238E27FC236}">
-                      <a16:creationId xmlns:a16="http://schemas.microsoft.com/office/drawing/2014/main" id="{D8163A59-21D2-4AEC-A55C-42C7FC0D3453}"/>
-                    </a:ext>
-                  </a:extLst>
-                </p:cNvPr>
-                <p:cNvSpPr>
-                  <a:spLocks noRot="1" noChangeAspect="1" noMove="1" noResize="1" noEditPoints="1" noAdjustHandles="1" noChangeArrowheads="1" noChangeShapeType="1" noTextEdit="1"/>
-                </p:cNvSpPr>
-                <p:nvPr/>
-              </p:nvSpPr>
-              <p:spPr>
-                <a:xfrm>
-                  <a:off x="459584" y="3930235"/>
-                  <a:ext cx="783035" cy="343171"/>
-                </a:xfrm>
-                <a:prstGeom prst="rect">
-                  <a:avLst/>
-                </a:prstGeom>
-                <a:blipFill>
-                  <a:blip r:embed="rId11"/>
-                  <a:stretch>
-                    <a:fillRect b="-8929"/>
-                  </a:stretch>
-                </a:blipFill>
-              </p:spPr>
-              <p:txBody>
-                <a:bodyPr/>
-                <a:lstStyle/>
-                <a:p>
-                  <a:r>
-                    <a:rPr lang="zh-TW" altLang="en-US">
-                      <a:noFill/>
-                    </a:rPr>
-                    <a:t> </a:t>
-                  </a:r>
-                </a:p>
-              </p:txBody>
-            </p:sp>
-          </mc:Fallback>
-        </mc:AlternateContent>
-        <mc:AlternateContent xmlns:mc="http://schemas.openxmlformats.org/markup-compatibility/2006" xmlns:a14="http://schemas.microsoft.com/office/drawing/2010/main">
-          <mc:Choice Requires="a14">
-            <p:sp>
-              <p:nvSpPr>
-                <p:cNvPr id="54" name="矩形 53">
-                  <a:extLst>
-                    <a:ext uri="{FF2B5EF4-FFF2-40B4-BE49-F238E27FC236}">
-                      <a16:creationId xmlns:a16="http://schemas.microsoft.com/office/drawing/2014/main" id="{998758AE-B7B5-4A39-8A8A-9C4CDF0D9BF9}"/>
-                    </a:ext>
-                  </a:extLst>
-                </p:cNvPr>
-                <p:cNvSpPr/>
-                <p:nvPr/>
-              </p:nvSpPr>
-              <p:spPr>
-                <a:xfrm>
-                  <a:off x="516969" y="4252226"/>
-                  <a:ext cx="889154" cy="343171"/>
-                </a:xfrm>
-                <a:prstGeom prst="rect">
-                  <a:avLst/>
-                </a:prstGeom>
-              </p:spPr>
-              <p:txBody>
-                <a:bodyPr wrap="none">
-                  <a:spAutoFit/>
-                </a:bodyPr>
-                <a:lstStyle/>
-                <a:p>
-                  <a:pPr/>
-                  <a14:m>
-                    <m:oMathPara xmlns:m="http://schemas.openxmlformats.org/officeDocument/2006/math">
-                      <m:oMathParaPr>
-                        <m:jc m:val="centerGroup"/>
-                      </m:oMathParaPr>
-                      <m:oMath xmlns:m="http://schemas.openxmlformats.org/officeDocument/2006/math">
-                        <m:r>
-                          <a:rPr lang="en-US" altLang="zh-TW" sz="1630" i="1">
-                            <a:latin typeface="Cambria Math" panose="02040503050406030204" pitchFamily="18" charset="0"/>
-                          </a:rPr>
-                          <m:t>ℓ=−2</m:t>
-                        </m:r>
-                      </m:oMath>
-                    </m:oMathPara>
-                  </a14:m>
-                  <a:endParaRPr lang="zh-TW" altLang="en-US" sz="1630" dirty="0">
-                    <a:latin typeface="Times New Roman" panose="02020603050405020304" pitchFamily="18" charset="0"/>
-                    <a:cs typeface="Times New Roman" panose="02020603050405020304" pitchFamily="18" charset="0"/>
-                  </a:endParaRPr>
-                </a:p>
-              </p:txBody>
-            </p:sp>
-          </mc:Choice>
-          <mc:Fallback xmlns="">
-            <p:sp>
-              <p:nvSpPr>
-                <p:cNvPr id="54" name="矩形 53">
-                  <a:extLst>
-                    <a:ext uri="{FF2B5EF4-FFF2-40B4-BE49-F238E27FC236}">
-                      <a16:creationId xmlns:a16="http://schemas.microsoft.com/office/drawing/2014/main" id="{998758AE-B7B5-4A39-8A8A-9C4CDF0D9BF9}"/>
-                    </a:ext>
-                  </a:extLst>
-                </p:cNvPr>
-                <p:cNvSpPr>
-                  <a:spLocks noRot="1" noChangeAspect="1" noMove="1" noResize="1" noEditPoints="1" noAdjustHandles="1" noChangeArrowheads="1" noChangeShapeType="1" noTextEdit="1"/>
-                </p:cNvSpPr>
-                <p:nvPr/>
-              </p:nvSpPr>
-              <p:spPr>
-                <a:xfrm>
-                  <a:off x="516969" y="4252226"/>
-                  <a:ext cx="889154" cy="343171"/>
-                </a:xfrm>
-                <a:prstGeom prst="rect">
-                  <a:avLst/>
-                </a:prstGeom>
-                <a:blipFill>
-                  <a:blip r:embed="rId12"/>
-                  <a:stretch>
-                    <a:fillRect/>
-                  </a:stretch>
-                </a:blipFill>
-              </p:spPr>
-              <p:txBody>
-                <a:bodyPr/>
-                <a:lstStyle/>
-                <a:p>
-                  <a:r>
-                    <a:rPr lang="zh-TW" altLang="en-US">
-                      <a:noFill/>
-                    </a:rPr>
-                    <a:t> </a:t>
-                  </a:r>
-                </a:p>
-              </p:txBody>
-            </p:sp>
-          </mc:Fallback>
-        </mc:AlternateContent>
-        <mc:AlternateContent xmlns:mc="http://schemas.openxmlformats.org/markup-compatibility/2006" xmlns:a14="http://schemas.microsoft.com/office/drawing/2010/main">
-          <mc:Choice Requires="a14">
-            <p:sp>
-              <p:nvSpPr>
-                <p:cNvPr id="56" name="矩形 55">
-                  <a:extLst>
-                    <a:ext uri="{FF2B5EF4-FFF2-40B4-BE49-F238E27FC236}">
-                      <a16:creationId xmlns:a16="http://schemas.microsoft.com/office/drawing/2014/main" id="{98783FC7-C31A-4177-B406-4D671DA17729}"/>
-                    </a:ext>
-                  </a:extLst>
-                </p:cNvPr>
-                <p:cNvSpPr/>
-                <p:nvPr/>
-              </p:nvSpPr>
-              <p:spPr>
-                <a:xfrm>
-                  <a:off x="2299252" y="4252227"/>
-                  <a:ext cx="889154" cy="343171"/>
-                </a:xfrm>
-                <a:prstGeom prst="rect">
-                  <a:avLst/>
-                </a:prstGeom>
-              </p:spPr>
-              <p:txBody>
-                <a:bodyPr wrap="none">
-                  <a:spAutoFit/>
-                </a:bodyPr>
-                <a:lstStyle/>
-                <a:p>
-                  <a:pPr/>
-                  <a14:m>
-                    <m:oMathPara xmlns:m="http://schemas.openxmlformats.org/officeDocument/2006/math">
-                      <m:oMathParaPr>
-                        <m:jc m:val="centerGroup"/>
-                      </m:oMathParaPr>
-                      <m:oMath xmlns:m="http://schemas.openxmlformats.org/officeDocument/2006/math">
-                        <m:r>
-                          <a:rPr lang="en-US" altLang="zh-TW" sz="1630" i="1">
-                            <a:latin typeface="Cambria Math" panose="02040503050406030204" pitchFamily="18" charset="0"/>
-                          </a:rPr>
-                          <m:t>ℓ=−1</m:t>
-                        </m:r>
-                      </m:oMath>
-                    </m:oMathPara>
-                  </a14:m>
-                  <a:endParaRPr lang="zh-TW" altLang="en-US" sz="1630" dirty="0">
-                    <a:latin typeface="Times New Roman" panose="02020603050405020304" pitchFamily="18" charset="0"/>
-                    <a:cs typeface="Times New Roman" panose="02020603050405020304" pitchFamily="18" charset="0"/>
-                  </a:endParaRPr>
-                </a:p>
-              </p:txBody>
-            </p:sp>
-          </mc:Choice>
-          <mc:Fallback xmlns="">
-            <p:sp>
-              <p:nvSpPr>
-                <p:cNvPr id="56" name="矩形 55">
-                  <a:extLst>
-                    <a:ext uri="{FF2B5EF4-FFF2-40B4-BE49-F238E27FC236}">
-                      <a16:creationId xmlns:a16="http://schemas.microsoft.com/office/drawing/2014/main" id="{98783FC7-C31A-4177-B406-4D671DA17729}"/>
-                    </a:ext>
-                  </a:extLst>
-                </p:cNvPr>
-                <p:cNvSpPr>
-                  <a:spLocks noRot="1" noChangeAspect="1" noMove="1" noResize="1" noEditPoints="1" noAdjustHandles="1" noChangeArrowheads="1" noChangeShapeType="1" noTextEdit="1"/>
-                </p:cNvSpPr>
-                <p:nvPr/>
-              </p:nvSpPr>
-              <p:spPr>
-                <a:xfrm>
-                  <a:off x="2299252" y="4252227"/>
-                  <a:ext cx="889154" cy="343171"/>
-                </a:xfrm>
-                <a:prstGeom prst="rect">
-                  <a:avLst/>
-                </a:prstGeom>
-                <a:blipFill>
-                  <a:blip r:embed="rId13"/>
-                  <a:stretch>
-                    <a:fillRect/>
-                  </a:stretch>
-                </a:blipFill>
-              </p:spPr>
-              <p:txBody>
-                <a:bodyPr/>
-                <a:lstStyle/>
-                <a:p>
-                  <a:r>
-                    <a:rPr lang="zh-TW" altLang="en-US">
-                      <a:noFill/>
-                    </a:rPr>
-                    <a:t> </a:t>
-                  </a:r>
-                </a:p>
-              </p:txBody>
-            </p:sp>
-          </mc:Fallback>
-        </mc:AlternateContent>
-        <mc:AlternateContent xmlns:mc="http://schemas.openxmlformats.org/markup-compatibility/2006" xmlns:a14="http://schemas.microsoft.com/office/drawing/2010/main">
-          <mc:Choice Requires="a14">
-            <p:sp>
-              <p:nvSpPr>
-                <p:cNvPr id="57" name="矩形 56">
-                  <a:extLst>
-                    <a:ext uri="{FF2B5EF4-FFF2-40B4-BE49-F238E27FC236}">
-                      <a16:creationId xmlns:a16="http://schemas.microsoft.com/office/drawing/2014/main" id="{37D72A01-C052-4820-BBED-D2187CB98E18}"/>
-                    </a:ext>
-                  </a:extLst>
-                </p:cNvPr>
-                <p:cNvSpPr/>
-                <p:nvPr/>
-              </p:nvSpPr>
-              <p:spPr>
-                <a:xfrm>
-                  <a:off x="3952225" y="4252227"/>
-                  <a:ext cx="733662" cy="343171"/>
-                </a:xfrm>
-                <a:prstGeom prst="rect">
-                  <a:avLst/>
-                </a:prstGeom>
-              </p:spPr>
-              <p:txBody>
-                <a:bodyPr wrap="none">
-                  <a:spAutoFit/>
-                </a:bodyPr>
-                <a:lstStyle/>
-                <a:p>
-                  <a:pPr/>
-                  <a14:m>
-                    <m:oMathPara xmlns:m="http://schemas.openxmlformats.org/officeDocument/2006/math">
-                      <m:oMathParaPr>
-                        <m:jc m:val="centerGroup"/>
-                      </m:oMathParaPr>
-                      <m:oMath xmlns:m="http://schemas.openxmlformats.org/officeDocument/2006/math">
-                        <m:r>
-                          <a:rPr lang="en-US" altLang="zh-TW" sz="1630" i="1">
-                            <a:latin typeface="Cambria Math" panose="02040503050406030204" pitchFamily="18" charset="0"/>
-                          </a:rPr>
-                          <m:t>ℓ=0</m:t>
-                        </m:r>
-                      </m:oMath>
-                    </m:oMathPara>
-                  </a14:m>
-                  <a:endParaRPr lang="zh-TW" altLang="en-US" sz="1630" dirty="0">
-                    <a:latin typeface="Times New Roman" panose="02020603050405020304" pitchFamily="18" charset="0"/>
-                    <a:cs typeface="Times New Roman" panose="02020603050405020304" pitchFamily="18" charset="0"/>
-                  </a:endParaRPr>
-                </a:p>
-              </p:txBody>
-            </p:sp>
-          </mc:Choice>
-          <mc:Fallback xmlns="">
-            <p:sp>
-              <p:nvSpPr>
-                <p:cNvPr id="57" name="矩形 56">
-                  <a:extLst>
-                    <a:ext uri="{FF2B5EF4-FFF2-40B4-BE49-F238E27FC236}">
-                      <a16:creationId xmlns:a16="http://schemas.microsoft.com/office/drawing/2014/main" id="{37D72A01-C052-4820-BBED-D2187CB98E18}"/>
-                    </a:ext>
-                  </a:extLst>
-                </p:cNvPr>
-                <p:cNvSpPr>
-                  <a:spLocks noRot="1" noChangeAspect="1" noMove="1" noResize="1" noEditPoints="1" noAdjustHandles="1" noChangeArrowheads="1" noChangeShapeType="1" noTextEdit="1"/>
-                </p:cNvSpPr>
-                <p:nvPr/>
-              </p:nvSpPr>
-              <p:spPr>
-                <a:xfrm>
-                  <a:off x="3952225" y="4252227"/>
-                  <a:ext cx="733662" cy="343171"/>
-                </a:xfrm>
-                <a:prstGeom prst="rect">
-                  <a:avLst/>
-                </a:prstGeom>
-                <a:blipFill>
-                  <a:blip r:embed="rId14"/>
-                  <a:stretch>
-                    <a:fillRect/>
-                  </a:stretch>
-                </a:blipFill>
-              </p:spPr>
-              <p:txBody>
-                <a:bodyPr/>
-                <a:lstStyle/>
-                <a:p>
-                  <a:r>
-                    <a:rPr lang="zh-TW" altLang="en-US">
-                      <a:noFill/>
-                    </a:rPr>
-                    <a:t> </a:t>
-                  </a:r>
-                </a:p>
-              </p:txBody>
-            </p:sp>
-          </mc:Fallback>
-        </mc:AlternateContent>
-        <mc:AlternateContent xmlns:mc="http://schemas.openxmlformats.org/markup-compatibility/2006" xmlns:a14="http://schemas.microsoft.com/office/drawing/2010/main">
-          <mc:Choice Requires="a14">
-            <p:sp>
-              <p:nvSpPr>
-                <p:cNvPr id="82" name="矩形 81">
-                  <a:extLst>
-                    <a:ext uri="{FF2B5EF4-FFF2-40B4-BE49-F238E27FC236}">
-                      <a16:creationId xmlns:a16="http://schemas.microsoft.com/office/drawing/2014/main" id="{990EE664-F023-4537-B835-620C68FC83B8}"/>
-                    </a:ext>
-                  </a:extLst>
-                </p:cNvPr>
-                <p:cNvSpPr/>
-                <p:nvPr/>
-              </p:nvSpPr>
-              <p:spPr>
-                <a:xfrm>
-                  <a:off x="5708326" y="4252227"/>
-                  <a:ext cx="733662" cy="343171"/>
-                </a:xfrm>
-                <a:prstGeom prst="rect">
-                  <a:avLst/>
-                </a:prstGeom>
-              </p:spPr>
-              <p:txBody>
-                <a:bodyPr wrap="none">
-                  <a:spAutoFit/>
-                </a:bodyPr>
-                <a:lstStyle/>
-                <a:p>
-                  <a:pPr/>
-                  <a14:m>
-                    <m:oMathPara xmlns:m="http://schemas.openxmlformats.org/officeDocument/2006/math">
-                      <m:oMathParaPr>
-                        <m:jc m:val="centerGroup"/>
-                      </m:oMathParaPr>
-                      <m:oMath xmlns:m="http://schemas.openxmlformats.org/officeDocument/2006/math">
-                        <m:r>
-                          <a:rPr lang="en-US" altLang="zh-TW" sz="1630" i="1">
-                            <a:latin typeface="Cambria Math" panose="02040503050406030204" pitchFamily="18" charset="0"/>
-                          </a:rPr>
-                          <m:t>ℓ=1</m:t>
-                        </m:r>
-                      </m:oMath>
-                    </m:oMathPara>
-                  </a14:m>
-                  <a:endParaRPr lang="zh-TW" altLang="en-US" sz="1630" dirty="0">
-                    <a:latin typeface="Times New Roman" panose="02020603050405020304" pitchFamily="18" charset="0"/>
-                    <a:cs typeface="Times New Roman" panose="02020603050405020304" pitchFamily="18" charset="0"/>
-                  </a:endParaRPr>
-                </a:p>
-              </p:txBody>
-            </p:sp>
-          </mc:Choice>
-          <mc:Fallback xmlns="">
-            <p:sp>
-              <p:nvSpPr>
-                <p:cNvPr id="82" name="矩形 81">
-                  <a:extLst>
-                    <a:ext uri="{FF2B5EF4-FFF2-40B4-BE49-F238E27FC236}">
-                      <a16:creationId xmlns:a16="http://schemas.microsoft.com/office/drawing/2014/main" id="{990EE664-F023-4537-B835-620C68FC83B8}"/>
-                    </a:ext>
-                  </a:extLst>
-                </p:cNvPr>
-                <p:cNvSpPr>
-                  <a:spLocks noRot="1" noChangeAspect="1" noMove="1" noResize="1" noEditPoints="1" noAdjustHandles="1" noChangeArrowheads="1" noChangeShapeType="1" noTextEdit="1"/>
-                </p:cNvSpPr>
-                <p:nvPr/>
-              </p:nvSpPr>
-              <p:spPr>
-                <a:xfrm>
-                  <a:off x="5708326" y="4252227"/>
-                  <a:ext cx="733662" cy="343171"/>
-                </a:xfrm>
-                <a:prstGeom prst="rect">
-                  <a:avLst/>
-                </a:prstGeom>
-                <a:blipFill>
-                  <a:blip r:embed="rId15"/>
-                  <a:stretch>
-                    <a:fillRect/>
-                  </a:stretch>
-                </a:blipFill>
-              </p:spPr>
-              <p:txBody>
-                <a:bodyPr/>
-                <a:lstStyle/>
-                <a:p>
-                  <a:r>
-                    <a:rPr lang="zh-TW" altLang="en-US">
-                      <a:noFill/>
-                    </a:rPr>
-                    <a:t> </a:t>
-                  </a:r>
-                </a:p>
-              </p:txBody>
-            </p:sp>
-          </mc:Fallback>
-        </mc:AlternateContent>
-        <mc:AlternateContent xmlns:mc="http://schemas.openxmlformats.org/markup-compatibility/2006" xmlns:a14="http://schemas.microsoft.com/office/drawing/2010/main">
-          <mc:Choice Requires="a14">
-            <p:sp>
-              <p:nvSpPr>
-                <p:cNvPr id="83" name="矩形 82">
-                  <a:extLst>
-                    <a:ext uri="{FF2B5EF4-FFF2-40B4-BE49-F238E27FC236}">
-                      <a16:creationId xmlns:a16="http://schemas.microsoft.com/office/drawing/2014/main" id="{A9E16470-7720-49A3-9DC9-3F0C741E2468}"/>
-                    </a:ext>
-                  </a:extLst>
-                </p:cNvPr>
-                <p:cNvSpPr/>
-                <p:nvPr/>
-              </p:nvSpPr>
-              <p:spPr>
-                <a:xfrm>
-                  <a:off x="7335117" y="4252227"/>
-                  <a:ext cx="733662" cy="343171"/>
-                </a:xfrm>
-                <a:prstGeom prst="rect">
-                  <a:avLst/>
-                </a:prstGeom>
-              </p:spPr>
-              <p:txBody>
-                <a:bodyPr wrap="none">
-                  <a:spAutoFit/>
-                </a:bodyPr>
-                <a:lstStyle/>
-                <a:p>
-                  <a:pPr/>
-                  <a14:m>
-                    <m:oMathPara xmlns:m="http://schemas.openxmlformats.org/officeDocument/2006/math">
-                      <m:oMathParaPr>
-                        <m:jc m:val="centerGroup"/>
-                      </m:oMathParaPr>
-                      <m:oMath xmlns:m="http://schemas.openxmlformats.org/officeDocument/2006/math">
-                        <m:r>
-                          <a:rPr lang="en-US" altLang="zh-TW" sz="1630" i="1">
-                            <a:latin typeface="Cambria Math" panose="02040503050406030204" pitchFamily="18" charset="0"/>
-                          </a:rPr>
-                          <m:t>ℓ=2</m:t>
-                        </m:r>
-                      </m:oMath>
-                    </m:oMathPara>
-                  </a14:m>
-                  <a:endParaRPr lang="zh-TW" altLang="en-US" sz="1630" dirty="0">
-                    <a:latin typeface="Times New Roman" panose="02020603050405020304" pitchFamily="18" charset="0"/>
-                    <a:cs typeface="Times New Roman" panose="02020603050405020304" pitchFamily="18" charset="0"/>
-                  </a:endParaRPr>
-                </a:p>
-              </p:txBody>
-            </p:sp>
-          </mc:Choice>
-          <mc:Fallback xmlns="">
-            <p:sp>
-              <p:nvSpPr>
-                <p:cNvPr id="83" name="矩形 82">
-                  <a:extLst>
-                    <a:ext uri="{FF2B5EF4-FFF2-40B4-BE49-F238E27FC236}">
-                      <a16:creationId xmlns:a16="http://schemas.microsoft.com/office/drawing/2014/main" id="{A9E16470-7720-49A3-9DC9-3F0C741E2468}"/>
-                    </a:ext>
-                  </a:extLst>
-                </p:cNvPr>
-                <p:cNvSpPr>
-                  <a:spLocks noRot="1" noChangeAspect="1" noMove="1" noResize="1" noEditPoints="1" noAdjustHandles="1" noChangeArrowheads="1" noChangeShapeType="1" noTextEdit="1"/>
-                </p:cNvSpPr>
-                <p:nvPr/>
-              </p:nvSpPr>
-              <p:spPr>
-                <a:xfrm>
-                  <a:off x="7335117" y="4252227"/>
-                  <a:ext cx="733662" cy="343171"/>
-                </a:xfrm>
-                <a:prstGeom prst="rect">
-                  <a:avLst/>
-                </a:prstGeom>
-                <a:blipFill>
-                  <a:blip r:embed="rId16"/>
-                  <a:stretch>
-                    <a:fillRect/>
+                    <a:fillRect b="-5263"/>
                   </a:stretch>
                 </a:blipFill>
               </p:spPr>
@@ -4485,10 +5186,10 @@
         </mc:AlternateContent>
         <p:sp>
           <p:nvSpPr>
-            <p:cNvPr id="84" name="矩形 83">
+            <p:cNvPr id="102" name="箭號: 向右 101">
               <a:extLst>
                 <a:ext uri="{FF2B5EF4-FFF2-40B4-BE49-F238E27FC236}">
-                  <a16:creationId xmlns:a16="http://schemas.microsoft.com/office/drawing/2014/main" id="{937C9061-1189-48F8-AA7F-3E862A0FA958}"/>
+                  <a16:creationId xmlns:a16="http://schemas.microsoft.com/office/drawing/2014/main" id="{79E1956D-E1A6-4F7A-8AB1-75CD7C8C93A7}"/>
                 </a:ext>
               </a:extLst>
             </p:cNvPr>
@@ -4496,28 +5197,50 @@
             <p:nvPr/>
           </p:nvSpPr>
           <p:spPr>
-            <a:xfrm rot="5400000">
-              <a:off x="8427124" y="1377190"/>
-              <a:ext cx="1359668" cy="343171"/>
+            <a:xfrm>
+              <a:off x="-837092" y="1356364"/>
+              <a:ext cx="92654" cy="27541"/>
             </a:xfrm>
-            <a:prstGeom prst="rect">
-              <a:avLst/>
+            <a:prstGeom prst="rightArrow">
+              <a:avLst>
+                <a:gd name="adj1" fmla="val 50000"/>
+                <a:gd name="adj2" fmla="val 99023"/>
+              </a:avLst>
             </a:prstGeom>
+            <a:solidFill>
+              <a:schemeClr val="tx1"/>
+            </a:solidFill>
+            <a:ln>
+              <a:solidFill>
+                <a:schemeClr val="tx1"/>
+              </a:solidFill>
+            </a:ln>
           </p:spPr>
+          <p:style>
+            <a:lnRef idx="2">
+              <a:schemeClr val="dk1">
+                <a:shade val="50000"/>
+              </a:schemeClr>
+            </a:lnRef>
+            <a:fillRef idx="1">
+              <a:schemeClr val="dk1"/>
+            </a:fillRef>
+            <a:effectRef idx="0">
+              <a:schemeClr val="dk1"/>
+            </a:effectRef>
+            <a:fontRef idx="minor">
+              <a:schemeClr val="lt1"/>
+            </a:fontRef>
+          </p:style>
           <p:txBody>
-            <a:bodyPr wrap="none">
-              <a:spAutoFit/>
-            </a:bodyPr>
+            <a:bodyPr rtlCol="0" anchor="ctr"/>
             <a:lstStyle/>
             <a:p>
-              <a:r>
-                <a:rPr lang="en-US" altLang="zh-TW" sz="1630" dirty="0">
-                  <a:latin typeface="Times New Roman" panose="02020603050405020304" pitchFamily="18" charset="0"/>
-                  <a:cs typeface="Times New Roman" panose="02020603050405020304" pitchFamily="18" charset="0"/>
-                </a:rPr>
-                <a:t>arbitrary units</a:t>
-              </a:r>
-              <a:endParaRPr lang="zh-TW" altLang="en-US" sz="1630" dirty="0">
+              <a:pPr algn="ctr"/>
+              <a:endParaRPr lang="zh-TW" altLang="en-US" sz="1630">
+                <a:solidFill>
+                  <a:schemeClr val="tx1"/>
+                </a:solidFill>
                 <a:latin typeface="Times New Roman" panose="02020603050405020304" pitchFamily="18" charset="0"/>
                 <a:cs typeface="Times New Roman" panose="02020603050405020304" pitchFamily="18" charset="0"/>
               </a:endParaRPr>
@@ -4526,10 +5249,10 @@
         </p:sp>
         <p:sp>
           <p:nvSpPr>
-            <p:cNvPr id="85" name="矩形 84">
+            <p:cNvPr id="103" name="箭號: 向右 102">
               <a:extLst>
                 <a:ext uri="{FF2B5EF4-FFF2-40B4-BE49-F238E27FC236}">
-                  <a16:creationId xmlns:a16="http://schemas.microsoft.com/office/drawing/2014/main" id="{F4C1FE40-E458-4B65-9C8D-44E12C408F42}"/>
+                  <a16:creationId xmlns:a16="http://schemas.microsoft.com/office/drawing/2014/main" id="{7D1B38C6-6B33-43D0-9943-60E695DE8D9E}"/>
                 </a:ext>
               </a:extLst>
             </p:cNvPr>
@@ -4537,926 +5260,182 @@
             <p:nvPr/>
           </p:nvSpPr>
           <p:spPr>
-            <a:xfrm rot="5400000">
-              <a:off x="8427124" y="3599050"/>
-              <a:ext cx="1359668" cy="343171"/>
+            <a:xfrm rot="16200000">
+              <a:off x="-877012" y="1316853"/>
+              <a:ext cx="91764" cy="27808"/>
             </a:xfrm>
-            <a:prstGeom prst="rect">
-              <a:avLst/>
+            <a:prstGeom prst="rightArrow">
+              <a:avLst>
+                <a:gd name="adj1" fmla="val 50000"/>
+                <a:gd name="adj2" fmla="val 99023"/>
+              </a:avLst>
             </a:prstGeom>
+            <a:solidFill>
+              <a:schemeClr val="tx1"/>
+            </a:solidFill>
+            <a:ln>
+              <a:solidFill>
+                <a:schemeClr val="tx1"/>
+              </a:solidFill>
+            </a:ln>
           </p:spPr>
+          <p:style>
+            <a:lnRef idx="2">
+              <a:schemeClr val="dk1">
+                <a:shade val="50000"/>
+              </a:schemeClr>
+            </a:lnRef>
+            <a:fillRef idx="1">
+              <a:schemeClr val="dk1"/>
+            </a:fillRef>
+            <a:effectRef idx="0">
+              <a:schemeClr val="dk1"/>
+            </a:effectRef>
+            <a:fontRef idx="minor">
+              <a:schemeClr val="lt1"/>
+            </a:fontRef>
+          </p:style>
           <p:txBody>
-            <a:bodyPr wrap="none">
-              <a:spAutoFit/>
-            </a:bodyPr>
+            <a:bodyPr rtlCol="0" anchor="ctr"/>
             <a:lstStyle/>
             <a:p>
-              <a:r>
-                <a:rPr lang="en-US" altLang="zh-TW" sz="1630" dirty="0">
-                  <a:latin typeface="Times New Roman" panose="02020603050405020304" pitchFamily="18" charset="0"/>
-                  <a:cs typeface="Times New Roman" panose="02020603050405020304" pitchFamily="18" charset="0"/>
-                </a:rPr>
-                <a:t>arbitrary units</a:t>
-              </a:r>
+              <a:pPr algn="ctr"/>
               <a:endParaRPr lang="zh-TW" altLang="en-US" sz="1630" dirty="0">
+                <a:solidFill>
+                  <a:schemeClr val="tx1"/>
+                </a:solidFill>
                 <a:latin typeface="Times New Roman" panose="02020603050405020304" pitchFamily="18" charset="0"/>
                 <a:cs typeface="Times New Roman" panose="02020603050405020304" pitchFamily="18" charset="0"/>
               </a:endParaRPr>
             </a:p>
           </p:txBody>
         </p:sp>
-        <p:grpSp>
-          <p:nvGrpSpPr>
-            <p:cNvPr id="86" name="群組 85">
-              <a:extLst>
-                <a:ext uri="{FF2B5EF4-FFF2-40B4-BE49-F238E27FC236}">
-                  <a16:creationId xmlns:a16="http://schemas.microsoft.com/office/drawing/2014/main" id="{83B5F868-82DF-4B6B-A7DC-2FEC1536BE02}"/>
-                </a:ext>
-              </a:extLst>
-            </p:cNvPr>
-            <p:cNvGrpSpPr/>
-            <p:nvPr/>
-          </p:nvGrpSpPr>
-          <p:grpSpPr>
-            <a:xfrm>
-              <a:off x="766387" y="903481"/>
-              <a:ext cx="703953" cy="629156"/>
-              <a:chOff x="-1051588" y="926660"/>
-              <a:chExt cx="645259" cy="576699"/>
-            </a:xfrm>
-          </p:grpSpPr>
-          <mc:AlternateContent xmlns:mc="http://schemas.openxmlformats.org/markup-compatibility/2006" xmlns:a14="http://schemas.microsoft.com/office/drawing/2010/main">
-            <mc:Choice Requires="a14">
-              <p:sp>
-                <p:nvSpPr>
-                  <p:cNvPr id="87" name="文字方塊 86">
-                    <a:extLst>
-                      <a:ext uri="{FF2B5EF4-FFF2-40B4-BE49-F238E27FC236}">
-                        <a16:creationId xmlns:a16="http://schemas.microsoft.com/office/drawing/2014/main" id="{BD55CD46-F76A-40C8-8FEF-3E8617CDE787}"/>
-                      </a:ext>
-                    </a:extLst>
-                  </p:cNvPr>
-                  <p:cNvSpPr txBox="1"/>
-                  <p:nvPr/>
-                </p:nvSpPr>
-                <p:spPr>
-                  <a:xfrm>
-                    <a:off x="-1051588" y="926660"/>
-                    <a:ext cx="323387" cy="335658"/>
-                  </a:xfrm>
-                  <a:prstGeom prst="rect">
-                    <a:avLst/>
-                  </a:prstGeom>
-                  <a:noFill/>
-                </p:spPr>
-                <p:txBody>
-                  <a:bodyPr wrap="square" rtlCol="0">
-                    <a:spAutoFit/>
-                  </a:bodyPr>
-                  <a:lstStyle/>
-                  <a:p>
-                    <a:pPr/>
-                    <a14:m>
-                      <m:oMathPara xmlns:m="http://schemas.openxmlformats.org/officeDocument/2006/math">
-                        <m:oMathParaPr>
-                          <m:jc m:val="centerGroup"/>
-                        </m:oMathParaPr>
-                        <m:oMath xmlns:m="http://schemas.openxmlformats.org/officeDocument/2006/math">
-                          <m:sSub>
-                            <m:sSubPr>
-                              <m:ctrlPr>
-                                <a:rPr lang="en-US" altLang="zh-TW" sz="1630" b="1" i="1">
-                                  <a:latin typeface="Cambria Math" panose="02040503050406030204" pitchFamily="18" charset="0"/>
-                                </a:rPr>
-                              </m:ctrlPr>
-                            </m:sSubPr>
-                            <m:e>
-                              <m:r>
-                                <a:rPr lang="en-US" altLang="zh-TW" sz="1630" b="1" i="1">
-                                  <a:latin typeface="Cambria Math" panose="02040503050406030204" pitchFamily="18" charset="0"/>
-                                </a:rPr>
-                                <m:t>𝒒</m:t>
-                              </m:r>
-                            </m:e>
-                            <m:sub>
-                              <m:r>
-                                <a:rPr lang="en-US" altLang="zh-TW" sz="1630" b="1" i="1">
-                                  <a:latin typeface="Cambria Math" panose="02040503050406030204" pitchFamily="18" charset="0"/>
-                                </a:rPr>
-                                <m:t>𝒚</m:t>
-                              </m:r>
-                            </m:sub>
-                          </m:sSub>
-                        </m:oMath>
-                      </m:oMathPara>
-                    </a14:m>
-                    <a:endParaRPr lang="en-US" altLang="zh-TW" sz="1630" dirty="0">
-                      <a:latin typeface="Times New Roman" panose="02020603050405020304" pitchFamily="18" charset="0"/>
-                      <a:cs typeface="Times New Roman" panose="02020603050405020304" pitchFamily="18" charset="0"/>
-                    </a:endParaRPr>
-                  </a:p>
-                </p:txBody>
-              </p:sp>
-            </mc:Choice>
-            <mc:Fallback xmlns="">
-              <p:sp>
-                <p:nvSpPr>
-                  <p:cNvPr id="80" name="文字方塊 79">
-                    <a:extLst>
-                      <a:ext uri="{FF2B5EF4-FFF2-40B4-BE49-F238E27FC236}">
-                        <a16:creationId xmlns:a16="http://schemas.microsoft.com/office/drawing/2014/main" id="{0A2654E9-3006-4B11-B911-23ACB1C2DDC4}"/>
-                      </a:ext>
-                    </a:extLst>
-                  </p:cNvPr>
-                  <p:cNvSpPr txBox="1">
-                    <a:spLocks noRot="1" noChangeAspect="1" noMove="1" noResize="1" noEditPoints="1" noAdjustHandles="1" noChangeArrowheads="1" noChangeShapeType="1" noTextEdit="1"/>
-                  </p:cNvSpPr>
-                  <p:nvPr/>
-                </p:nvSpPr>
-                <p:spPr>
-                  <a:xfrm>
-                    <a:off x="-1051588" y="926660"/>
-                    <a:ext cx="323387" cy="335658"/>
-                  </a:xfrm>
-                  <a:prstGeom prst="rect">
-                    <a:avLst/>
-                  </a:prstGeom>
-                  <a:blipFill>
-                    <a:blip r:embed="rId19"/>
-                    <a:stretch>
-                      <a:fillRect r="-3448" b="-1667"/>
-                    </a:stretch>
-                  </a:blipFill>
-                </p:spPr>
-                <p:txBody>
-                  <a:bodyPr/>
-                  <a:lstStyle/>
-                  <a:p>
-                    <a:r>
-                      <a:rPr lang="zh-TW" altLang="en-US">
-                        <a:noFill/>
-                      </a:rPr>
-                      <a:t> </a:t>
-                    </a:r>
-                  </a:p>
-                </p:txBody>
-              </p:sp>
-            </mc:Fallback>
-          </mc:AlternateContent>
-          <mc:AlternateContent xmlns:mc="http://schemas.openxmlformats.org/markup-compatibility/2006" xmlns:a14="http://schemas.microsoft.com/office/drawing/2010/main">
-            <mc:Choice Requires="a14">
-              <p:sp>
-                <p:nvSpPr>
-                  <p:cNvPr id="96" name="文字方塊 95">
-                    <a:extLst>
-                      <a:ext uri="{FF2B5EF4-FFF2-40B4-BE49-F238E27FC236}">
-                        <a16:creationId xmlns:a16="http://schemas.microsoft.com/office/drawing/2014/main" id="{1F9BA172-17FD-49D5-A01A-92CA18058D98}"/>
-                      </a:ext>
-                    </a:extLst>
-                  </p:cNvPr>
-                  <p:cNvSpPr txBox="1"/>
-                  <p:nvPr/>
-                </p:nvSpPr>
-                <p:spPr>
-                  <a:xfrm>
-                    <a:off x="-813248" y="1188801"/>
-                    <a:ext cx="406919" cy="314558"/>
-                  </a:xfrm>
-                  <a:prstGeom prst="rect">
-                    <a:avLst/>
-                  </a:prstGeom>
-                  <a:noFill/>
-                </p:spPr>
-                <p:txBody>
-                  <a:bodyPr wrap="square" rtlCol="0">
-                    <a:spAutoFit/>
-                  </a:bodyPr>
-                  <a:lstStyle/>
-                  <a:p>
-                    <a:pPr/>
-                    <a14:m>
-                      <m:oMathPara xmlns:m="http://schemas.openxmlformats.org/officeDocument/2006/math">
-                        <m:oMathParaPr>
-                          <m:jc m:val="centerGroup"/>
-                        </m:oMathParaPr>
-                        <m:oMath xmlns:m="http://schemas.openxmlformats.org/officeDocument/2006/math">
-                          <m:sSub>
-                            <m:sSubPr>
-                              <m:ctrlPr>
-                                <a:rPr lang="en-US" altLang="zh-TW" sz="1630" b="1" i="1">
-                                  <a:latin typeface="Cambria Math" panose="02040503050406030204" pitchFamily="18" charset="0"/>
-                                </a:rPr>
-                              </m:ctrlPr>
-                            </m:sSubPr>
-                            <m:e>
-                              <m:r>
-                                <a:rPr lang="en-US" altLang="zh-TW" sz="1630" b="1" i="1">
-                                  <a:latin typeface="Cambria Math" panose="02040503050406030204" pitchFamily="18" charset="0"/>
-                                </a:rPr>
-                                <m:t>𝒒</m:t>
-                              </m:r>
-                            </m:e>
-                            <m:sub>
-                              <m:r>
-                                <a:rPr lang="en-US" altLang="zh-TW" sz="1630" b="1" i="1">
-                                  <a:latin typeface="Cambria Math" panose="02040503050406030204" pitchFamily="18" charset="0"/>
-                                </a:rPr>
-                                <m:t>𝒙</m:t>
-                              </m:r>
-                            </m:sub>
-                          </m:sSub>
-                        </m:oMath>
-                      </m:oMathPara>
-                    </a14:m>
-                    <a:endParaRPr lang="en-US" altLang="zh-TW" sz="1630" dirty="0">
-                      <a:latin typeface="Times New Roman" panose="02020603050405020304" pitchFamily="18" charset="0"/>
-                      <a:cs typeface="Times New Roman" panose="02020603050405020304" pitchFamily="18" charset="0"/>
-                    </a:endParaRPr>
-                  </a:p>
-                </p:txBody>
-              </p:sp>
-            </mc:Choice>
-            <mc:Fallback xmlns="">
-              <p:sp>
-                <p:nvSpPr>
-                  <p:cNvPr id="81" name="文字方塊 80">
-                    <a:extLst>
-                      <a:ext uri="{FF2B5EF4-FFF2-40B4-BE49-F238E27FC236}">
-                        <a16:creationId xmlns:a16="http://schemas.microsoft.com/office/drawing/2014/main" id="{47E81467-D25E-4BB7-94DE-E307D45DD949}"/>
-                      </a:ext>
-                    </a:extLst>
-                  </p:cNvPr>
-                  <p:cNvSpPr txBox="1">
-                    <a:spLocks noRot="1" noChangeAspect="1" noMove="1" noResize="1" noEditPoints="1" noAdjustHandles="1" noChangeArrowheads="1" noChangeShapeType="1" noTextEdit="1"/>
-                  </p:cNvSpPr>
-                  <p:nvPr/>
-                </p:nvSpPr>
-                <p:spPr>
-                  <a:xfrm>
-                    <a:off x="-813248" y="1188801"/>
-                    <a:ext cx="406919" cy="314558"/>
-                  </a:xfrm>
-                  <a:prstGeom prst="rect">
-                    <a:avLst/>
-                  </a:prstGeom>
-                  <a:blipFill>
-                    <a:blip r:embed="rId20"/>
-                    <a:stretch>
-                      <a:fillRect b="-5263"/>
-                    </a:stretch>
-                  </a:blipFill>
-                </p:spPr>
-                <p:txBody>
-                  <a:bodyPr/>
-                  <a:lstStyle/>
-                  <a:p>
-                    <a:r>
-                      <a:rPr lang="zh-TW" altLang="en-US">
-                        <a:noFill/>
-                      </a:rPr>
-                      <a:t> </a:t>
-                    </a:r>
-                  </a:p>
-                </p:txBody>
-              </p:sp>
-            </mc:Fallback>
-          </mc:AlternateContent>
-          <p:sp>
-            <p:nvSpPr>
-              <p:cNvPr id="97" name="箭號: 向右 96">
-                <a:extLst>
-                  <a:ext uri="{FF2B5EF4-FFF2-40B4-BE49-F238E27FC236}">
-                    <a16:creationId xmlns:a16="http://schemas.microsoft.com/office/drawing/2014/main" id="{2C7CA38B-E7B2-4225-B8BC-952574CCD2AC}"/>
-                  </a:ext>
-                </a:extLst>
-              </p:cNvPr>
-              <p:cNvSpPr/>
-              <p:nvPr/>
-            </p:nvSpPr>
-            <p:spPr>
-              <a:xfrm>
-                <a:off x="-837092" y="1356364"/>
-                <a:ext cx="92654" cy="27541"/>
-              </a:xfrm>
-              <a:prstGeom prst="rightArrow">
-                <a:avLst>
-                  <a:gd name="adj1" fmla="val 50000"/>
-                  <a:gd name="adj2" fmla="val 99023"/>
-                </a:avLst>
-              </a:prstGeom>
-              <a:solidFill>
-                <a:schemeClr val="tx1"/>
-              </a:solidFill>
-              <a:ln>
-                <a:solidFill>
-                  <a:schemeClr val="tx1"/>
-                </a:solidFill>
-              </a:ln>
-            </p:spPr>
-            <p:style>
-              <a:lnRef idx="2">
-                <a:schemeClr val="dk1">
-                  <a:shade val="50000"/>
-                </a:schemeClr>
-              </a:lnRef>
-              <a:fillRef idx="1">
-                <a:schemeClr val="dk1"/>
-              </a:fillRef>
-              <a:effectRef idx="0">
-                <a:schemeClr val="dk1"/>
-              </a:effectRef>
-              <a:fontRef idx="minor">
-                <a:schemeClr val="lt1"/>
-              </a:fontRef>
-            </p:style>
-            <p:txBody>
-              <a:bodyPr rtlCol="0" anchor="ctr"/>
-              <a:lstStyle/>
-              <a:p>
-                <a:pPr algn="ctr"/>
-                <a:endParaRPr lang="zh-TW" altLang="en-US" sz="1630">
-                  <a:solidFill>
-                    <a:schemeClr val="tx1"/>
-                  </a:solidFill>
-                  <a:latin typeface="Times New Roman" panose="02020603050405020304" pitchFamily="18" charset="0"/>
-                  <a:cs typeface="Times New Roman" panose="02020603050405020304" pitchFamily="18" charset="0"/>
-                </a:endParaRPr>
-              </a:p>
-            </p:txBody>
-          </p:sp>
-          <p:sp>
-            <p:nvSpPr>
-              <p:cNvPr id="98" name="箭號: 向右 97">
-                <a:extLst>
-                  <a:ext uri="{FF2B5EF4-FFF2-40B4-BE49-F238E27FC236}">
-                    <a16:creationId xmlns:a16="http://schemas.microsoft.com/office/drawing/2014/main" id="{03D676CE-2788-42E2-A47E-69212772F843}"/>
-                  </a:ext>
-                </a:extLst>
-              </p:cNvPr>
-              <p:cNvSpPr/>
-              <p:nvPr/>
-            </p:nvSpPr>
-            <p:spPr>
-              <a:xfrm rot="16200000">
-                <a:off x="-877012" y="1316853"/>
-                <a:ext cx="91764" cy="27808"/>
-              </a:xfrm>
-              <a:prstGeom prst="rightArrow">
-                <a:avLst>
-                  <a:gd name="adj1" fmla="val 50000"/>
-                  <a:gd name="adj2" fmla="val 99023"/>
-                </a:avLst>
-              </a:prstGeom>
-              <a:solidFill>
-                <a:schemeClr val="tx1"/>
-              </a:solidFill>
-              <a:ln>
-                <a:solidFill>
-                  <a:schemeClr val="tx1"/>
-                </a:solidFill>
-              </a:ln>
-            </p:spPr>
-            <p:style>
-              <a:lnRef idx="2">
-                <a:schemeClr val="dk1">
-                  <a:shade val="50000"/>
-                </a:schemeClr>
-              </a:lnRef>
-              <a:fillRef idx="1">
-                <a:schemeClr val="dk1"/>
-              </a:fillRef>
-              <a:effectRef idx="0">
-                <a:schemeClr val="dk1"/>
-              </a:effectRef>
-              <a:fontRef idx="minor">
-                <a:schemeClr val="lt1"/>
-              </a:fontRef>
-            </p:style>
-            <p:txBody>
-              <a:bodyPr rtlCol="0" anchor="ctr"/>
-              <a:lstStyle/>
-              <a:p>
-                <a:pPr algn="ctr"/>
-                <a:endParaRPr lang="zh-TW" altLang="en-US" sz="1630" dirty="0">
-                  <a:solidFill>
-                    <a:schemeClr val="tx1"/>
-                  </a:solidFill>
-                  <a:latin typeface="Times New Roman" panose="02020603050405020304" pitchFamily="18" charset="0"/>
-                  <a:cs typeface="Times New Roman" panose="02020603050405020304" pitchFamily="18" charset="0"/>
-                </a:endParaRPr>
-              </a:p>
-            </p:txBody>
-          </p:sp>
-        </p:grpSp>
-        <p:grpSp>
-          <p:nvGrpSpPr>
-            <p:cNvPr id="99" name="群組 98">
-              <a:extLst>
-                <a:ext uri="{FF2B5EF4-FFF2-40B4-BE49-F238E27FC236}">
-                  <a16:creationId xmlns:a16="http://schemas.microsoft.com/office/drawing/2014/main" id="{469F717A-C89F-4550-9B7B-B8F161D20D3D}"/>
-                </a:ext>
-              </a:extLst>
-            </p:cNvPr>
-            <p:cNvGrpSpPr/>
-            <p:nvPr/>
-          </p:nvGrpSpPr>
-          <p:grpSpPr>
-            <a:xfrm>
-              <a:off x="768697" y="3150014"/>
-              <a:ext cx="688366" cy="625691"/>
-              <a:chOff x="-1026188" y="931423"/>
-              <a:chExt cx="630972" cy="573523"/>
-            </a:xfrm>
-          </p:grpSpPr>
-          <mc:AlternateContent xmlns:mc="http://schemas.openxmlformats.org/markup-compatibility/2006" xmlns:a14="http://schemas.microsoft.com/office/drawing/2010/main">
-            <mc:Choice Requires="a14">
-              <p:sp>
-                <p:nvSpPr>
-                  <p:cNvPr id="100" name="文字方塊 99">
-                    <a:extLst>
-                      <a:ext uri="{FF2B5EF4-FFF2-40B4-BE49-F238E27FC236}">
-                        <a16:creationId xmlns:a16="http://schemas.microsoft.com/office/drawing/2014/main" id="{26274BA1-2423-4B88-BF19-FC08EEB0196B}"/>
-                      </a:ext>
-                    </a:extLst>
-                  </p:cNvPr>
-                  <p:cNvSpPr txBox="1"/>
-                  <p:nvPr/>
-                </p:nvSpPr>
-                <p:spPr>
-                  <a:xfrm>
-                    <a:off x="-1026188" y="931423"/>
-                    <a:ext cx="323387" cy="335658"/>
-                  </a:xfrm>
-                  <a:prstGeom prst="rect">
-                    <a:avLst/>
-                  </a:prstGeom>
-                  <a:noFill/>
-                </p:spPr>
-                <p:txBody>
-                  <a:bodyPr wrap="square" rtlCol="0">
-                    <a:spAutoFit/>
-                  </a:bodyPr>
-                  <a:lstStyle/>
-                  <a:p>
-                    <a:pPr/>
-                    <a14:m>
-                      <m:oMathPara xmlns:m="http://schemas.openxmlformats.org/officeDocument/2006/math">
-                        <m:oMathParaPr>
-                          <m:jc m:val="centerGroup"/>
-                        </m:oMathParaPr>
-                        <m:oMath xmlns:m="http://schemas.openxmlformats.org/officeDocument/2006/math">
-                          <m:sSub>
-                            <m:sSubPr>
-                              <m:ctrlPr>
-                                <a:rPr lang="en-US" altLang="zh-TW" sz="1630" b="1" i="1">
-                                  <a:latin typeface="Cambria Math" panose="02040503050406030204" pitchFamily="18" charset="0"/>
-                                </a:rPr>
-                              </m:ctrlPr>
-                            </m:sSubPr>
-                            <m:e>
-                              <m:r>
-                                <a:rPr lang="en-US" altLang="zh-TW" sz="1630" b="1" i="1">
-                                  <a:latin typeface="Cambria Math" panose="02040503050406030204" pitchFamily="18" charset="0"/>
-                                </a:rPr>
-                                <m:t>𝒒</m:t>
-                              </m:r>
-                            </m:e>
-                            <m:sub>
-                              <m:r>
-                                <a:rPr lang="en-US" altLang="zh-TW" sz="1630" b="1" i="1">
-                                  <a:latin typeface="Cambria Math" panose="02040503050406030204" pitchFamily="18" charset="0"/>
-                                </a:rPr>
-                                <m:t>𝒚</m:t>
-                              </m:r>
-                            </m:sub>
-                          </m:sSub>
-                        </m:oMath>
-                      </m:oMathPara>
-                    </a14:m>
-                    <a:endParaRPr lang="en-US" altLang="zh-TW" sz="1630" dirty="0">
-                      <a:latin typeface="Times New Roman" panose="02020603050405020304" pitchFamily="18" charset="0"/>
-                      <a:cs typeface="Times New Roman" panose="02020603050405020304" pitchFamily="18" charset="0"/>
-                    </a:endParaRPr>
-                  </a:p>
-                </p:txBody>
-              </p:sp>
-            </mc:Choice>
-            <mc:Fallback xmlns="">
-              <p:sp>
-                <p:nvSpPr>
-                  <p:cNvPr id="91" name="文字方塊 90">
-                    <a:extLst>
-                      <a:ext uri="{FF2B5EF4-FFF2-40B4-BE49-F238E27FC236}">
-                        <a16:creationId xmlns:a16="http://schemas.microsoft.com/office/drawing/2014/main" id="{48683BE6-7C91-45D6-99F7-2C602C34D8E5}"/>
-                      </a:ext>
-                    </a:extLst>
-                  </p:cNvPr>
-                  <p:cNvSpPr txBox="1">
-                    <a:spLocks noRot="1" noChangeAspect="1" noMove="1" noResize="1" noEditPoints="1" noAdjustHandles="1" noChangeArrowheads="1" noChangeShapeType="1" noTextEdit="1"/>
-                  </p:cNvSpPr>
-                  <p:nvPr/>
-                </p:nvSpPr>
-                <p:spPr>
-                  <a:xfrm>
-                    <a:off x="-1026188" y="931423"/>
-                    <a:ext cx="323387" cy="335658"/>
-                  </a:xfrm>
-                  <a:prstGeom prst="rect">
-                    <a:avLst/>
-                  </a:prstGeom>
-                  <a:blipFill>
-                    <a:blip r:embed="rId21"/>
-                    <a:stretch>
-                      <a:fillRect r="-3448"/>
-                    </a:stretch>
-                  </a:blipFill>
-                </p:spPr>
-                <p:txBody>
-                  <a:bodyPr/>
-                  <a:lstStyle/>
-                  <a:p>
-                    <a:r>
-                      <a:rPr lang="zh-TW" altLang="en-US">
-                        <a:noFill/>
-                      </a:rPr>
-                      <a:t> </a:t>
-                    </a:r>
-                  </a:p>
-                </p:txBody>
-              </p:sp>
-            </mc:Fallback>
-          </mc:AlternateContent>
-          <mc:AlternateContent xmlns:mc="http://schemas.openxmlformats.org/markup-compatibility/2006" xmlns:a14="http://schemas.microsoft.com/office/drawing/2010/main">
-            <mc:Choice Requires="a14">
-              <p:sp>
-                <p:nvSpPr>
-                  <p:cNvPr id="101" name="文字方塊 100">
-                    <a:extLst>
-                      <a:ext uri="{FF2B5EF4-FFF2-40B4-BE49-F238E27FC236}">
-                        <a16:creationId xmlns:a16="http://schemas.microsoft.com/office/drawing/2014/main" id="{E26D9775-85BB-4006-B91E-7B673CCCDDE1}"/>
-                      </a:ext>
-                    </a:extLst>
-                  </p:cNvPr>
-                  <p:cNvSpPr txBox="1"/>
-                  <p:nvPr/>
-                </p:nvSpPr>
-                <p:spPr>
-                  <a:xfrm>
-                    <a:off x="-802135" y="1190388"/>
-                    <a:ext cx="406919" cy="314558"/>
-                  </a:xfrm>
-                  <a:prstGeom prst="rect">
-                    <a:avLst/>
-                  </a:prstGeom>
-                  <a:noFill/>
-                </p:spPr>
-                <p:txBody>
-                  <a:bodyPr wrap="square" rtlCol="0">
-                    <a:spAutoFit/>
-                  </a:bodyPr>
-                  <a:lstStyle/>
-                  <a:p>
-                    <a:pPr/>
-                    <a14:m>
-                      <m:oMathPara xmlns:m="http://schemas.openxmlformats.org/officeDocument/2006/math">
-                        <m:oMathParaPr>
-                          <m:jc m:val="centerGroup"/>
-                        </m:oMathParaPr>
-                        <m:oMath xmlns:m="http://schemas.openxmlformats.org/officeDocument/2006/math">
-                          <m:sSub>
-                            <m:sSubPr>
-                              <m:ctrlPr>
-                                <a:rPr lang="en-US" altLang="zh-TW" sz="1630" b="1" i="1">
-                                  <a:latin typeface="Cambria Math" panose="02040503050406030204" pitchFamily="18" charset="0"/>
-                                </a:rPr>
-                              </m:ctrlPr>
-                            </m:sSubPr>
-                            <m:e>
-                              <m:r>
-                                <a:rPr lang="en-US" altLang="zh-TW" sz="1630" b="1" i="1">
-                                  <a:latin typeface="Cambria Math" panose="02040503050406030204" pitchFamily="18" charset="0"/>
-                                </a:rPr>
-                                <m:t>𝒒</m:t>
-                              </m:r>
-                            </m:e>
-                            <m:sub>
-                              <m:r>
-                                <a:rPr lang="en-US" altLang="zh-TW" sz="1630" b="1" i="1">
-                                  <a:latin typeface="Cambria Math" panose="02040503050406030204" pitchFamily="18" charset="0"/>
-                                </a:rPr>
-                                <m:t>𝒙</m:t>
-                              </m:r>
-                            </m:sub>
-                          </m:sSub>
-                        </m:oMath>
-                      </m:oMathPara>
-                    </a14:m>
-                    <a:endParaRPr lang="en-US" altLang="zh-TW" sz="1630" dirty="0">
-                      <a:latin typeface="Times New Roman" panose="02020603050405020304" pitchFamily="18" charset="0"/>
-                      <a:cs typeface="Times New Roman" panose="02020603050405020304" pitchFamily="18" charset="0"/>
-                    </a:endParaRPr>
-                  </a:p>
-                </p:txBody>
-              </p:sp>
-            </mc:Choice>
-            <mc:Fallback xmlns="">
-              <p:sp>
-                <p:nvSpPr>
-                  <p:cNvPr id="92" name="文字方塊 91">
-                    <a:extLst>
-                      <a:ext uri="{FF2B5EF4-FFF2-40B4-BE49-F238E27FC236}">
-                        <a16:creationId xmlns:a16="http://schemas.microsoft.com/office/drawing/2014/main" id="{9E8963A5-F392-4029-B309-DD9A00CE0887}"/>
-                      </a:ext>
-                    </a:extLst>
-                  </p:cNvPr>
-                  <p:cNvSpPr txBox="1">
-                    <a:spLocks noRot="1" noChangeAspect="1" noMove="1" noResize="1" noEditPoints="1" noAdjustHandles="1" noChangeArrowheads="1" noChangeShapeType="1" noTextEdit="1"/>
-                  </p:cNvSpPr>
-                  <p:nvPr/>
-                </p:nvSpPr>
-                <p:spPr>
-                  <a:xfrm>
-                    <a:off x="-802135" y="1190388"/>
-                    <a:ext cx="406919" cy="314558"/>
-                  </a:xfrm>
-                  <a:prstGeom prst="rect">
-                    <a:avLst/>
-                  </a:prstGeom>
-                  <a:blipFill>
-                    <a:blip r:embed="rId22"/>
-                    <a:stretch>
-                      <a:fillRect b="-5263"/>
-                    </a:stretch>
-                  </a:blipFill>
-                </p:spPr>
-                <p:txBody>
-                  <a:bodyPr/>
-                  <a:lstStyle/>
-                  <a:p>
-                    <a:r>
-                      <a:rPr lang="zh-TW" altLang="en-US">
-                        <a:noFill/>
-                      </a:rPr>
-                      <a:t> </a:t>
-                    </a:r>
-                  </a:p>
-                </p:txBody>
-              </p:sp>
-            </mc:Fallback>
-          </mc:AlternateContent>
-          <p:sp>
-            <p:nvSpPr>
-              <p:cNvPr id="102" name="箭號: 向右 101">
-                <a:extLst>
-                  <a:ext uri="{FF2B5EF4-FFF2-40B4-BE49-F238E27FC236}">
-                    <a16:creationId xmlns:a16="http://schemas.microsoft.com/office/drawing/2014/main" id="{79E1956D-E1A6-4F7A-8AB1-75CD7C8C93A7}"/>
-                  </a:ext>
-                </a:extLst>
-              </p:cNvPr>
-              <p:cNvSpPr/>
-              <p:nvPr/>
-            </p:nvSpPr>
-            <p:spPr>
-              <a:xfrm>
-                <a:off x="-837092" y="1356364"/>
-                <a:ext cx="92654" cy="27541"/>
-              </a:xfrm>
-              <a:prstGeom prst="rightArrow">
-                <a:avLst>
-                  <a:gd name="adj1" fmla="val 50000"/>
-                  <a:gd name="adj2" fmla="val 99023"/>
-                </a:avLst>
-              </a:prstGeom>
-              <a:solidFill>
-                <a:schemeClr val="tx1"/>
-              </a:solidFill>
-              <a:ln>
-                <a:solidFill>
-                  <a:schemeClr val="tx1"/>
-                </a:solidFill>
-              </a:ln>
-            </p:spPr>
-            <p:style>
-              <a:lnRef idx="2">
-                <a:schemeClr val="dk1">
-                  <a:shade val="50000"/>
-                </a:schemeClr>
-              </a:lnRef>
-              <a:fillRef idx="1">
-                <a:schemeClr val="dk1"/>
-              </a:fillRef>
-              <a:effectRef idx="0">
-                <a:schemeClr val="dk1"/>
-              </a:effectRef>
-              <a:fontRef idx="minor">
-                <a:schemeClr val="lt1"/>
-              </a:fontRef>
-            </p:style>
-            <p:txBody>
-              <a:bodyPr rtlCol="0" anchor="ctr"/>
-              <a:lstStyle/>
-              <a:p>
-                <a:pPr algn="ctr"/>
-                <a:endParaRPr lang="zh-TW" altLang="en-US" sz="1630">
-                  <a:solidFill>
-                    <a:schemeClr val="tx1"/>
-                  </a:solidFill>
-                  <a:latin typeface="Times New Roman" panose="02020603050405020304" pitchFamily="18" charset="0"/>
-                  <a:cs typeface="Times New Roman" panose="02020603050405020304" pitchFamily="18" charset="0"/>
-                </a:endParaRPr>
-              </a:p>
-            </p:txBody>
-          </p:sp>
-          <p:sp>
-            <p:nvSpPr>
-              <p:cNvPr id="103" name="箭號: 向右 102">
-                <a:extLst>
-                  <a:ext uri="{FF2B5EF4-FFF2-40B4-BE49-F238E27FC236}">
-                    <a16:creationId xmlns:a16="http://schemas.microsoft.com/office/drawing/2014/main" id="{7D1B38C6-6B33-43D0-9943-60E695DE8D9E}"/>
-                  </a:ext>
-                </a:extLst>
-              </p:cNvPr>
-              <p:cNvSpPr/>
-              <p:nvPr/>
-            </p:nvSpPr>
-            <p:spPr>
-              <a:xfrm rot="16200000">
-                <a:off x="-877012" y="1316853"/>
-                <a:ext cx="91764" cy="27808"/>
-              </a:xfrm>
-              <a:prstGeom prst="rightArrow">
-                <a:avLst>
-                  <a:gd name="adj1" fmla="val 50000"/>
-                  <a:gd name="adj2" fmla="val 99023"/>
-                </a:avLst>
-              </a:prstGeom>
-              <a:solidFill>
-                <a:schemeClr val="tx1"/>
-              </a:solidFill>
-              <a:ln>
-                <a:solidFill>
-                  <a:schemeClr val="tx1"/>
-                </a:solidFill>
-              </a:ln>
-            </p:spPr>
-            <p:style>
-              <a:lnRef idx="2">
-                <a:schemeClr val="dk1">
-                  <a:shade val="50000"/>
-                </a:schemeClr>
-              </a:lnRef>
-              <a:fillRef idx="1">
-                <a:schemeClr val="dk1"/>
-              </a:fillRef>
-              <a:effectRef idx="0">
-                <a:schemeClr val="dk1"/>
-              </a:effectRef>
-              <a:fontRef idx="minor">
-                <a:schemeClr val="lt1"/>
-              </a:fontRef>
-            </p:style>
-            <p:txBody>
-              <a:bodyPr rtlCol="0" anchor="ctr"/>
-              <a:lstStyle/>
-              <a:p>
-                <a:pPr algn="ctr"/>
-                <a:endParaRPr lang="zh-TW" altLang="en-US" sz="1630" dirty="0">
-                  <a:solidFill>
-                    <a:schemeClr val="tx1"/>
-                  </a:solidFill>
-                  <a:latin typeface="Times New Roman" panose="02020603050405020304" pitchFamily="18" charset="0"/>
-                  <a:cs typeface="Times New Roman" panose="02020603050405020304" pitchFamily="18" charset="0"/>
-                </a:endParaRPr>
-              </a:p>
-            </p:txBody>
-          </p:sp>
-        </p:grpSp>
-        <p:pic>
-          <p:nvPicPr>
-            <p:cNvPr id="104" name="圖片 103">
-              <a:extLst>
-                <a:ext uri="{FF2B5EF4-FFF2-40B4-BE49-F238E27FC236}">
-                  <a16:creationId xmlns:a16="http://schemas.microsoft.com/office/drawing/2014/main" id="{A5B50928-FDC6-4EBF-A8A3-16E712F3A6A5}"/>
-                </a:ext>
-              </a:extLst>
-            </p:cNvPr>
-            <p:cNvPicPr>
-              <a:picLocks noChangeAspect="1"/>
-            </p:cNvPicPr>
-            <p:nvPr/>
-          </p:nvPicPr>
-          <p:blipFill rotWithShape="1">
-            <a:blip r:embed="rId23">
-              <a:clrChange>
-                <a:clrFrom>
-                  <a:srgbClr val="FFFFFF"/>
-                </a:clrFrom>
-                <a:clrTo>
-                  <a:srgbClr val="FFFFFF">
-                    <a:alpha val="0"/>
-                  </a:srgbClr>
-                </a:clrTo>
-              </a:clrChange>
-              <a:extLst>
-                <a:ext uri="{28A0092B-C50C-407E-A947-70E740481C1C}">
-                  <a14:useLocalDpi xmlns:a14="http://schemas.microsoft.com/office/drawing/2010/main" val="0"/>
-                </a:ext>
-              </a:extLst>
-            </a:blip>
-            <a:srcRect l="85569" r="10158"/>
-            <a:stretch/>
-          </p:blipFill>
-          <p:spPr>
-            <a:xfrm>
-              <a:off x="8533264" y="652885"/>
-              <a:ext cx="432282" cy="1680954"/>
-            </a:xfrm>
-            <a:prstGeom prst="rect">
-              <a:avLst/>
-            </a:prstGeom>
-          </p:spPr>
-        </p:pic>
-        <p:pic>
-          <p:nvPicPr>
-            <p:cNvPr id="105" name="圖片 104">
-              <a:extLst>
-                <a:ext uri="{FF2B5EF4-FFF2-40B4-BE49-F238E27FC236}">
-                  <a16:creationId xmlns:a16="http://schemas.microsoft.com/office/drawing/2014/main" id="{6CBE0AD7-E644-49D6-BDC3-CC87DD7F37FE}"/>
-                </a:ext>
-              </a:extLst>
-            </p:cNvPr>
-            <p:cNvPicPr>
-              <a:picLocks noChangeAspect="1"/>
-            </p:cNvPicPr>
-            <p:nvPr/>
-          </p:nvPicPr>
-          <p:blipFill rotWithShape="1">
-            <a:blip r:embed="rId24">
-              <a:clrChange>
-                <a:clrFrom>
-                  <a:srgbClr val="FFFFFF"/>
-                </a:clrFrom>
-                <a:clrTo>
-                  <a:srgbClr val="FFFFFF">
-                    <a:alpha val="0"/>
-                  </a:srgbClr>
-                </a:clrTo>
-              </a:clrChange>
-            </a:blip>
-            <a:srcRect r="56352"/>
-            <a:stretch/>
-          </p:blipFill>
-          <p:spPr>
-            <a:xfrm>
-              <a:off x="210008" y="84702"/>
-              <a:ext cx="961568" cy="527212"/>
-            </a:xfrm>
-            <a:prstGeom prst="rect">
-              <a:avLst/>
-            </a:prstGeom>
-          </p:spPr>
-        </p:pic>
-        <p:pic>
-          <p:nvPicPr>
-            <p:cNvPr id="106" name="圖片 105">
-              <a:extLst>
-                <a:ext uri="{FF2B5EF4-FFF2-40B4-BE49-F238E27FC236}">
-                  <a16:creationId xmlns:a16="http://schemas.microsoft.com/office/drawing/2014/main" id="{4F4EC159-C11D-47CE-93AA-2A67ABB46FA7}"/>
-                </a:ext>
-              </a:extLst>
-            </p:cNvPr>
-            <p:cNvPicPr>
-              <a:picLocks noChangeAspect="1"/>
-            </p:cNvPicPr>
-            <p:nvPr/>
-          </p:nvPicPr>
-          <p:blipFill rotWithShape="1">
-            <a:blip r:embed="rId24">
-              <a:clrChange>
-                <a:clrFrom>
-                  <a:srgbClr val="FFFFFF"/>
-                </a:clrFrom>
-                <a:clrTo>
-                  <a:srgbClr val="FFFFFF">
-                    <a:alpha val="0"/>
-                  </a:srgbClr>
-                </a:clrTo>
-              </a:clrChange>
-            </a:blip>
-            <a:srcRect l="44978"/>
-            <a:stretch/>
-          </p:blipFill>
-          <p:spPr>
-            <a:xfrm>
-              <a:off x="210008" y="2362969"/>
-              <a:ext cx="1212131" cy="527212"/>
-            </a:xfrm>
-            <a:prstGeom prst="rect">
-              <a:avLst/>
-            </a:prstGeom>
-          </p:spPr>
-        </p:pic>
       </p:grpSp>
+      <p:pic>
+        <p:nvPicPr>
+          <p:cNvPr id="104" name="圖片 103">
+            <a:extLst>
+              <a:ext uri="{FF2B5EF4-FFF2-40B4-BE49-F238E27FC236}">
+                <a16:creationId xmlns:a16="http://schemas.microsoft.com/office/drawing/2014/main" id="{A5B50928-FDC6-4EBF-A8A3-16E712F3A6A5}"/>
+              </a:ext>
+            </a:extLst>
+          </p:cNvPr>
+          <p:cNvPicPr>
+            <a:picLocks noChangeAspect="1"/>
+          </p:cNvPicPr>
+          <p:nvPr/>
+        </p:nvPicPr>
+        <p:blipFill rotWithShape="1">
+          <a:blip r:embed="rId23">
+            <a:clrChange>
+              <a:clrFrom>
+                <a:srgbClr val="FFFFFF"/>
+              </a:clrFrom>
+              <a:clrTo>
+                <a:srgbClr val="FFFFFF">
+                  <a:alpha val="0"/>
+                </a:srgbClr>
+              </a:clrTo>
+            </a:clrChange>
+            <a:extLst>
+              <a:ext uri="{28A0092B-C50C-407E-A947-70E740481C1C}">
+                <a14:useLocalDpi xmlns:a14="http://schemas.microsoft.com/office/drawing/2010/main" val="0"/>
+              </a:ext>
+            </a:extLst>
+          </a:blip>
+          <a:srcRect l="85569" r="10158"/>
+          <a:stretch/>
+        </p:blipFill>
+        <p:spPr>
+          <a:xfrm>
+            <a:off x="8743192" y="604980"/>
+            <a:ext cx="432282" cy="1680954"/>
+          </a:xfrm>
+          <a:prstGeom prst="rect">
+            <a:avLst/>
+          </a:prstGeom>
+        </p:spPr>
+      </p:pic>
+      <p:pic>
+        <p:nvPicPr>
+          <p:cNvPr id="105" name="圖片 104">
+            <a:extLst>
+              <a:ext uri="{FF2B5EF4-FFF2-40B4-BE49-F238E27FC236}">
+                <a16:creationId xmlns:a16="http://schemas.microsoft.com/office/drawing/2014/main" id="{6CBE0AD7-E644-49D6-BDC3-CC87DD7F37FE}"/>
+              </a:ext>
+            </a:extLst>
+          </p:cNvPr>
+          <p:cNvPicPr>
+            <a:picLocks noChangeAspect="1"/>
+          </p:cNvPicPr>
+          <p:nvPr/>
+        </p:nvPicPr>
+        <p:blipFill rotWithShape="1">
+          <a:blip r:embed="rId24">
+            <a:clrChange>
+              <a:clrFrom>
+                <a:srgbClr val="FFFFFF"/>
+              </a:clrFrom>
+              <a:clrTo>
+                <a:srgbClr val="FFFFFF">
+                  <a:alpha val="0"/>
+                </a:srgbClr>
+              </a:clrTo>
+            </a:clrChange>
+          </a:blip>
+          <a:srcRect r="56352"/>
+          <a:stretch/>
+        </p:blipFill>
+        <p:spPr>
+          <a:xfrm>
+            <a:off x="419936" y="36797"/>
+            <a:ext cx="961568" cy="527212"/>
+          </a:xfrm>
+          <a:prstGeom prst="rect">
+            <a:avLst/>
+          </a:prstGeom>
+        </p:spPr>
+      </p:pic>
+      <p:pic>
+        <p:nvPicPr>
+          <p:cNvPr id="106" name="圖片 105">
+            <a:extLst>
+              <a:ext uri="{FF2B5EF4-FFF2-40B4-BE49-F238E27FC236}">
+                <a16:creationId xmlns:a16="http://schemas.microsoft.com/office/drawing/2014/main" id="{4F4EC159-C11D-47CE-93AA-2A67ABB46FA7}"/>
+              </a:ext>
+            </a:extLst>
+          </p:cNvPr>
+          <p:cNvPicPr>
+            <a:picLocks noChangeAspect="1"/>
+          </p:cNvPicPr>
+          <p:nvPr/>
+        </p:nvPicPr>
+        <p:blipFill rotWithShape="1">
+          <a:blip r:embed="rId24">
+            <a:clrChange>
+              <a:clrFrom>
+                <a:srgbClr val="FFFFFF"/>
+              </a:clrFrom>
+              <a:clrTo>
+                <a:srgbClr val="FFFFFF">
+                  <a:alpha val="0"/>
+                </a:srgbClr>
+              </a:clrTo>
+            </a:clrChange>
+          </a:blip>
+          <a:srcRect l="44978"/>
+          <a:stretch/>
+        </p:blipFill>
+        <p:spPr>
+          <a:xfrm>
+            <a:off x="419936" y="2315064"/>
+            <a:ext cx="1212131" cy="527212"/>
+          </a:xfrm>
+          <a:prstGeom prst="rect">
+            <a:avLst/>
+          </a:prstGeom>
+        </p:spPr>
+      </p:pic>
     </p:spTree>
     <p:extLst>
       <p:ext uri="{BB962C8B-B14F-4D97-AF65-F5344CB8AC3E}">
@@ -5795,8 +5774,8 @@
           </a:p>
         </p:txBody>
       </p:sp>
-      <mc:AlternateContent xmlns:mc="http://schemas.openxmlformats.org/markup-compatibility/2006">
-        <mc:Choice xmlns:a14="http://schemas.microsoft.com/office/drawing/2010/main" Requires="a14">
+      <mc:AlternateContent xmlns:mc="http://schemas.openxmlformats.org/markup-compatibility/2006" xmlns:a14="http://schemas.microsoft.com/office/drawing/2010/main">
+        <mc:Choice Requires="a14">
           <p:sp>
             <p:nvSpPr>
               <p:cNvPr id="46" name="矩形 45">
@@ -5873,7 +5852,7 @@
             </p:txBody>
           </p:sp>
         </mc:Choice>
-        <mc:Fallback>
+        <mc:Fallback xmlns="">
           <p:sp>
             <p:nvSpPr>
               <p:cNvPr id="46" name="矩形 45">
@@ -5918,8 +5897,8 @@
           </p:sp>
         </mc:Fallback>
       </mc:AlternateContent>
-      <mc:AlternateContent xmlns:mc="http://schemas.openxmlformats.org/markup-compatibility/2006">
-        <mc:Choice xmlns:a14="http://schemas.microsoft.com/office/drawing/2010/main" Requires="a14">
+      <mc:AlternateContent xmlns:mc="http://schemas.openxmlformats.org/markup-compatibility/2006" xmlns:a14="http://schemas.microsoft.com/office/drawing/2010/main">
+        <mc:Choice Requires="a14">
           <p:sp>
             <p:nvSpPr>
               <p:cNvPr id="53" name="矩形 52">
@@ -5996,7 +5975,7 @@
             </p:txBody>
           </p:sp>
         </mc:Choice>
-        <mc:Fallback>
+        <mc:Fallback xmlns="">
           <p:sp>
             <p:nvSpPr>
               <p:cNvPr id="53" name="矩形 52">
@@ -6061,8 +6040,8 @@
             <a:chExt cx="584143" cy="524314"/>
           </a:xfrm>
         </p:grpSpPr>
-        <mc:AlternateContent xmlns:mc="http://schemas.openxmlformats.org/markup-compatibility/2006">
-          <mc:Choice xmlns:a14="http://schemas.microsoft.com/office/drawing/2010/main" Requires="a14">
+        <mc:AlternateContent xmlns:mc="http://schemas.openxmlformats.org/markup-compatibility/2006" xmlns:a14="http://schemas.microsoft.com/office/drawing/2010/main">
+          <mc:Choice Requires="a14">
             <p:sp>
               <p:nvSpPr>
                 <p:cNvPr id="87" name="文字方塊 86">
@@ -6134,7 +6113,7 @@
               </p:txBody>
             </p:sp>
           </mc:Choice>
-          <mc:Fallback>
+          <mc:Fallback xmlns="">
             <p:sp>
               <p:nvSpPr>
                 <p:cNvPr id="87" name="文字方塊 86">
@@ -6444,8 +6423,8 @@
             <a:chExt cx="569856" cy="512407"/>
           </a:xfrm>
         </p:grpSpPr>
-        <mc:AlternateContent xmlns:mc="http://schemas.openxmlformats.org/markup-compatibility/2006">
-          <mc:Choice xmlns:a14="http://schemas.microsoft.com/office/drawing/2010/main" Requires="a14">
+        <mc:AlternateContent xmlns:mc="http://schemas.openxmlformats.org/markup-compatibility/2006" xmlns:a14="http://schemas.microsoft.com/office/drawing/2010/main">
+          <mc:Choice Requires="a14">
             <p:sp>
               <p:nvSpPr>
                 <p:cNvPr id="100" name="文字方塊 99">
@@ -6517,7 +6496,7 @@
               </p:txBody>
             </p:sp>
           </mc:Choice>
-          <mc:Fallback>
+          <mc:Fallback xmlns="">
             <p:sp>
               <p:nvSpPr>
                 <p:cNvPr id="100" name="文字方塊 99">
@@ -7488,8 +7467,8 @@
           </a:prstGeom>
         </p:spPr>
       </p:pic>
-      <mc:AlternateContent xmlns:mc="http://schemas.openxmlformats.org/markup-compatibility/2006">
-        <mc:Choice xmlns:a14="http://schemas.microsoft.com/office/drawing/2010/main" Requires="a14">
+      <mc:AlternateContent xmlns:mc="http://schemas.openxmlformats.org/markup-compatibility/2006" xmlns:a14="http://schemas.microsoft.com/office/drawing/2010/main">
+        <mc:Choice Requires="a14">
           <p:sp>
             <p:nvSpPr>
               <p:cNvPr id="47" name="矩形 46">
@@ -7541,7 +7520,7 @@
             </p:txBody>
           </p:sp>
         </mc:Choice>
-        <mc:Fallback>
+        <mc:Fallback xmlns="">
           <p:sp>
             <p:nvSpPr>
               <p:cNvPr id="47" name="矩形 46">
@@ -7586,8 +7565,8 @@
           </p:sp>
         </mc:Fallback>
       </mc:AlternateContent>
-      <mc:AlternateContent xmlns:mc="http://schemas.openxmlformats.org/markup-compatibility/2006">
-        <mc:Choice xmlns:a14="http://schemas.microsoft.com/office/drawing/2010/main" Requires="a14">
+      <mc:AlternateContent xmlns:mc="http://schemas.openxmlformats.org/markup-compatibility/2006" xmlns:a14="http://schemas.microsoft.com/office/drawing/2010/main">
+        <mc:Choice Requires="a14">
           <p:sp>
             <p:nvSpPr>
               <p:cNvPr id="49" name="矩形 48">
@@ -7639,7 +7618,7 @@
             </p:txBody>
           </p:sp>
         </mc:Choice>
-        <mc:Fallback>
+        <mc:Fallback xmlns="">
           <p:sp>
             <p:nvSpPr>
               <p:cNvPr id="49" name="矩形 48">
@@ -7684,8 +7663,8 @@
           </p:sp>
         </mc:Fallback>
       </mc:AlternateContent>
-      <mc:AlternateContent xmlns:mc="http://schemas.openxmlformats.org/markup-compatibility/2006">
-        <mc:Choice xmlns:a14="http://schemas.microsoft.com/office/drawing/2010/main" Requires="a14">
+      <mc:AlternateContent xmlns:mc="http://schemas.openxmlformats.org/markup-compatibility/2006" xmlns:a14="http://schemas.microsoft.com/office/drawing/2010/main">
+        <mc:Choice Requires="a14">
           <p:sp>
             <p:nvSpPr>
               <p:cNvPr id="50" name="矩形 49">
@@ -7737,7 +7716,7 @@
             </p:txBody>
           </p:sp>
         </mc:Choice>
-        <mc:Fallback>
+        <mc:Fallback xmlns="">
           <p:sp>
             <p:nvSpPr>
               <p:cNvPr id="50" name="矩形 49">
@@ -7782,8 +7761,8 @@
           </p:sp>
         </mc:Fallback>
       </mc:AlternateContent>
-      <mc:AlternateContent xmlns:mc="http://schemas.openxmlformats.org/markup-compatibility/2006">
-        <mc:Choice xmlns:a14="http://schemas.microsoft.com/office/drawing/2010/main" Requires="a14">
+      <mc:AlternateContent xmlns:mc="http://schemas.openxmlformats.org/markup-compatibility/2006" xmlns:a14="http://schemas.microsoft.com/office/drawing/2010/main">
+        <mc:Choice Requires="a14">
           <p:sp>
             <p:nvSpPr>
               <p:cNvPr id="51" name="矩形 50">
@@ -7835,7 +7814,7 @@
             </p:txBody>
           </p:sp>
         </mc:Choice>
-        <mc:Fallback>
+        <mc:Fallback xmlns="">
           <p:sp>
             <p:nvSpPr>
               <p:cNvPr id="51" name="矩形 50">
@@ -7880,8 +7859,8 @@
           </p:sp>
         </mc:Fallback>
       </mc:AlternateContent>
-      <mc:AlternateContent xmlns:mc="http://schemas.openxmlformats.org/markup-compatibility/2006">
-        <mc:Choice xmlns:a14="http://schemas.microsoft.com/office/drawing/2010/main" Requires="a14">
+      <mc:AlternateContent xmlns:mc="http://schemas.openxmlformats.org/markup-compatibility/2006" xmlns:a14="http://schemas.microsoft.com/office/drawing/2010/main">
+        <mc:Choice Requires="a14">
           <p:sp>
             <p:nvSpPr>
               <p:cNvPr id="52" name="矩形 51">
@@ -7933,7 +7912,7 @@
             </p:txBody>
           </p:sp>
         </mc:Choice>
-        <mc:Fallback>
+        <mc:Fallback xmlns="">
           <p:sp>
             <p:nvSpPr>
               <p:cNvPr id="52" name="矩形 51">
@@ -7978,8 +7957,8 @@
           </p:sp>
         </mc:Fallback>
       </mc:AlternateContent>
-      <mc:AlternateContent xmlns:mc="http://schemas.openxmlformats.org/markup-compatibility/2006">
-        <mc:Choice xmlns:a14="http://schemas.microsoft.com/office/drawing/2010/main" Requires="a14">
+      <mc:AlternateContent xmlns:mc="http://schemas.openxmlformats.org/markup-compatibility/2006" xmlns:a14="http://schemas.microsoft.com/office/drawing/2010/main">
+        <mc:Choice Requires="a14">
           <p:sp>
             <p:nvSpPr>
               <p:cNvPr id="54" name="矩形 53">
@@ -8031,7 +8010,7 @@
             </p:txBody>
           </p:sp>
         </mc:Choice>
-        <mc:Fallback>
+        <mc:Fallback xmlns="">
           <p:sp>
             <p:nvSpPr>
               <p:cNvPr id="54" name="矩形 53">
@@ -8076,8 +8055,8 @@
           </p:sp>
         </mc:Fallback>
       </mc:AlternateContent>
-      <mc:AlternateContent xmlns:mc="http://schemas.openxmlformats.org/markup-compatibility/2006">
-        <mc:Choice xmlns:a14="http://schemas.microsoft.com/office/drawing/2010/main" Requires="a14">
+      <mc:AlternateContent xmlns:mc="http://schemas.openxmlformats.org/markup-compatibility/2006" xmlns:a14="http://schemas.microsoft.com/office/drawing/2010/main">
+        <mc:Choice Requires="a14">
           <p:sp>
             <p:nvSpPr>
               <p:cNvPr id="56" name="矩形 55">
@@ -8129,7 +8108,7 @@
             </p:txBody>
           </p:sp>
         </mc:Choice>
-        <mc:Fallback>
+        <mc:Fallback xmlns="">
           <p:sp>
             <p:nvSpPr>
               <p:cNvPr id="56" name="矩形 55">
@@ -8174,8 +8153,8 @@
           </p:sp>
         </mc:Fallback>
       </mc:AlternateContent>
-      <mc:AlternateContent xmlns:mc="http://schemas.openxmlformats.org/markup-compatibility/2006">
-        <mc:Choice xmlns:a14="http://schemas.microsoft.com/office/drawing/2010/main" Requires="a14">
+      <mc:AlternateContent xmlns:mc="http://schemas.openxmlformats.org/markup-compatibility/2006" xmlns:a14="http://schemas.microsoft.com/office/drawing/2010/main">
+        <mc:Choice Requires="a14">
           <p:sp>
             <p:nvSpPr>
               <p:cNvPr id="57" name="矩形 56">
@@ -8227,7 +8206,7 @@
             </p:txBody>
           </p:sp>
         </mc:Choice>
-        <mc:Fallback>
+        <mc:Fallback xmlns="">
           <p:sp>
             <p:nvSpPr>
               <p:cNvPr id="57" name="矩形 56">
@@ -8272,8 +8251,8 @@
           </p:sp>
         </mc:Fallback>
       </mc:AlternateContent>
-      <mc:AlternateContent xmlns:mc="http://schemas.openxmlformats.org/markup-compatibility/2006">
-        <mc:Choice xmlns:a14="http://schemas.microsoft.com/office/drawing/2010/main" Requires="a14">
+      <mc:AlternateContent xmlns:mc="http://schemas.openxmlformats.org/markup-compatibility/2006" xmlns:a14="http://schemas.microsoft.com/office/drawing/2010/main">
+        <mc:Choice Requires="a14">
           <p:sp>
             <p:nvSpPr>
               <p:cNvPr id="82" name="矩形 81">
@@ -8325,7 +8304,7 @@
             </p:txBody>
           </p:sp>
         </mc:Choice>
-        <mc:Fallback>
+        <mc:Fallback xmlns="">
           <p:sp>
             <p:nvSpPr>
               <p:cNvPr id="82" name="矩形 81">
@@ -8370,8 +8349,8 @@
           </p:sp>
         </mc:Fallback>
       </mc:AlternateContent>
-      <mc:AlternateContent xmlns:mc="http://schemas.openxmlformats.org/markup-compatibility/2006">
-        <mc:Choice xmlns:a14="http://schemas.microsoft.com/office/drawing/2010/main" Requires="a14">
+      <mc:AlternateContent xmlns:mc="http://schemas.openxmlformats.org/markup-compatibility/2006" xmlns:a14="http://schemas.microsoft.com/office/drawing/2010/main">
+        <mc:Choice Requires="a14">
           <p:sp>
             <p:nvSpPr>
               <p:cNvPr id="83" name="矩形 82">
@@ -8423,7 +8402,7 @@
             </p:txBody>
           </p:sp>
         </mc:Choice>
-        <mc:Fallback>
+        <mc:Fallback xmlns="">
           <p:sp>
             <p:nvSpPr>
               <p:cNvPr id="83" name="矩形 82">
